--- a/downloads/Cologuard_Rescreen_Concept_v3.pptx
+++ b/downloads/Cologuard_Rescreen_Concept_v3.pptx
@@ -1773,7 +1773,7 @@
         </p:nvSpPr>
         <p:spPr>
           <a:xfrm>
-            <a:off x="457200" y="1234440"/>
+            <a:off x="685800" y="1325880"/>
             <a:ext cx="2103120" cy="365760"/>
           </a:xfrm>
           <a:prstGeom prst="roundRect">
@@ -1800,7 +1800,7 @@
         </p:nvSpPr>
         <p:spPr>
           <a:xfrm>
-            <a:off x="457200" y="1234440"/>
+            <a:off x="685800" y="1325880"/>
             <a:ext cx="2103120" cy="365760"/>
           </a:xfrm>
           <a:prstGeom prst="rect">
@@ -1839,8 +1839,8 @@
         </p:nvSpPr>
         <p:spPr>
           <a:xfrm>
-            <a:off x="457200" y="1783080"/>
-            <a:ext cx="10515600" cy="1463040"/>
+            <a:off x="685800" y="1874520"/>
+            <a:ext cx="10820095" cy="1371600"/>
           </a:xfrm>
           <a:prstGeom prst="rect">
             <a:avLst/>
@@ -1878,8 +1878,8 @@
         </p:nvSpPr>
         <p:spPr>
           <a:xfrm>
-            <a:off x="457200" y="3383280"/>
-            <a:ext cx="7863840" cy="914400"/>
+            <a:off x="685800" y="3429000"/>
+            <a:ext cx="7680960" cy="914400"/>
           </a:xfrm>
           <a:prstGeom prst="rect">
             <a:avLst/>
@@ -1917,7 +1917,7 @@
         </p:nvSpPr>
         <p:spPr>
           <a:xfrm>
-            <a:off x="457200" y="4572000"/>
+            <a:off x="685800" y="4572000"/>
             <a:ext cx="1691640" cy="420624"/>
           </a:xfrm>
           <a:prstGeom prst="roundRect">
@@ -1944,7 +1944,7 @@
         </p:nvSpPr>
         <p:spPr>
           <a:xfrm>
-            <a:off x="621792" y="4709160"/>
+            <a:off x="850392" y="4709160"/>
             <a:ext cx="146304" cy="146304"/>
           </a:xfrm>
           <a:prstGeom prst="ellipse">
@@ -1969,7 +1969,7 @@
         </p:nvSpPr>
         <p:spPr>
           <a:xfrm>
-            <a:off x="859536" y="4572000"/>
+            <a:off x="1088136" y="4572000"/>
             <a:ext cx="1234440" cy="420624"/>
           </a:xfrm>
           <a:prstGeom prst="rect">
@@ -2008,7 +2008,7 @@
         </p:nvSpPr>
         <p:spPr>
           <a:xfrm>
-            <a:off x="2331720" y="4572000"/>
+            <a:off x="2606040" y="4572000"/>
             <a:ext cx="1691640" cy="420624"/>
           </a:xfrm>
           <a:prstGeom prst="roundRect">
@@ -2035,7 +2035,7 @@
         </p:nvSpPr>
         <p:spPr>
           <a:xfrm>
-            <a:off x="2496312" y="4709160"/>
+            <a:off x="2770632" y="4709160"/>
             <a:ext cx="146304" cy="146304"/>
           </a:xfrm>
           <a:prstGeom prst="ellipse">
@@ -2060,7 +2060,7 @@
         </p:nvSpPr>
         <p:spPr>
           <a:xfrm>
-            <a:off x="2734056" y="4572000"/>
+            <a:off x="3008376" y="4572000"/>
             <a:ext cx="1234440" cy="420624"/>
           </a:xfrm>
           <a:prstGeom prst="rect">
@@ -2099,7 +2099,7 @@
         </p:nvSpPr>
         <p:spPr>
           <a:xfrm>
-            <a:off x="4206240" y="4572000"/>
+            <a:off x="4526280" y="4572000"/>
             <a:ext cx="1691640" cy="420624"/>
           </a:xfrm>
           <a:prstGeom prst="roundRect">
@@ -2126,7 +2126,7 @@
         </p:nvSpPr>
         <p:spPr>
           <a:xfrm>
-            <a:off x="4370832" y="4709160"/>
+            <a:off x="4690872" y="4709160"/>
             <a:ext cx="146304" cy="146304"/>
           </a:xfrm>
           <a:prstGeom prst="ellipse">
@@ -2151,7 +2151,7 @@
         </p:nvSpPr>
         <p:spPr>
           <a:xfrm>
-            <a:off x="4608576" y="4572000"/>
+            <a:off x="4928616" y="4572000"/>
             <a:ext cx="1234440" cy="420624"/>
           </a:xfrm>
           <a:prstGeom prst="rect">
@@ -2190,7 +2190,7 @@
         </p:nvSpPr>
         <p:spPr>
           <a:xfrm>
-            <a:off x="457200" y="5989320"/>
+            <a:off x="685800" y="5943600"/>
             <a:ext cx="7315200" cy="320040"/>
           </a:xfrm>
           <a:prstGeom prst="rect">
@@ -2261,8 +2261,8 @@
         </p:nvSpPr>
         <p:spPr>
           <a:xfrm>
-            <a:off x="457200" y="384048"/>
-            <a:ext cx="8686800" cy="274320"/>
+            <a:off x="685800" y="502920"/>
+            <a:ext cx="8229600" cy="274320"/>
           </a:xfrm>
           <a:prstGeom prst="rect">
             <a:avLst/>
@@ -2300,8 +2300,8 @@
         </p:nvSpPr>
         <p:spPr>
           <a:xfrm>
-            <a:off x="457200" y="676656"/>
-            <a:ext cx="11274552" cy="868680"/>
+            <a:off x="685800" y="804672"/>
+            <a:ext cx="10820095" cy="566928"/>
           </a:xfrm>
           <a:prstGeom prst="rect">
             <a:avLst/>
@@ -2320,7 +2320,7 @@
               <a:buNone/>
             </a:pPr>
             <a:r>
-              <a:rPr lang="en-US" sz="3000" b="1" dirty="0">
+              <a:rPr lang="en-US" sz="2800" b="1" dirty="0">
                 <a:solidFill>
                   <a:srgbClr val="222731"/>
                 </a:solidFill>
@@ -2328,9 +2328,9 @@
                 <a:ea typeface="Bricolage Grotesque" pitchFamily="34" charset="-122"/>
                 <a:cs typeface="Bricolage Grotesque" pitchFamily="34" charset="-120"/>
               </a:rPr>
-              <a:t>We expect the connected journey to lift on-time rescreen and cut patient effort</a:t>
-            </a:r>
-            <a:endParaRPr lang="en-US" sz="3000" dirty="0"/>
+              <a:t>More on-time rescreens, less patient effort</a:t>
+            </a:r>
+            <a:endParaRPr lang="en-US" sz="2800" dirty="0"/>
           </a:p>
         </p:txBody>
       </p:sp>
@@ -2342,7 +2342,7 @@
         </p:nvSpPr>
         <p:spPr>
           <a:xfrm>
-            <a:off x="10177272" y="384048"/>
+            <a:off x="9951415" y="475488"/>
             <a:ext cx="1554480" cy="292608"/>
           </a:xfrm>
           <a:prstGeom prst="roundRect">
@@ -2369,7 +2369,7 @@
         </p:nvSpPr>
         <p:spPr>
           <a:xfrm>
-            <a:off x="10177272" y="384048"/>
+            <a:off x="9951415" y="475488"/>
             <a:ext cx="1554480" cy="292608"/>
           </a:xfrm>
           <a:prstGeom prst="rect">
@@ -2408,12 +2408,12 @@
         </p:nvSpPr>
         <p:spPr>
           <a:xfrm>
-            <a:off x="457200" y="1783080"/>
-            <a:ext cx="2613584" cy="3108960"/>
+            <a:off x="685800" y="1691640"/>
+            <a:ext cx="2499284" cy="2697480"/>
           </a:xfrm>
           <a:prstGeom prst="roundRect">
             <a:avLst>
-              <a:gd name="adj" fmla="val 4198"/>
+              <a:gd name="adj" fmla="val 4390"/>
             </a:avLst>
           </a:prstGeom>
           <a:solidFill>
@@ -2435,8 +2435,8 @@
         </p:nvSpPr>
         <p:spPr>
           <a:xfrm>
-            <a:off x="731520" y="2057400"/>
-            <a:ext cx="2064944" cy="548640"/>
+            <a:off x="1051560" y="2057400"/>
+            <a:ext cx="1767764" cy="457200"/>
           </a:xfrm>
           <a:prstGeom prst="rect">
             <a:avLst/>
@@ -2452,7 +2452,7 @@
               <a:buNone/>
             </a:pPr>
             <a:r>
-              <a:rPr lang="en-US" sz="1350" b="1" dirty="0">
+              <a:rPr lang="en-US" sz="1200" b="1" dirty="0">
                 <a:solidFill>
                   <a:srgbClr val="63666A"/>
                 </a:solidFill>
@@ -2462,7 +2462,7 @@
               </a:rPr>
               <a:t>On-time rescreen rate</a:t>
             </a:r>
-            <a:endParaRPr lang="en-US" sz="1350" dirty="0"/>
+            <a:endParaRPr lang="en-US" sz="1200" dirty="0"/>
           </a:p>
         </p:txBody>
       </p:sp>
@@ -2474,8 +2474,8 @@
         </p:nvSpPr>
         <p:spPr>
           <a:xfrm>
-            <a:off x="731520" y="2697480"/>
-            <a:ext cx="2064944" cy="777240"/>
+            <a:off x="1051560" y="2560320"/>
+            <a:ext cx="1767764" cy="685800"/>
           </a:xfrm>
           <a:prstGeom prst="rect">
             <a:avLst/>
@@ -2491,7 +2491,7 @@
               <a:buNone/>
             </a:pPr>
             <a:r>
-              <a:rPr lang="en-US" sz="3200" b="1" dirty="0">
+              <a:rPr lang="en-US" sz="2600" b="1" dirty="0">
                 <a:solidFill>
                   <a:srgbClr val="2E4AED"/>
                 </a:solidFill>
@@ -2501,7 +2501,7 @@
               </a:rPr>
               <a:t>+12 pts</a:t>
             </a:r>
-            <a:endParaRPr lang="en-US" sz="3200" dirty="0"/>
+            <a:endParaRPr lang="en-US" sz="2600" dirty="0"/>
           </a:p>
         </p:txBody>
       </p:sp>
@@ -2513,7 +2513,7 @@
         </p:nvSpPr>
         <p:spPr>
           <a:xfrm>
-            <a:off x="731520" y="3593592"/>
+            <a:off x="1051560" y="3383280"/>
             <a:ext cx="1737360" cy="347472"/>
           </a:xfrm>
           <a:prstGeom prst="roundRect">
@@ -2548,7 +2548,7 @@
         </p:blipFill>
         <p:spPr>
           <a:xfrm>
-            <a:off x="822960" y="3657600"/>
+            <a:off x="1143000" y="3447288"/>
             <a:ext cx="219456" cy="219456"/>
           </a:xfrm>
           <a:prstGeom prst="rect">
@@ -2564,7 +2564,7 @@
         </p:nvSpPr>
         <p:spPr>
           <a:xfrm>
-            <a:off x="1115568" y="3593592"/>
+            <a:off x="1435608" y="3383280"/>
             <a:ext cx="1325880" cy="347472"/>
           </a:xfrm>
           <a:prstGeom prst="rect">
@@ -2603,8 +2603,8 @@
         </p:nvSpPr>
         <p:spPr>
           <a:xfrm>
-            <a:off x="731520" y="4069080"/>
-            <a:ext cx="2064944" cy="685800"/>
+            <a:off x="1051560" y="3840480"/>
+            <a:ext cx="1767764" cy="457200"/>
           </a:xfrm>
           <a:prstGeom prst="rect">
             <a:avLst/>
@@ -2620,7 +2620,7 @@
               <a:buNone/>
             </a:pPr>
             <a:r>
-              <a:rPr lang="en-US" sz="1150" dirty="0">
+              <a:rPr lang="en-US" sz="1100" dirty="0">
                 <a:solidFill>
                   <a:srgbClr val="63666A"/>
                 </a:solidFill>
@@ -2630,7 +2630,7 @@
               </a:rPr>
               <a:t>34% → 46% within 90 days of due date</a:t>
             </a:r>
-            <a:endParaRPr lang="en-US" sz="1150" dirty="0"/>
+            <a:endParaRPr lang="en-US" sz="1100" dirty="0"/>
           </a:p>
         </p:txBody>
       </p:sp>
@@ -2642,12 +2642,12 @@
         </p:nvSpPr>
         <p:spPr>
           <a:xfrm>
-            <a:off x="3345104" y="1783080"/>
-            <a:ext cx="2613584" cy="3108960"/>
+            <a:off x="3459404" y="1691640"/>
+            <a:ext cx="2499284" cy="2697480"/>
           </a:xfrm>
           <a:prstGeom prst="roundRect">
             <a:avLst>
-              <a:gd name="adj" fmla="val 4198"/>
+              <a:gd name="adj" fmla="val 4390"/>
             </a:avLst>
           </a:prstGeom>
           <a:solidFill>
@@ -2669,8 +2669,8 @@
         </p:nvSpPr>
         <p:spPr>
           <a:xfrm>
-            <a:off x="3619424" y="2057400"/>
-            <a:ext cx="2064944" cy="548640"/>
+            <a:off x="3825164" y="2057400"/>
+            <a:ext cx="1767764" cy="457200"/>
           </a:xfrm>
           <a:prstGeom prst="rect">
             <a:avLst/>
@@ -2686,7 +2686,7 @@
               <a:buNone/>
             </a:pPr>
             <a:r>
-              <a:rPr lang="en-US" sz="1350" b="1" dirty="0">
+              <a:rPr lang="en-US" sz="1200" b="1" dirty="0">
                 <a:solidFill>
                   <a:srgbClr val="63666A"/>
                 </a:solidFill>
@@ -2696,7 +2696,7 @@
               </a:rPr>
               <a:t>Days from due date to kit order</a:t>
             </a:r>
-            <a:endParaRPr lang="en-US" sz="1350" dirty="0"/>
+            <a:endParaRPr lang="en-US" sz="1200" dirty="0"/>
           </a:p>
         </p:txBody>
       </p:sp>
@@ -2708,8 +2708,8 @@
         </p:nvSpPr>
         <p:spPr>
           <a:xfrm>
-            <a:off x="3619424" y="2697480"/>
-            <a:ext cx="2064944" cy="777240"/>
+            <a:off x="3825164" y="2560320"/>
+            <a:ext cx="1767764" cy="685800"/>
           </a:xfrm>
           <a:prstGeom prst="rect">
             <a:avLst/>
@@ -2725,7 +2725,7 @@
               <a:buNone/>
             </a:pPr>
             <a:r>
-              <a:rPr lang="en-US" sz="3200" b="1" dirty="0">
+              <a:rPr lang="en-US" sz="2600" b="1" dirty="0">
                 <a:solidFill>
                   <a:srgbClr val="2E4AED"/>
                 </a:solidFill>
@@ -2735,7 +2735,7 @@
               </a:rPr>
               <a:t>–18 days</a:t>
             </a:r>
-            <a:endParaRPr lang="en-US" sz="3200" dirty="0"/>
+            <a:endParaRPr lang="en-US" sz="2600" dirty="0"/>
           </a:p>
         </p:txBody>
       </p:sp>
@@ -2747,7 +2747,7 @@
         </p:nvSpPr>
         <p:spPr>
           <a:xfrm>
-            <a:off x="3619424" y="3593592"/>
+            <a:off x="3825164" y="3383280"/>
             <a:ext cx="1737360" cy="347472"/>
           </a:xfrm>
           <a:prstGeom prst="roundRect">
@@ -2782,7 +2782,7 @@
         </p:blipFill>
         <p:spPr>
           <a:xfrm>
-            <a:off x="3710864" y="3657600"/>
+            <a:off x="3916604" y="3447288"/>
             <a:ext cx="219456" cy="219456"/>
           </a:xfrm>
           <a:prstGeom prst="rect">
@@ -2798,7 +2798,7 @@
         </p:nvSpPr>
         <p:spPr>
           <a:xfrm>
-            <a:off x="4003472" y="3593592"/>
+            <a:off x="4209212" y="3383280"/>
             <a:ext cx="1325880" cy="347472"/>
           </a:xfrm>
           <a:prstGeom prst="rect">
@@ -2837,8 +2837,8 @@
         </p:nvSpPr>
         <p:spPr>
           <a:xfrm>
-            <a:off x="3619424" y="4069080"/>
-            <a:ext cx="2064944" cy="685800"/>
+            <a:off x="3825164" y="3840480"/>
+            <a:ext cx="1767764" cy="457200"/>
           </a:xfrm>
           <a:prstGeom prst="rect">
             <a:avLst/>
@@ -2854,7 +2854,7 @@
               <a:buNone/>
             </a:pPr>
             <a:r>
-              <a:rPr lang="en-US" sz="1150" dirty="0">
+              <a:rPr lang="en-US" sz="1100" dirty="0">
                 <a:solidFill>
                   <a:srgbClr val="63666A"/>
                 </a:solidFill>
@@ -2864,7 +2864,7 @@
               </a:rPr>
               <a:t>41 → 23 days, median</a:t>
             </a:r>
-            <a:endParaRPr lang="en-US" sz="1150" dirty="0"/>
+            <a:endParaRPr lang="en-US" sz="1100" dirty="0"/>
           </a:p>
         </p:txBody>
       </p:sp>
@@ -2876,12 +2876,12 @@
         </p:nvSpPr>
         <p:spPr>
           <a:xfrm>
-            <a:off x="6233008" y="1783080"/>
-            <a:ext cx="2613584" cy="3108960"/>
+            <a:off x="6233008" y="1691640"/>
+            <a:ext cx="2499284" cy="2697480"/>
           </a:xfrm>
           <a:prstGeom prst="roundRect">
             <a:avLst>
-              <a:gd name="adj" fmla="val 4198"/>
+              <a:gd name="adj" fmla="val 4390"/>
             </a:avLst>
           </a:prstGeom>
           <a:solidFill>
@@ -2903,8 +2903,8 @@
         </p:nvSpPr>
         <p:spPr>
           <a:xfrm>
-            <a:off x="6507328" y="2057400"/>
-            <a:ext cx="2064944" cy="548640"/>
+            <a:off x="6598768" y="2057400"/>
+            <a:ext cx="1767764" cy="457200"/>
           </a:xfrm>
           <a:prstGeom prst="rect">
             <a:avLst/>
@@ -2920,7 +2920,7 @@
               <a:buNone/>
             </a:pPr>
             <a:r>
-              <a:rPr lang="en-US" sz="1350" b="1" dirty="0">
+              <a:rPr lang="en-US" sz="1200" b="1" dirty="0">
                 <a:solidFill>
                   <a:srgbClr val="63666A"/>
                 </a:solidFill>
@@ -2930,7 +2930,7 @@
               </a:rPr>
               <a:t>Steps for patient to reorder</a:t>
             </a:r>
-            <a:endParaRPr lang="en-US" sz="1350" dirty="0"/>
+            <a:endParaRPr lang="en-US" sz="1200" dirty="0"/>
           </a:p>
         </p:txBody>
       </p:sp>
@@ -2942,8 +2942,8 @@
         </p:nvSpPr>
         <p:spPr>
           <a:xfrm>
-            <a:off x="6507328" y="2697480"/>
-            <a:ext cx="2064944" cy="777240"/>
+            <a:off x="6598768" y="2560320"/>
+            <a:ext cx="1767764" cy="685800"/>
           </a:xfrm>
           <a:prstGeom prst="rect">
             <a:avLst/>
@@ -2959,7 +2959,7 @@
               <a:buNone/>
             </a:pPr>
             <a:r>
-              <a:rPr lang="en-US" sz="3200" b="1" dirty="0">
+              <a:rPr lang="en-US" sz="2600" b="1" dirty="0">
                 <a:solidFill>
                   <a:srgbClr val="2E4AED"/>
                 </a:solidFill>
@@ -2969,7 +2969,7 @@
               </a:rPr>
               <a:t>5 → 2</a:t>
             </a:r>
-            <a:endParaRPr lang="en-US" sz="3200" dirty="0"/>
+            <a:endParaRPr lang="en-US" sz="2600" dirty="0"/>
           </a:p>
         </p:txBody>
       </p:sp>
@@ -2981,7 +2981,7 @@
         </p:nvSpPr>
         <p:spPr>
           <a:xfrm>
-            <a:off x="6507328" y="3593592"/>
+            <a:off x="6598768" y="3383280"/>
             <a:ext cx="1737360" cy="347472"/>
           </a:xfrm>
           <a:prstGeom prst="roundRect">
@@ -3016,7 +3016,7 @@
         </p:blipFill>
         <p:spPr>
           <a:xfrm>
-            <a:off x="6598768" y="3657600"/>
+            <a:off x="6690208" y="3447288"/>
             <a:ext cx="219456" cy="219456"/>
           </a:xfrm>
           <a:prstGeom prst="rect">
@@ -3032,7 +3032,7 @@
         </p:nvSpPr>
         <p:spPr>
           <a:xfrm>
-            <a:off x="6891376" y="3593592"/>
+            <a:off x="6982816" y="3383280"/>
             <a:ext cx="1325880" cy="347472"/>
           </a:xfrm>
           <a:prstGeom prst="rect">
@@ -3071,8 +3071,8 @@
         </p:nvSpPr>
         <p:spPr>
           <a:xfrm>
-            <a:off x="6507328" y="4069080"/>
-            <a:ext cx="2064944" cy="685800"/>
+            <a:off x="6598768" y="3840480"/>
+            <a:ext cx="1767764" cy="457200"/>
           </a:xfrm>
           <a:prstGeom prst="rect">
             <a:avLst/>
@@ -3088,7 +3088,7 @@
               <a:buNone/>
             </a:pPr>
             <a:r>
-              <a:rPr lang="en-US" sz="1150" dirty="0">
+              <a:rPr lang="en-US" sz="1100" dirty="0">
                 <a:solidFill>
                   <a:srgbClr val="63666A"/>
                 </a:solidFill>
@@ -3096,9 +3096,9 @@
                 <a:ea typeface="Hanken Grotesk" pitchFamily="34" charset="-122"/>
                 <a:cs typeface="Hanken Grotesk" pitchFamily="34" charset="-120"/>
               </a:rPr>
-              <a:t>Reply + collect; provider step handled for them</a:t>
-            </a:r>
-            <a:endParaRPr lang="en-US" sz="1150" dirty="0"/>
+              <a:t>Reply + collect; provider step handled</a:t>
+            </a:r>
+            <a:endParaRPr lang="en-US" sz="1100" dirty="0"/>
           </a:p>
         </p:txBody>
       </p:sp>
@@ -3110,12 +3110,12 @@
         </p:nvSpPr>
         <p:spPr>
           <a:xfrm>
-            <a:off x="9120911" y="1783080"/>
-            <a:ext cx="2613584" cy="3108960"/>
+            <a:off x="9006611" y="1691640"/>
+            <a:ext cx="2499284" cy="2697480"/>
           </a:xfrm>
           <a:prstGeom prst="roundRect">
             <a:avLst>
-              <a:gd name="adj" fmla="val 4198"/>
+              <a:gd name="adj" fmla="val 4390"/>
             </a:avLst>
           </a:prstGeom>
           <a:solidFill>
@@ -3137,8 +3137,8 @@
         </p:nvSpPr>
         <p:spPr>
           <a:xfrm>
-            <a:off x="9395231" y="2057400"/>
-            <a:ext cx="2064944" cy="548640"/>
+            <a:off x="9372371" y="2057400"/>
+            <a:ext cx="1767764" cy="457200"/>
           </a:xfrm>
           <a:prstGeom prst="rect">
             <a:avLst/>
@@ -3154,7 +3154,7 @@
               <a:buNone/>
             </a:pPr>
             <a:r>
-              <a:rPr lang="en-US" sz="1350" b="1" dirty="0">
+              <a:rPr lang="en-US" sz="1200" b="1" dirty="0">
                 <a:solidFill>
                   <a:srgbClr val="63666A"/>
                 </a:solidFill>
@@ -3164,7 +3164,7 @@
               </a:rPr>
               <a:t>Rescreen satisfaction (CSAT)</a:t>
             </a:r>
-            <a:endParaRPr lang="en-US" sz="1350" dirty="0"/>
+            <a:endParaRPr lang="en-US" sz="1200" dirty="0"/>
           </a:p>
         </p:txBody>
       </p:sp>
@@ -3176,8 +3176,8 @@
         </p:nvSpPr>
         <p:spPr>
           <a:xfrm>
-            <a:off x="9395231" y="2697480"/>
-            <a:ext cx="2064944" cy="777240"/>
+            <a:off x="9372371" y="2560320"/>
+            <a:ext cx="1767764" cy="685800"/>
           </a:xfrm>
           <a:prstGeom prst="rect">
             <a:avLst/>
@@ -3193,7 +3193,7 @@
               <a:buNone/>
             </a:pPr>
             <a:r>
-              <a:rPr lang="en-US" sz="3200" b="1" dirty="0">
+              <a:rPr lang="en-US" sz="2600" b="1" dirty="0">
                 <a:solidFill>
                   <a:srgbClr val="2E4AED"/>
                 </a:solidFill>
@@ -3203,7 +3203,7 @@
               </a:rPr>
               <a:t>+0.6</a:t>
             </a:r>
-            <a:endParaRPr lang="en-US" sz="3200" dirty="0"/>
+            <a:endParaRPr lang="en-US" sz="2600" dirty="0"/>
           </a:p>
         </p:txBody>
       </p:sp>
@@ -3215,7 +3215,7 @@
         </p:nvSpPr>
         <p:spPr>
           <a:xfrm>
-            <a:off x="9395231" y="3593592"/>
+            <a:off x="9372371" y="3383280"/>
             <a:ext cx="1737360" cy="347472"/>
           </a:xfrm>
           <a:prstGeom prst="roundRect">
@@ -3250,7 +3250,7 @@
         </p:blipFill>
         <p:spPr>
           <a:xfrm>
-            <a:off x="9486671" y="3657600"/>
+            <a:off x="9463811" y="3447288"/>
             <a:ext cx="219456" cy="219456"/>
           </a:xfrm>
           <a:prstGeom prst="rect">
@@ -3266,7 +3266,7 @@
         </p:nvSpPr>
         <p:spPr>
           <a:xfrm>
-            <a:off x="9779279" y="3593592"/>
+            <a:off x="9756419" y="3383280"/>
             <a:ext cx="1325880" cy="347472"/>
           </a:xfrm>
           <a:prstGeom prst="rect">
@@ -3305,8 +3305,8 @@
         </p:nvSpPr>
         <p:spPr>
           <a:xfrm>
-            <a:off x="9395231" y="4069080"/>
-            <a:ext cx="2064944" cy="685800"/>
+            <a:off x="9372371" y="3840480"/>
+            <a:ext cx="1767764" cy="457200"/>
           </a:xfrm>
           <a:prstGeom prst="rect">
             <a:avLst/>
@@ -3322,7 +3322,7 @@
               <a:buNone/>
             </a:pPr>
             <a:r>
-              <a:rPr lang="en-US" sz="1150" dirty="0">
+              <a:rPr lang="en-US" sz="1100" dirty="0">
                 <a:solidFill>
                   <a:srgbClr val="63666A"/>
                 </a:solidFill>
@@ -3332,7 +3332,7 @@
               </a:rPr>
               <a:t>3.9 → 4.5 out of 5</a:t>
             </a:r>
-            <a:endParaRPr lang="en-US" sz="1150" dirty="0"/>
+            <a:endParaRPr lang="en-US" sz="1100" dirty="0"/>
           </a:p>
         </p:txBody>
       </p:sp>
@@ -3344,8 +3344,8 @@
         </p:nvSpPr>
         <p:spPr>
           <a:xfrm>
-            <a:off x="457200" y="5120640"/>
-            <a:ext cx="11277295" cy="1005840"/>
+            <a:off x="685800" y="4663440"/>
+            <a:ext cx="10820095" cy="1005840"/>
           </a:xfrm>
           <a:prstGeom prst="roundRect">
             <a:avLst>
@@ -3371,8 +3371,8 @@
         </p:nvSpPr>
         <p:spPr>
           <a:xfrm>
-            <a:off x="731520" y="5120640"/>
-            <a:ext cx="10728655" cy="1005840"/>
+            <a:off x="1051560" y="4663440"/>
+            <a:ext cx="10088575" cy="1005840"/>
           </a:xfrm>
           <a:prstGeom prst="rect">
             <a:avLst/>
@@ -3410,7 +3410,7 @@
                 <a:ea typeface="Hanken Grotesk" pitchFamily="34" charset="-122"/>
                 <a:cs typeface="Hanken Grotesk" pitchFamily="34" charset="-120"/>
               </a:rPr>
-              <a:t>Pilot vs. matched holdout of due patients over 90 days. Primary metric: on-time rescreen rate. Assumptions: [reach rate, RCS availability, opt-in rate — placeholders].</a:t>
+              <a:t>Pilot vs. matched holdout of due patients over 90 days. Primary metric: on-time rescreen rate. Assumptions: [reach, RCS availability, opt-in rate].</a:t>
             </a:r>
             <a:endParaRPr lang="en-US" sz="1350" dirty="0"/>
           </a:p>
@@ -3424,7 +3424,7 @@
         </p:nvSpPr>
         <p:spPr>
           <a:xfrm>
-            <a:off x="457200" y="6400800"/>
+            <a:off x="685800" y="6400800"/>
             <a:ext cx="5486400" cy="256032"/>
           </a:xfrm>
           <a:prstGeom prst="rect">
@@ -3464,7 +3464,7 @@
         <p:spPr>
           <a:xfrm>
             <a:off x="4754880" y="6400800"/>
-            <a:ext cx="6309360" cy="256032"/>
+            <a:ext cx="5973775" cy="256032"/>
           </a:xfrm>
           <a:prstGeom prst="rect">
             <a:avLst/>
@@ -3502,7 +3502,7 @@
         </p:nvSpPr>
         <p:spPr>
           <a:xfrm>
-            <a:off x="11091672" y="6400800"/>
+            <a:off x="10865815" y="6400800"/>
             <a:ext cx="640080" cy="256032"/>
           </a:xfrm>
           <a:prstGeom prst="rect">
@@ -3573,8 +3573,8 @@
         </p:nvSpPr>
         <p:spPr>
           <a:xfrm>
-            <a:off x="457200" y="384048"/>
-            <a:ext cx="8686800" cy="274320"/>
+            <a:off x="685800" y="502920"/>
+            <a:ext cx="8229600" cy="274320"/>
           </a:xfrm>
           <a:prstGeom prst="rect">
             <a:avLst/>
@@ -3612,8 +3612,8 @@
         </p:nvSpPr>
         <p:spPr>
           <a:xfrm>
-            <a:off x="457200" y="676656"/>
-            <a:ext cx="11274552" cy="868680"/>
+            <a:off x="685800" y="804672"/>
+            <a:ext cx="10820095" cy="566928"/>
           </a:xfrm>
           <a:prstGeom prst="rect">
             <a:avLst/>
@@ -3632,7 +3632,7 @@
               <a:buNone/>
             </a:pPr>
             <a:r>
-              <a:rPr lang="en-US" sz="3000" b="1" dirty="0">
+              <a:rPr lang="en-US" sz="2800" b="1" dirty="0">
                 <a:solidFill>
                   <a:srgbClr val="222731"/>
                 </a:solidFill>
@@ -3640,9 +3640,9 @@
                 <a:ea typeface="Bricolage Grotesque" pitchFamily="34" charset="-122"/>
                 <a:cs typeface="Bricolage Grotesque" pitchFamily="34" charset="-120"/>
               </a:rPr>
-              <a:t>Approve a 90-day pilot to prove the concept before we scale</a:t>
-            </a:r>
-            <a:endParaRPr lang="en-US" sz="3000" dirty="0"/>
+              <a:t>Approve a 90-day pilot to prove the concept</a:t>
+            </a:r>
+            <a:endParaRPr lang="en-US" sz="2800" dirty="0"/>
           </a:p>
         </p:txBody>
       </p:sp>
@@ -3654,7 +3654,7 @@
         </p:nvSpPr>
         <p:spPr>
           <a:xfrm>
-            <a:off x="10177272" y="384048"/>
+            <a:off x="9951415" y="475488"/>
             <a:ext cx="1554480" cy="292608"/>
           </a:xfrm>
           <a:prstGeom prst="roundRect">
@@ -3681,7 +3681,7 @@
         </p:nvSpPr>
         <p:spPr>
           <a:xfrm>
-            <a:off x="10177272" y="384048"/>
+            <a:off x="9951415" y="475488"/>
             <a:ext cx="1554480" cy="292608"/>
           </a:xfrm>
           <a:prstGeom prst="rect">
@@ -3720,12 +3720,12 @@
         </p:nvSpPr>
         <p:spPr>
           <a:xfrm>
-            <a:off x="457200" y="1783080"/>
-            <a:ext cx="3383280" cy="4343400"/>
+            <a:off x="685800" y="1691640"/>
+            <a:ext cx="3291840" cy="4069080"/>
           </a:xfrm>
           <a:prstGeom prst="roundRect">
             <a:avLst>
-              <a:gd name="adj" fmla="val 3243"/>
+              <a:gd name="adj" fmla="val 3333"/>
             </a:avLst>
           </a:prstGeom>
           <a:solidFill>
@@ -3747,7 +3747,7 @@
         </p:nvSpPr>
         <p:spPr>
           <a:xfrm>
-            <a:off x="777240" y="2103120"/>
+            <a:off x="1051560" y="2057400"/>
             <a:ext cx="2011680" cy="365760"/>
           </a:xfrm>
           <a:prstGeom prst="roundRect">
@@ -3774,7 +3774,7 @@
         </p:nvSpPr>
         <p:spPr>
           <a:xfrm>
-            <a:off x="777240" y="2103120"/>
+            <a:off x="1051560" y="2057400"/>
             <a:ext cx="2011680" cy="365760"/>
           </a:xfrm>
           <a:prstGeom prst="rect">
@@ -3813,8 +3813,8 @@
         </p:nvSpPr>
         <p:spPr>
           <a:xfrm>
-            <a:off x="777240" y="2651760"/>
-            <a:ext cx="2743200" cy="1463040"/>
+            <a:off x="1051560" y="2651760"/>
+            <a:ext cx="2560320" cy="1280160"/>
           </a:xfrm>
           <a:prstGeom prst="rect">
             <a:avLst/>
@@ -3852,8 +3852,8 @@
         </p:nvSpPr>
         <p:spPr>
           <a:xfrm>
-            <a:off x="777240" y="4297680"/>
-            <a:ext cx="2743200" cy="1645920"/>
+            <a:off x="1051560" y="4206240"/>
+            <a:ext cx="2560320" cy="1188720"/>
           </a:xfrm>
           <a:prstGeom prst="rect">
             <a:avLst/>
@@ -3920,7 +3920,7 @@
                 <a:ea typeface="Hanken Grotesk" pitchFamily="34" charset="-122"/>
                 <a:cs typeface="Hanken Grotesk" pitchFamily="34" charset="-120"/>
               </a:rPr>
-              <a:t>Resources: [budget / team placeholder]</a:t>
+              <a:t>Resources: [budget / team]</a:t>
             </a:r>
             <a:endParaRPr lang="en-US" sz="1350" dirty="0"/>
           </a:p>
@@ -3941,18 +3941,18 @@
           </p:nvPr>
         </p:nvGraphicFramePr>
         <p:xfrm>
-          <a:off x="4114800" y="1783080"/>
-          <a:ext cx="7619695" cy="914400"/>
+          <a:off x="4251960" y="1691640"/>
+          <a:ext cx="7253935" cy="914400"/>
         </p:xfrm>
         <a:graphic>
           <a:graphicData uri="http://schemas.openxmlformats.org/drawingml/2006/table">
             <a:tbl>
               <a:tblPr/>
               <a:tblGrid>
-                <a:gridCol w="731520"/>
-                <a:gridCol w="3596335"/>
-                <a:gridCol w="2103120"/>
-                <a:gridCol w="1188720"/>
+                <a:gridCol w="822960"/>
+                <a:gridCol w="3322015"/>
+                <a:gridCol w="1874520"/>
+                <a:gridCol w="1234440"/>
               </a:tblGrid>
               <a:tr h="457200">
                 <a:tc>
@@ -3981,7 +3981,7 @@
                       </a:endParaRPr>
                     </a:p>
                   </a:txBody>
-                  <a:tcPr marL="137160" marR="137160" marT="0" marB="0" anchor="ctr">
+                  <a:tcPr marL="182880" marR="182880" marT="0" marB="0" anchor="ctr">
                     <a:lnL w="9525" cap="flat" cmpd="sng" algn="ctr">
                       <a:solidFill>
                         <a:srgbClr val="D9D9D6"/>
@@ -4049,7 +4049,7 @@
                       </a:endParaRPr>
                     </a:p>
                   </a:txBody>
-                  <a:tcPr marL="137160" marR="137160" marT="0" marB="0" anchor="ctr">
+                  <a:tcPr marL="182880" marR="182880" marT="0" marB="0" anchor="ctr">
                     <a:lnL w="9525" cap="flat" cmpd="sng" algn="ctr">
                       <a:solidFill>
                         <a:srgbClr val="D9D9D6"/>
@@ -4117,7 +4117,7 @@
                       </a:endParaRPr>
                     </a:p>
                   </a:txBody>
-                  <a:tcPr marL="137160" marR="137160" marT="0" marB="0" anchor="ctr">
+                  <a:tcPr marL="182880" marR="182880" marT="0" marB="0" anchor="ctr">
                     <a:lnL w="9525" cap="flat" cmpd="sng" algn="ctr">
                       <a:solidFill>
                         <a:srgbClr val="D9D9D6"/>
@@ -4185,7 +4185,7 @@
                       </a:endParaRPr>
                     </a:p>
                   </a:txBody>
-                  <a:tcPr marL="137160" marR="137160" marT="0" marB="0" anchor="ctr">
+                  <a:tcPr marL="182880" marR="182880" marT="0" marB="0" anchor="ctr">
                     <a:lnL w="9525" cap="flat" cmpd="sng" algn="ctr">
                       <a:solidFill>
                         <a:srgbClr val="D9D9D6"/>
@@ -4228,7 +4228,7 @@
                   </a:tcPr>
                 </a:tc>
               </a:tr>
-              <a:tr h="777240">
+              <a:tr h="722376">
                 <a:tc>
                   <a:txBody>
                     <a:bodyPr/>
@@ -4255,7 +4255,7 @@
                       </a:endParaRPr>
                     </a:p>
                   </a:txBody>
-                  <a:tcPr marL="137160" marR="137160" marT="0" marB="0" anchor="ctr">
+                  <a:tcPr marL="182880" marR="182880" marT="0" marB="0" anchor="ctr">
                     <a:lnL w="9525" cap="flat" cmpd="sng" algn="ctr">
                       <a:solidFill>
                         <a:srgbClr val="D9D9D6"/>
@@ -4323,7 +4323,7 @@
                       </a:endParaRPr>
                     </a:p>
                   </a:txBody>
-                  <a:tcPr marL="137160" marR="137160" marT="0" marB="0" anchor="ctr">
+                  <a:tcPr marL="182880" marR="182880" marT="0" marB="0" anchor="ctr">
                     <a:lnL w="9525" cap="flat" cmpd="sng" algn="ctr">
                       <a:solidFill>
                         <a:srgbClr val="D9D9D6"/>
@@ -4391,7 +4391,7 @@
                       </a:endParaRPr>
                     </a:p>
                   </a:txBody>
-                  <a:tcPr marL="137160" marR="137160" marT="0" marB="0" anchor="ctr">
+                  <a:tcPr marL="182880" marR="182880" marT="0" marB="0" anchor="ctr">
                     <a:lnL w="9525" cap="flat" cmpd="sng" algn="ctr">
                       <a:solidFill>
                         <a:srgbClr val="D9D9D6"/>
@@ -4459,7 +4459,7 @@
                       </a:endParaRPr>
                     </a:p>
                   </a:txBody>
-                  <a:tcPr marL="137160" marR="137160" marT="0" marB="0" anchor="ctr">
+                  <a:tcPr marL="182880" marR="182880" marT="0" marB="0" anchor="ctr">
                     <a:lnL w="9525" cap="flat" cmpd="sng" algn="ctr">
                       <a:solidFill>
                         <a:srgbClr val="D9D9D6"/>
@@ -4502,7 +4502,7 @@
                   </a:tcPr>
                 </a:tc>
               </a:tr>
-              <a:tr h="777240">
+              <a:tr h="722376">
                 <a:tc>
                   <a:txBody>
                     <a:bodyPr/>
@@ -4529,7 +4529,7 @@
                       </a:endParaRPr>
                     </a:p>
                   </a:txBody>
-                  <a:tcPr marL="137160" marR="137160" marT="0" marB="0" anchor="ctr">
+                  <a:tcPr marL="182880" marR="182880" marT="0" marB="0" anchor="ctr">
                     <a:lnL w="9525" cap="flat" cmpd="sng" algn="ctr">
                       <a:solidFill>
                         <a:srgbClr val="D9D9D6"/>
@@ -4597,7 +4597,7 @@
                       </a:endParaRPr>
                     </a:p>
                   </a:txBody>
-                  <a:tcPr marL="137160" marR="137160" marT="0" marB="0" anchor="ctr">
+                  <a:tcPr marL="182880" marR="182880" marT="0" marB="0" anchor="ctr">
                     <a:lnL w="9525" cap="flat" cmpd="sng" algn="ctr">
                       <a:solidFill>
                         <a:srgbClr val="D9D9D6"/>
@@ -4665,7 +4665,7 @@
                       </a:endParaRPr>
                     </a:p>
                   </a:txBody>
-                  <a:tcPr marL="137160" marR="137160" marT="0" marB="0" anchor="ctr">
+                  <a:tcPr marL="182880" marR="182880" marT="0" marB="0" anchor="ctr">
                     <a:lnL w="9525" cap="flat" cmpd="sng" algn="ctr">
                       <a:solidFill>
                         <a:srgbClr val="D9D9D6"/>
@@ -4733,7 +4733,7 @@
                       </a:endParaRPr>
                     </a:p>
                   </a:txBody>
-                  <a:tcPr marL="137160" marR="137160" marT="0" marB="0" anchor="ctr">
+                  <a:tcPr marL="182880" marR="182880" marT="0" marB="0" anchor="ctr">
                     <a:lnL w="9525" cap="flat" cmpd="sng" algn="ctr">
                       <a:solidFill>
                         <a:srgbClr val="D9D9D6"/>
@@ -4776,7 +4776,7 @@
                   </a:tcPr>
                 </a:tc>
               </a:tr>
-              <a:tr h="777240">
+              <a:tr h="722376">
                 <a:tc>
                   <a:txBody>
                     <a:bodyPr/>
@@ -4803,7 +4803,7 @@
                       </a:endParaRPr>
                     </a:p>
                   </a:txBody>
-                  <a:tcPr marL="137160" marR="137160" marT="0" marB="0" anchor="ctr">
+                  <a:tcPr marL="182880" marR="182880" marT="0" marB="0" anchor="ctr">
                     <a:lnL w="9525" cap="flat" cmpd="sng" algn="ctr">
                       <a:solidFill>
                         <a:srgbClr val="D9D9D6"/>
@@ -4871,7 +4871,7 @@
                       </a:endParaRPr>
                     </a:p>
                   </a:txBody>
-                  <a:tcPr marL="137160" marR="137160" marT="0" marB="0" anchor="ctr">
+                  <a:tcPr marL="182880" marR="182880" marT="0" marB="0" anchor="ctr">
                     <a:lnL w="9525" cap="flat" cmpd="sng" algn="ctr">
                       <a:solidFill>
                         <a:srgbClr val="D9D9D6"/>
@@ -4939,7 +4939,7 @@
                       </a:endParaRPr>
                     </a:p>
                   </a:txBody>
-                  <a:tcPr marL="137160" marR="137160" marT="0" marB="0" anchor="ctr">
+                  <a:tcPr marL="182880" marR="182880" marT="0" marB="0" anchor="ctr">
                     <a:lnL w="9525" cap="flat" cmpd="sng" algn="ctr">
                       <a:solidFill>
                         <a:srgbClr val="D9D9D6"/>
@@ -5007,7 +5007,7 @@
                       </a:endParaRPr>
                     </a:p>
                   </a:txBody>
-                  <a:tcPr marL="137160" marR="137160" marT="0" marB="0" anchor="ctr">
+                  <a:tcPr marL="182880" marR="182880" marT="0" marB="0" anchor="ctr">
                     <a:lnL w="9525" cap="flat" cmpd="sng" algn="ctr">
                       <a:solidFill>
                         <a:srgbClr val="D9D9D6"/>
@@ -5050,7 +5050,7 @@
                   </a:tcPr>
                 </a:tc>
               </a:tr>
-              <a:tr h="777240">
+              <a:tr h="722376">
                 <a:tc>
                   <a:txBody>
                     <a:bodyPr/>
@@ -5077,7 +5077,7 @@
                       </a:endParaRPr>
                     </a:p>
                   </a:txBody>
-                  <a:tcPr marL="137160" marR="137160" marT="0" marB="0" anchor="ctr">
+                  <a:tcPr marL="182880" marR="182880" marT="0" marB="0" anchor="ctr">
                     <a:lnL w="9525" cap="flat" cmpd="sng" algn="ctr">
                       <a:solidFill>
                         <a:srgbClr val="D9D9D6"/>
@@ -5145,7 +5145,7 @@
                       </a:endParaRPr>
                     </a:p>
                   </a:txBody>
-                  <a:tcPr marL="137160" marR="137160" marT="0" marB="0" anchor="ctr">
+                  <a:tcPr marL="182880" marR="182880" marT="0" marB="0" anchor="ctr">
                     <a:lnL w="9525" cap="flat" cmpd="sng" algn="ctr">
                       <a:solidFill>
                         <a:srgbClr val="D9D9D6"/>
@@ -5213,7 +5213,7 @@
                       </a:endParaRPr>
                     </a:p>
                   </a:txBody>
-                  <a:tcPr marL="137160" marR="137160" marT="0" marB="0" anchor="ctr">
+                  <a:tcPr marL="182880" marR="182880" marT="0" marB="0" anchor="ctr">
                     <a:lnL w="9525" cap="flat" cmpd="sng" algn="ctr">
                       <a:solidFill>
                         <a:srgbClr val="D9D9D6"/>
@@ -5281,7 +5281,7 @@
                       </a:endParaRPr>
                     </a:p>
                   </a:txBody>
-                  <a:tcPr marL="137160" marR="137160" marT="0" marB="0" anchor="ctr">
+                  <a:tcPr marL="182880" marR="182880" marT="0" marB="0" anchor="ctr">
                     <a:lnL w="9525" cap="flat" cmpd="sng" algn="ctr">
                       <a:solidFill>
                         <a:srgbClr val="D9D9D6"/>
@@ -5324,7 +5324,7 @@
                   </a:tcPr>
                 </a:tc>
               </a:tr>
-              <a:tr h="777240">
+              <a:tr h="722376">
                 <a:tc>
                   <a:txBody>
                     <a:bodyPr/>
@@ -5351,7 +5351,7 @@
                       </a:endParaRPr>
                     </a:p>
                   </a:txBody>
-                  <a:tcPr marL="137160" marR="137160" marT="0" marB="0" anchor="ctr">
+                  <a:tcPr marL="182880" marR="182880" marT="0" marB="0" anchor="ctr">
                     <a:lnL w="9525" cap="flat" cmpd="sng" algn="ctr">
                       <a:solidFill>
                         <a:srgbClr val="D9D9D6"/>
@@ -5419,7 +5419,7 @@
                       </a:endParaRPr>
                     </a:p>
                   </a:txBody>
-                  <a:tcPr marL="137160" marR="137160" marT="0" marB="0" anchor="ctr">
+                  <a:tcPr marL="182880" marR="182880" marT="0" marB="0" anchor="ctr">
                     <a:lnL w="9525" cap="flat" cmpd="sng" algn="ctr">
                       <a:solidFill>
                         <a:srgbClr val="D9D9D6"/>
@@ -5487,7 +5487,7 @@
                       </a:endParaRPr>
                     </a:p>
                   </a:txBody>
-                  <a:tcPr marL="137160" marR="137160" marT="0" marB="0" anchor="ctr">
+                  <a:tcPr marL="182880" marR="182880" marT="0" marB="0" anchor="ctr">
                     <a:lnL w="9525" cap="flat" cmpd="sng" algn="ctr">
                       <a:solidFill>
                         <a:srgbClr val="D9D9D6"/>
@@ -5555,7 +5555,7 @@
                       </a:endParaRPr>
                     </a:p>
                   </a:txBody>
-                  <a:tcPr marL="137160" marR="137160" marT="0" marB="0" anchor="ctr">
+                  <a:tcPr marL="182880" marR="182880" marT="0" marB="0" anchor="ctr">
                     <a:lnL w="9525" cap="flat" cmpd="sng" algn="ctr">
                       <a:solidFill>
                         <a:srgbClr val="D9D9D6"/>
@@ -5610,7 +5610,7 @@
         </p:nvSpPr>
         <p:spPr>
           <a:xfrm>
-            <a:off x="457200" y="6400800"/>
+            <a:off x="685800" y="6400800"/>
             <a:ext cx="5486400" cy="256032"/>
           </a:xfrm>
           <a:prstGeom prst="rect">
@@ -5650,7 +5650,7 @@
         <p:spPr>
           <a:xfrm>
             <a:off x="4754880" y="6400800"/>
-            <a:ext cx="6309360" cy="256032"/>
+            <a:ext cx="5973775" cy="256032"/>
           </a:xfrm>
           <a:prstGeom prst="rect">
             <a:avLst/>
@@ -5688,7 +5688,7 @@
         </p:nvSpPr>
         <p:spPr>
           <a:xfrm>
-            <a:off x="11091672" y="6400800"/>
+            <a:off x="10865815" y="6400800"/>
             <a:ext cx="640080" cy="256032"/>
           </a:xfrm>
           <a:prstGeom prst="rect">
@@ -5759,8 +5759,8 @@
         </p:nvSpPr>
         <p:spPr>
           <a:xfrm>
-            <a:off x="457200" y="384048"/>
-            <a:ext cx="8686800" cy="274320"/>
+            <a:off x="685800" y="502920"/>
+            <a:ext cx="8229600" cy="274320"/>
           </a:xfrm>
           <a:prstGeom prst="rect">
             <a:avLst/>
@@ -5798,8 +5798,8 @@
         </p:nvSpPr>
         <p:spPr>
           <a:xfrm>
-            <a:off x="457200" y="676656"/>
-            <a:ext cx="11274552" cy="868680"/>
+            <a:off x="685800" y="804672"/>
+            <a:ext cx="10820095" cy="566928"/>
           </a:xfrm>
           <a:prstGeom prst="rect">
             <a:avLst/>
@@ -5818,7 +5818,7 @@
               <a:buNone/>
             </a:pPr>
             <a:r>
-              <a:rPr lang="en-US" sz="3000" b="1" dirty="0">
+              <a:rPr lang="en-US" sz="2800" b="1" dirty="0">
                 <a:solidFill>
                   <a:srgbClr val="222731"/>
                 </a:solidFill>
@@ -5826,9 +5826,9 @@
                 <a:ea typeface="Bricolage Grotesque" pitchFamily="34" charset="-122"/>
                 <a:cs typeface="Bricolage Grotesque" pitchFamily="34" charset="-120"/>
               </a:rPr>
-              <a:t>A connected rescreen conversation can bring more returning patients back on time</a:t>
-            </a:r>
-            <a:endParaRPr lang="en-US" sz="3000" dirty="0"/>
+              <a:t>One conversation brings patients back on time</a:t>
+            </a:r>
+            <a:endParaRPr lang="en-US" sz="2800" dirty="0"/>
           </a:p>
         </p:txBody>
       </p:sp>
@@ -5840,7 +5840,7 @@
         </p:nvSpPr>
         <p:spPr>
           <a:xfrm>
-            <a:off x="10177272" y="384048"/>
+            <a:off x="9951415" y="475488"/>
             <a:ext cx="1554480" cy="292608"/>
           </a:xfrm>
           <a:prstGeom prst="roundRect">
@@ -5867,7 +5867,7 @@
         </p:nvSpPr>
         <p:spPr>
           <a:xfrm>
-            <a:off x="10177272" y="384048"/>
+            <a:off x="9951415" y="475488"/>
             <a:ext cx="1554480" cy="292608"/>
           </a:xfrm>
           <a:prstGeom prst="rect">
@@ -5906,12 +5906,12 @@
         </p:nvSpPr>
         <p:spPr>
           <a:xfrm>
-            <a:off x="457200" y="1783080"/>
-            <a:ext cx="3576218" cy="2788920"/>
+            <a:off x="685800" y="1691640"/>
+            <a:ext cx="3423818" cy="2514600"/>
           </a:xfrm>
           <a:prstGeom prst="roundRect">
             <a:avLst>
-              <a:gd name="adj" fmla="val 3934"/>
+              <a:gd name="adj" fmla="val 4364"/>
             </a:avLst>
           </a:prstGeom>
           <a:solidFill>
@@ -5941,7 +5941,7 @@
         </p:blipFill>
         <p:spPr>
           <a:xfrm>
-            <a:off x="731520" y="2057400"/>
+            <a:off x="1051560" y="2057400"/>
             <a:ext cx="292608" cy="292608"/>
           </a:xfrm>
           <a:prstGeom prst="rect">
@@ -5957,8 +5957,8 @@
         </p:nvSpPr>
         <p:spPr>
           <a:xfrm>
-            <a:off x="1143000" y="2075688"/>
-            <a:ext cx="2661818" cy="274320"/>
+            <a:off x="1463040" y="2075688"/>
+            <a:ext cx="2280818" cy="274320"/>
           </a:xfrm>
           <a:prstGeom prst="rect">
             <a:avLst/>
@@ -5996,8 +5996,8 @@
         </p:nvSpPr>
         <p:spPr>
           <a:xfrm>
-            <a:off x="731520" y="2560320"/>
-            <a:ext cx="3027578" cy="777240"/>
+            <a:off x="1051560" y="2560320"/>
+            <a:ext cx="2692298" cy="731520"/>
           </a:xfrm>
           <a:prstGeom prst="rect">
             <a:avLst/>
@@ -6035,8 +6035,8 @@
         </p:nvSpPr>
         <p:spPr>
           <a:xfrm>
-            <a:off x="731520" y="3429000"/>
-            <a:ext cx="3027578" cy="1005840"/>
+            <a:off x="1051560" y="3383280"/>
+            <a:ext cx="2692298" cy="685800"/>
           </a:xfrm>
           <a:prstGeom prst="rect">
             <a:avLst/>
@@ -6060,7 +6060,7 @@
                 <a:ea typeface="Hanken Grotesk" pitchFamily="34" charset="-122"/>
                 <a:cs typeface="Hanken Grotesk" pitchFamily="34" charset="-120"/>
               </a:rPr>
-              <a:t>of patients due for rescreen don't complete it within 90 days of their due date.</a:t>
+              <a:t>of due patients don't rescreen within 90 days of their due date.</a:t>
             </a:r>
             <a:endParaRPr lang="en-US" sz="1350" dirty="0"/>
           </a:p>
@@ -6074,12 +6074,12 @@
         </p:nvSpPr>
         <p:spPr>
           <a:xfrm>
-            <a:off x="4307738" y="1783080"/>
-            <a:ext cx="3576218" cy="2788920"/>
+            <a:off x="4383938" y="1691640"/>
+            <a:ext cx="3423818" cy="2514600"/>
           </a:xfrm>
           <a:prstGeom prst="roundRect">
             <a:avLst>
-              <a:gd name="adj" fmla="val 3934"/>
+              <a:gd name="adj" fmla="val 4364"/>
             </a:avLst>
           </a:prstGeom>
           <a:solidFill>
@@ -6109,7 +6109,7 @@
         </p:blipFill>
         <p:spPr>
           <a:xfrm>
-            <a:off x="4582058" y="2057400"/>
+            <a:off x="4749698" y="2057400"/>
             <a:ext cx="292608" cy="292608"/>
           </a:xfrm>
           <a:prstGeom prst="rect">
@@ -6125,8 +6125,8 @@
         </p:nvSpPr>
         <p:spPr>
           <a:xfrm>
-            <a:off x="4993538" y="2075688"/>
-            <a:ext cx="2661818" cy="274320"/>
+            <a:off x="5161178" y="2075688"/>
+            <a:ext cx="2280818" cy="274320"/>
           </a:xfrm>
           <a:prstGeom prst="rect">
             <a:avLst/>
@@ -6164,8 +6164,8 @@
         </p:nvSpPr>
         <p:spPr>
           <a:xfrm>
-            <a:off x="4582058" y="2560320"/>
-            <a:ext cx="3027578" cy="777240"/>
+            <a:off x="4749698" y="2560320"/>
+            <a:ext cx="2692298" cy="731520"/>
           </a:xfrm>
           <a:prstGeom prst="rect">
             <a:avLst/>
@@ -6203,8 +6203,8 @@
         </p:nvSpPr>
         <p:spPr>
           <a:xfrm>
-            <a:off x="4582058" y="3429000"/>
-            <a:ext cx="3027578" cy="1005840"/>
+            <a:off x="4749698" y="3383280"/>
+            <a:ext cx="2692298" cy="685800"/>
           </a:xfrm>
           <a:prstGeom prst="rect">
             <a:avLst/>
@@ -6228,7 +6228,7 @@
                 <a:ea typeface="Hanken Grotesk" pitchFamily="34" charset="-122"/>
                 <a:cs typeface="Hanken Grotesk" pitchFamily="34" charset="-120"/>
               </a:rPr>
-              <a:t>Email, SMS and two-way RCS work as one conversation that we start — not three separate reminders.</a:t>
+              <a:t>Email, SMS and two-way RCS work as one conversation that we start.</a:t>
             </a:r>
             <a:endParaRPr lang="en-US" sz="1350" dirty="0"/>
           </a:p>
@@ -6242,12 +6242,12 @@
         </p:nvSpPr>
         <p:spPr>
           <a:xfrm>
-            <a:off x="8158277" y="1783080"/>
-            <a:ext cx="3576218" cy="2788920"/>
+            <a:off x="8082077" y="1691640"/>
+            <a:ext cx="3423818" cy="2514600"/>
           </a:xfrm>
           <a:prstGeom prst="roundRect">
             <a:avLst>
-              <a:gd name="adj" fmla="val 3934"/>
+              <a:gd name="adj" fmla="val 4364"/>
             </a:avLst>
           </a:prstGeom>
           <a:solidFill>
@@ -6277,7 +6277,7 @@
         </p:blipFill>
         <p:spPr>
           <a:xfrm>
-            <a:off x="8432597" y="2057400"/>
+            <a:off x="8447837" y="2057400"/>
             <a:ext cx="292608" cy="292608"/>
           </a:xfrm>
           <a:prstGeom prst="rect">
@@ -6293,8 +6293,8 @@
         </p:nvSpPr>
         <p:spPr>
           <a:xfrm>
-            <a:off x="8844077" y="2075688"/>
-            <a:ext cx="2661818" cy="274320"/>
+            <a:off x="8859317" y="2075688"/>
+            <a:ext cx="2280818" cy="274320"/>
           </a:xfrm>
           <a:prstGeom prst="rect">
             <a:avLst/>
@@ -6332,8 +6332,8 @@
         </p:nvSpPr>
         <p:spPr>
           <a:xfrm>
-            <a:off x="8432597" y="2560320"/>
-            <a:ext cx="3027578" cy="777240"/>
+            <a:off x="8447837" y="2560320"/>
+            <a:ext cx="2692298" cy="731520"/>
           </a:xfrm>
           <a:prstGeom prst="rect">
             <a:avLst/>
@@ -6371,8 +6371,8 @@
         </p:nvSpPr>
         <p:spPr>
           <a:xfrm>
-            <a:off x="8432597" y="3429000"/>
-            <a:ext cx="3027578" cy="1005840"/>
+            <a:off x="8447837" y="3383280"/>
+            <a:ext cx="2692298" cy="685800"/>
           </a:xfrm>
           <a:prstGeom prst="rect">
             <a:avLst/>
@@ -6396,7 +6396,7 @@
                 <a:ea typeface="Hanken Grotesk" pitchFamily="34" charset="-122"/>
                 <a:cs typeface="Hanken Grotesk" pitchFamily="34" charset="-120"/>
               </a:rPr>
-              <a:t>projected lift in on-time rescreen, with fewer steps for the patient to reorder.</a:t>
+              <a:t>projected lift in on-time rescreen, with fewer steps to reorder.</a:t>
             </a:r>
             <a:endParaRPr lang="en-US" sz="1350" dirty="0"/>
           </a:p>
@@ -6410,12 +6410,12 @@
         </p:nvSpPr>
         <p:spPr>
           <a:xfrm>
-            <a:off x="457200" y="4846320"/>
-            <a:ext cx="11277295" cy="1234440"/>
+            <a:off x="685800" y="4480560"/>
+            <a:ext cx="10820095" cy="1143000"/>
           </a:xfrm>
           <a:prstGeom prst="roundRect">
             <a:avLst>
-              <a:gd name="adj" fmla="val 7407"/>
+              <a:gd name="adj" fmla="val 9600"/>
             </a:avLst>
           </a:prstGeom>
           <a:solidFill>
@@ -6437,12 +6437,12 @@
         </p:nvSpPr>
         <p:spPr>
           <a:xfrm>
-            <a:off x="731520" y="5230368"/>
-            <a:ext cx="1188720" cy="457200"/>
+            <a:off x="1051560" y="4832604"/>
+            <a:ext cx="1188720" cy="438912"/>
           </a:xfrm>
           <a:prstGeom prst="roundRect">
             <a:avLst>
-              <a:gd name="adj" fmla="val 16000"/>
+              <a:gd name="adj" fmla="val 16667"/>
             </a:avLst>
           </a:prstGeom>
           <a:solidFill>
@@ -6464,8 +6464,8 @@
         </p:nvSpPr>
         <p:spPr>
           <a:xfrm>
-            <a:off x="731520" y="5230368"/>
-            <a:ext cx="1188720" cy="457200"/>
+            <a:off x="1051560" y="4832604"/>
+            <a:ext cx="1188720" cy="438912"/>
           </a:xfrm>
           <a:prstGeom prst="rect">
             <a:avLst/>
@@ -6503,8 +6503,8 @@
         </p:nvSpPr>
         <p:spPr>
           <a:xfrm>
-            <a:off x="2194560" y="4846320"/>
-            <a:ext cx="9052560" cy="1234440"/>
+            <a:off x="2514600" y="4480560"/>
+            <a:ext cx="8625535" cy="1143000"/>
           </a:xfrm>
           <a:prstGeom prst="rect">
             <a:avLst/>
@@ -6542,7 +6542,7 @@
         </p:nvSpPr>
         <p:spPr>
           <a:xfrm>
-            <a:off x="457200" y="6400800"/>
+            <a:off x="685800" y="6400800"/>
             <a:ext cx="5486400" cy="256032"/>
           </a:xfrm>
           <a:prstGeom prst="rect">
@@ -6582,7 +6582,7 @@
         <p:spPr>
           <a:xfrm>
             <a:off x="4754880" y="6400800"/>
-            <a:ext cx="6309360" cy="256032"/>
+            <a:ext cx="5973775" cy="256032"/>
           </a:xfrm>
           <a:prstGeom prst="rect">
             <a:avLst/>
@@ -6620,7 +6620,7 @@
         </p:nvSpPr>
         <p:spPr>
           <a:xfrm>
-            <a:off x="11091672" y="6400800"/>
+            <a:off x="10865815" y="6400800"/>
             <a:ext cx="640080" cy="256032"/>
           </a:xfrm>
           <a:prstGeom prst="rect">
@@ -6691,8 +6691,8 @@
         </p:nvSpPr>
         <p:spPr>
           <a:xfrm>
-            <a:off x="457200" y="384048"/>
-            <a:ext cx="8686800" cy="274320"/>
+            <a:off x="685800" y="502920"/>
+            <a:ext cx="8229600" cy="274320"/>
           </a:xfrm>
           <a:prstGeom prst="rect">
             <a:avLst/>
@@ -6730,8 +6730,8 @@
         </p:nvSpPr>
         <p:spPr>
           <a:xfrm>
-            <a:off x="457200" y="676656"/>
-            <a:ext cx="11274552" cy="868680"/>
+            <a:off x="685800" y="804672"/>
+            <a:ext cx="10820095" cy="566928"/>
           </a:xfrm>
           <a:prstGeom prst="rect">
             <a:avLst/>
@@ -6750,7 +6750,7 @@
               <a:buNone/>
             </a:pPr>
             <a:r>
-              <a:rPr lang="en-US" sz="3000" b="1" dirty="0">
+              <a:rPr lang="en-US" sz="2800" b="1" dirty="0">
                 <a:solidFill>
                   <a:srgbClr val="222731"/>
                 </a:solidFill>
@@ -6758,9 +6758,9 @@
                 <a:ea typeface="Bricolage Grotesque" pitchFamily="34" charset="-122"/>
                 <a:cs typeface="Bricolage Grotesque" pitchFamily="34" charset="-120"/>
               </a:rPr>
-              <a:t>Returning patients trust the test — but lose momentum when rescreen comes due</a:t>
-            </a:r>
-            <a:endParaRPr lang="en-US" sz="3000" dirty="0"/>
+              <a:t>Patients trust the test but lose momentum</a:t>
+            </a:r>
+            <a:endParaRPr lang="en-US" sz="2800" dirty="0"/>
           </a:p>
         </p:txBody>
       </p:sp>
@@ -6772,7 +6772,7 @@
         </p:nvSpPr>
         <p:spPr>
           <a:xfrm>
-            <a:off x="10177272" y="384048"/>
+            <a:off x="9951415" y="475488"/>
             <a:ext cx="1554480" cy="292608"/>
           </a:xfrm>
           <a:prstGeom prst="roundRect">
@@ -6799,7 +6799,7 @@
         </p:nvSpPr>
         <p:spPr>
           <a:xfrm>
-            <a:off x="10177272" y="384048"/>
+            <a:off x="9951415" y="475488"/>
             <a:ext cx="1554480" cy="292608"/>
           </a:xfrm>
           <a:prstGeom prst="rect">
@@ -6838,12 +6838,12 @@
         </p:nvSpPr>
         <p:spPr>
           <a:xfrm>
-            <a:off x="457200" y="1783080"/>
-            <a:ext cx="5120640" cy="4343400"/>
+            <a:off x="685800" y="1691640"/>
+            <a:ext cx="4846320" cy="4069080"/>
           </a:xfrm>
           <a:prstGeom prst="roundRect">
             <a:avLst>
-              <a:gd name="adj" fmla="val 2526"/>
+              <a:gd name="adj" fmla="val 2697"/>
             </a:avLst>
           </a:prstGeom>
           <a:solidFill>
@@ -6865,7 +6865,7 @@
         </p:nvSpPr>
         <p:spPr>
           <a:xfrm>
-            <a:off x="822960" y="2148840"/>
+            <a:off x="1051560" y="2057400"/>
             <a:ext cx="548640" cy="548640"/>
           </a:xfrm>
           <a:prstGeom prst="ellipse">
@@ -6898,7 +6898,7 @@
         </p:blipFill>
         <p:spPr>
           <a:xfrm>
-            <a:off x="954634" y="2280514"/>
+            <a:off x="1183234" y="2189074"/>
             <a:ext cx="285293" cy="285293"/>
           </a:xfrm>
           <a:prstGeom prst="rect">
@@ -6914,8 +6914,8 @@
         </p:nvSpPr>
         <p:spPr>
           <a:xfrm>
-            <a:off x="822960" y="2926080"/>
-            <a:ext cx="4389120" cy="274320"/>
+            <a:off x="1051560" y="2834640"/>
+            <a:ext cx="4114800" cy="274320"/>
           </a:xfrm>
           <a:prstGeom prst="rect">
             <a:avLst/>
@@ -6953,8 +6953,8 @@
         </p:nvSpPr>
         <p:spPr>
           <a:xfrm>
-            <a:off x="822960" y="3246120"/>
-            <a:ext cx="4389120" cy="1371600"/>
+            <a:off x="1051560" y="3154680"/>
+            <a:ext cx="4114800" cy="1280160"/>
           </a:xfrm>
           <a:prstGeom prst="rect">
             <a:avLst/>
@@ -6970,7 +6970,7 @@
               <a:buNone/>
             </a:pPr>
             <a:r>
-              <a:rPr lang="en-US" sz="2400" b="1" dirty="0">
+              <a:rPr lang="en-US" sz="2200" b="1" dirty="0">
                 <a:solidFill>
                   <a:srgbClr val="FFFFFF"/>
                 </a:solidFill>
@@ -6978,9 +6978,9 @@
                 <a:ea typeface="Bricolage Grotesque" pitchFamily="34" charset="-122"/>
                 <a:cs typeface="Bricolage Grotesque" pitchFamily="34" charset="-120"/>
               </a:rPr>
-              <a:t>Rescreen isn't a new decision for patients — yet today we treat it like one.</a:t>
-            </a:r>
-            <a:endParaRPr lang="en-US" sz="2400" dirty="0"/>
+              <a:t>Rescreen isn't a new decision for patients, yet today we treat it like one.</a:t>
+            </a:r>
+            <a:endParaRPr lang="en-US" sz="2200" dirty="0"/>
           </a:p>
         </p:txBody>
       </p:sp>
@@ -6992,8 +6992,8 @@
         </p:nvSpPr>
         <p:spPr>
           <a:xfrm>
-            <a:off x="822960" y="4800600"/>
-            <a:ext cx="4389120" cy="274320"/>
+            <a:off x="1051560" y="4617720"/>
+            <a:ext cx="4114800" cy="274320"/>
           </a:xfrm>
           <a:prstGeom prst="rect">
             <a:avLst/>
@@ -7031,8 +7031,8 @@
         </p:nvSpPr>
         <p:spPr>
           <a:xfrm>
-            <a:off x="822960" y="5102352"/>
-            <a:ext cx="4389120" cy="868680"/>
+            <a:off x="1051560" y="4937760"/>
+            <a:ext cx="4114800" cy="731520"/>
           </a:xfrm>
           <a:prstGeom prst="rect">
             <a:avLst/>
@@ -7056,7 +7056,7 @@
                 <a:ea typeface="Hanken Grotesk" pitchFamily="34" charset="-122"/>
                 <a:cs typeface="Hanken Grotesk" pitchFamily="34" charset="-120"/>
               </a:rPr>
-              <a:t>If we hold the relationship between tests, completing a rescreen should feel like a quick 'yes', not starting over.</a:t>
+              <a:t>If we hold the relationship between tests, rescreen should feel like a quick 'yes', not starting over.</a:t>
             </a:r>
             <a:endParaRPr lang="en-US" sz="1350" dirty="0"/>
           </a:p>
@@ -7070,12 +7070,12 @@
         </p:nvSpPr>
         <p:spPr>
           <a:xfrm>
-            <a:off x="5897880" y="1783080"/>
-            <a:ext cx="5836615" cy="1335024"/>
+            <a:off x="5806440" y="1691640"/>
+            <a:ext cx="5699455" cy="1173480"/>
           </a:xfrm>
           <a:prstGeom prst="roundRect">
             <a:avLst>
-              <a:gd name="adj" fmla="val 8219"/>
+              <a:gd name="adj" fmla="val 9351"/>
             </a:avLst>
           </a:prstGeom>
           <a:solidFill>
@@ -7097,8 +7097,8 @@
         </p:nvSpPr>
         <p:spPr>
           <a:xfrm>
-            <a:off x="6172200" y="1965960"/>
-            <a:ext cx="2011680" cy="685800"/>
+            <a:off x="6172200" y="1856232"/>
+            <a:ext cx="1828800" cy="640080"/>
           </a:xfrm>
           <a:prstGeom prst="rect">
             <a:avLst/>
@@ -7114,7 +7114,7 @@
               <a:buNone/>
             </a:pPr>
             <a:r>
-              <a:rPr lang="en-US" sz="3200" b="1" dirty="0">
+              <a:rPr lang="en-US" sz="3000" b="1" dirty="0">
                 <a:solidFill>
                   <a:srgbClr val="2E4AED"/>
                 </a:solidFill>
@@ -7124,7 +7124,7 @@
               </a:rPr>
               <a:t>1 in 3</a:t>
             </a:r>
-            <a:endParaRPr lang="en-US" sz="3200" dirty="0"/>
+            <a:endParaRPr lang="en-US" sz="3000" dirty="0"/>
           </a:p>
         </p:txBody>
       </p:sp>
@@ -7136,8 +7136,8 @@
         </p:nvSpPr>
         <p:spPr>
           <a:xfrm>
-            <a:off x="8275320" y="1984248"/>
-            <a:ext cx="3291840" cy="640080"/>
+            <a:off x="8183880" y="1856232"/>
+            <a:ext cx="2956255" cy="640080"/>
           </a:xfrm>
           <a:prstGeom prst="rect">
             <a:avLst/>
@@ -7161,7 +7161,7 @@
                 <a:ea typeface="Hanken Grotesk" pitchFamily="34" charset="-122"/>
                 <a:cs typeface="Hanken Grotesk" pitchFamily="34" charset="-120"/>
               </a:rPr>
-              <a:t>due patients complete rescreen on time</a:t>
+              <a:t>due patients rescreen on time</a:t>
             </a:r>
             <a:endParaRPr lang="en-US" sz="1450" dirty="0"/>
           </a:p>
@@ -7175,8 +7175,8 @@
         </p:nvSpPr>
         <p:spPr>
           <a:xfrm>
-            <a:off x="6172200" y="2724912"/>
-            <a:ext cx="5394960" cy="274320"/>
+            <a:off x="6172200" y="2481072"/>
+            <a:ext cx="4967935" cy="256032"/>
           </a:xfrm>
           <a:prstGeom prst="rect">
             <a:avLst/>
@@ -7214,12 +7214,12 @@
         </p:nvSpPr>
         <p:spPr>
           <a:xfrm>
-            <a:off x="5897880" y="3264408"/>
-            <a:ext cx="5836615" cy="1335024"/>
+            <a:off x="5806440" y="3139440"/>
+            <a:ext cx="5699455" cy="1173480"/>
           </a:xfrm>
           <a:prstGeom prst="roundRect">
             <a:avLst>
-              <a:gd name="adj" fmla="val 8219"/>
+              <a:gd name="adj" fmla="val 9351"/>
             </a:avLst>
           </a:prstGeom>
           <a:solidFill>
@@ -7241,8 +7241,8 @@
         </p:nvSpPr>
         <p:spPr>
           <a:xfrm>
-            <a:off x="6172200" y="3447288"/>
-            <a:ext cx="2011680" cy="685800"/>
+            <a:off x="6172200" y="3304032"/>
+            <a:ext cx="1828800" cy="640080"/>
           </a:xfrm>
           <a:prstGeom prst="rect">
             <a:avLst/>
@@ -7258,7 +7258,7 @@
               <a:buNone/>
             </a:pPr>
             <a:r>
-              <a:rPr lang="en-US" sz="3200" b="1" dirty="0">
+              <a:rPr lang="en-US" sz="3000" b="1" dirty="0">
                 <a:solidFill>
                   <a:srgbClr val="2E4AED"/>
                 </a:solidFill>
@@ -7268,7 +7268,7 @@
               </a:rPr>
               <a:t>62%</a:t>
             </a:r>
-            <a:endParaRPr lang="en-US" sz="3200" dirty="0"/>
+            <a:endParaRPr lang="en-US" sz="3000" dirty="0"/>
           </a:p>
         </p:txBody>
       </p:sp>
@@ -7280,8 +7280,8 @@
         </p:nvSpPr>
         <p:spPr>
           <a:xfrm>
-            <a:off x="8275320" y="3465576"/>
-            <a:ext cx="3291840" cy="640080"/>
+            <a:off x="8183880" y="3304032"/>
+            <a:ext cx="2956255" cy="640080"/>
           </a:xfrm>
           <a:prstGeom prst="rect">
             <a:avLst/>
@@ -7319,8 +7319,8 @@
         </p:nvSpPr>
         <p:spPr>
           <a:xfrm>
-            <a:off x="6172200" y="4206240"/>
-            <a:ext cx="5394960" cy="274320"/>
+            <a:off x="6172200" y="3928872"/>
+            <a:ext cx="4967935" cy="256032"/>
           </a:xfrm>
           <a:prstGeom prst="rect">
             <a:avLst/>
@@ -7358,12 +7358,12 @@
         </p:nvSpPr>
         <p:spPr>
           <a:xfrm>
-            <a:off x="5897880" y="4745736"/>
-            <a:ext cx="5836615" cy="1335024"/>
+            <a:off x="5806440" y="4587240"/>
+            <a:ext cx="5699455" cy="1173480"/>
           </a:xfrm>
           <a:prstGeom prst="roundRect">
             <a:avLst>
-              <a:gd name="adj" fmla="val 8219"/>
+              <a:gd name="adj" fmla="val 9351"/>
             </a:avLst>
           </a:prstGeom>
           <a:solidFill>
@@ -7385,8 +7385,8 @@
         </p:nvSpPr>
         <p:spPr>
           <a:xfrm>
-            <a:off x="6172200" y="4928616"/>
-            <a:ext cx="2011680" cy="685800"/>
+            <a:off x="6172200" y="4751832"/>
+            <a:ext cx="1828800" cy="640080"/>
           </a:xfrm>
           <a:prstGeom prst="rect">
             <a:avLst/>
@@ -7402,7 +7402,7 @@
               <a:buNone/>
             </a:pPr>
             <a:r>
-              <a:rPr lang="en-US" sz="3200" b="1" dirty="0">
+              <a:rPr lang="en-US" sz="3000" b="1" dirty="0">
                 <a:solidFill>
                   <a:srgbClr val="2E4AED"/>
                 </a:solidFill>
@@ -7412,7 +7412,7 @@
               </a:rPr>
               <a:t>5 steps</a:t>
             </a:r>
-            <a:endParaRPr lang="en-US" sz="3200" dirty="0"/>
+            <a:endParaRPr lang="en-US" sz="3000" dirty="0"/>
           </a:p>
         </p:txBody>
       </p:sp>
@@ -7424,8 +7424,8 @@
         </p:nvSpPr>
         <p:spPr>
           <a:xfrm>
-            <a:off x="8275320" y="4946904"/>
-            <a:ext cx="3291840" cy="640080"/>
+            <a:off x="8183880" y="4751832"/>
+            <a:ext cx="2956255" cy="640080"/>
           </a:xfrm>
           <a:prstGeom prst="rect">
             <a:avLst/>
@@ -7463,8 +7463,8 @@
         </p:nvSpPr>
         <p:spPr>
           <a:xfrm>
-            <a:off x="6172200" y="5687568"/>
-            <a:ext cx="5394960" cy="274320"/>
+            <a:off x="6172200" y="5376672"/>
+            <a:ext cx="4967935" cy="256032"/>
           </a:xfrm>
           <a:prstGeom prst="rect">
             <a:avLst/>
@@ -7502,7 +7502,7 @@
         </p:nvSpPr>
         <p:spPr>
           <a:xfrm>
-            <a:off x="457200" y="6400800"/>
+            <a:off x="685800" y="6400800"/>
             <a:ext cx="5486400" cy="256032"/>
           </a:xfrm>
           <a:prstGeom prst="rect">
@@ -7542,7 +7542,7 @@
         <p:spPr>
           <a:xfrm>
             <a:off x="4754880" y="6400800"/>
-            <a:ext cx="6309360" cy="256032"/>
+            <a:ext cx="5973775" cy="256032"/>
           </a:xfrm>
           <a:prstGeom prst="rect">
             <a:avLst/>
@@ -7580,7 +7580,7 @@
         </p:nvSpPr>
         <p:spPr>
           <a:xfrm>
-            <a:off x="11091672" y="6400800"/>
+            <a:off x="10865815" y="6400800"/>
             <a:ext cx="640080" cy="256032"/>
           </a:xfrm>
           <a:prstGeom prst="rect">
@@ -7651,8 +7651,8 @@
         </p:nvSpPr>
         <p:spPr>
           <a:xfrm>
-            <a:off x="457200" y="384048"/>
-            <a:ext cx="8686800" cy="274320"/>
+            <a:off x="685800" y="502920"/>
+            <a:ext cx="8229600" cy="274320"/>
           </a:xfrm>
           <a:prstGeom prst="rect">
             <a:avLst/>
@@ -7690,8 +7690,8 @@
         </p:nvSpPr>
         <p:spPr>
           <a:xfrm>
-            <a:off x="457200" y="676656"/>
-            <a:ext cx="11274552" cy="868680"/>
+            <a:off x="685800" y="804672"/>
+            <a:ext cx="10820095" cy="566928"/>
           </a:xfrm>
           <a:prstGeom prst="rect">
             <a:avLst/>
@@ -7710,7 +7710,7 @@
               <a:buNone/>
             </a:pPr>
             <a:r>
-              <a:rPr lang="en-US" sz="3000" b="1" dirty="0">
+              <a:rPr lang="en-US" sz="2800" b="1" dirty="0">
                 <a:solidFill>
                   <a:srgbClr val="222731"/>
                 </a:solidFill>
@@ -7718,9 +7718,9 @@
                 <a:ea typeface="Bricolage Grotesque" pitchFamily="34" charset="-122"/>
                 <a:cs typeface="Bricolage Grotesque" pitchFamily="34" charset="-120"/>
               </a:rPr>
-              <a:t>Today, the rescreen journey puts the work on the patient at every stage</a:t>
-            </a:r>
-            <a:endParaRPr lang="en-US" sz="3000" dirty="0"/>
+              <a:t>Today, every stage puts the work on the patient</a:t>
+            </a:r>
+            <a:endParaRPr lang="en-US" sz="2800" dirty="0"/>
           </a:p>
         </p:txBody>
       </p:sp>
@@ -7732,7 +7732,7 @@
         </p:nvSpPr>
         <p:spPr>
           <a:xfrm>
-            <a:off x="10177272" y="384048"/>
+            <a:off x="9951415" y="475488"/>
             <a:ext cx="1554480" cy="292608"/>
           </a:xfrm>
           <a:prstGeom prst="roundRect">
@@ -7759,7 +7759,7 @@
         </p:nvSpPr>
         <p:spPr>
           <a:xfrm>
-            <a:off x="10177272" y="384048"/>
+            <a:off x="9951415" y="475488"/>
             <a:ext cx="1554480" cy="292608"/>
           </a:xfrm>
           <a:prstGeom prst="rect">
@@ -7798,8 +7798,8 @@
         </p:nvSpPr>
         <p:spPr>
           <a:xfrm>
-            <a:off x="1965960" y="1645920"/>
-            <a:ext cx="1865925" cy="548640"/>
+            <a:off x="2148840" y="1691640"/>
+            <a:ext cx="1725107" cy="548640"/>
           </a:xfrm>
           <a:prstGeom prst="roundRect">
             <a:avLst>
@@ -7825,8 +7825,8 @@
         </p:nvSpPr>
         <p:spPr>
           <a:xfrm>
-            <a:off x="2093976" y="1645920"/>
-            <a:ext cx="1683045" cy="548640"/>
+            <a:off x="2295144" y="1691640"/>
+            <a:ext cx="1505651" cy="548640"/>
           </a:xfrm>
           <a:prstGeom prst="rect">
             <a:avLst/>
@@ -7864,8 +7864,8 @@
         </p:nvSpPr>
         <p:spPr>
           <a:xfrm>
-            <a:off x="3941613" y="1645920"/>
-            <a:ext cx="1865925" cy="548640"/>
+            <a:off x="4056827" y="1691640"/>
+            <a:ext cx="1725107" cy="548640"/>
           </a:xfrm>
           <a:prstGeom prst="roundRect">
             <a:avLst>
@@ -7891,8 +7891,8 @@
         </p:nvSpPr>
         <p:spPr>
           <a:xfrm>
-            <a:off x="4069629" y="1645920"/>
-            <a:ext cx="1683045" cy="548640"/>
+            <a:off x="4203131" y="1691640"/>
+            <a:ext cx="1505651" cy="548640"/>
           </a:xfrm>
           <a:prstGeom prst="rect">
             <a:avLst/>
@@ -7930,8 +7930,8 @@
         </p:nvSpPr>
         <p:spPr>
           <a:xfrm>
-            <a:off x="5917265" y="1645920"/>
-            <a:ext cx="1865925" cy="548640"/>
+            <a:off x="5964814" y="1691640"/>
+            <a:ext cx="1725107" cy="548640"/>
           </a:xfrm>
           <a:prstGeom prst="roundRect">
             <a:avLst>
@@ -7957,8 +7957,8 @@
         </p:nvSpPr>
         <p:spPr>
           <a:xfrm>
-            <a:off x="6045281" y="1645920"/>
-            <a:ext cx="1683045" cy="548640"/>
+            <a:off x="6111118" y="1691640"/>
+            <a:ext cx="1505651" cy="548640"/>
           </a:xfrm>
           <a:prstGeom prst="rect">
             <a:avLst/>
@@ -7996,8 +7996,8 @@
         </p:nvSpPr>
         <p:spPr>
           <a:xfrm>
-            <a:off x="7892918" y="1645920"/>
-            <a:ext cx="1865925" cy="548640"/>
+            <a:off x="7872801" y="1691640"/>
+            <a:ext cx="1725107" cy="548640"/>
           </a:xfrm>
           <a:prstGeom prst="roundRect">
             <a:avLst>
@@ -8023,8 +8023,8 @@
         </p:nvSpPr>
         <p:spPr>
           <a:xfrm>
-            <a:off x="8020934" y="1645920"/>
-            <a:ext cx="1683045" cy="548640"/>
+            <a:off x="8019105" y="1691640"/>
+            <a:ext cx="1505651" cy="548640"/>
           </a:xfrm>
           <a:prstGeom prst="rect">
             <a:avLst/>
@@ -8062,8 +8062,8 @@
         </p:nvSpPr>
         <p:spPr>
           <a:xfrm>
-            <a:off x="9868571" y="1645920"/>
-            <a:ext cx="1865925" cy="548640"/>
+            <a:off x="9780788" y="1691640"/>
+            <a:ext cx="1725107" cy="548640"/>
           </a:xfrm>
           <a:prstGeom prst="roundRect">
             <a:avLst>
@@ -8089,8 +8089,8 @@
         </p:nvSpPr>
         <p:spPr>
           <a:xfrm>
-            <a:off x="9996587" y="1645920"/>
-            <a:ext cx="1683045" cy="548640"/>
+            <a:off x="9927092" y="1691640"/>
+            <a:ext cx="1505651" cy="548640"/>
           </a:xfrm>
           <a:prstGeom prst="rect">
             <a:avLst/>
@@ -8128,8 +8128,8 @@
         </p:nvSpPr>
         <p:spPr>
           <a:xfrm>
-            <a:off x="457200" y="2331720"/>
-            <a:ext cx="1371600" cy="1051560"/>
+            <a:off x="685800" y="2423160"/>
+            <a:ext cx="1280160" cy="960120"/>
           </a:xfrm>
           <a:prstGeom prst="rect">
             <a:avLst/>
@@ -8167,12 +8167,12 @@
         </p:nvSpPr>
         <p:spPr>
           <a:xfrm>
-            <a:off x="1965960" y="2331720"/>
-            <a:ext cx="1865925" cy="1051560"/>
+            <a:off x="2148840" y="2423160"/>
+            <a:ext cx="1725107" cy="960120"/>
           </a:xfrm>
           <a:prstGeom prst="roundRect">
             <a:avLst>
-              <a:gd name="adj" fmla="val 6957"/>
+              <a:gd name="adj" fmla="val 7619"/>
             </a:avLst>
           </a:prstGeom>
           <a:solidFill>
@@ -8194,8 +8194,8 @@
         </p:nvSpPr>
         <p:spPr>
           <a:xfrm>
-            <a:off x="2093976" y="2441448"/>
-            <a:ext cx="1609893" cy="868680"/>
+            <a:off x="2295144" y="2551176"/>
+            <a:ext cx="1432499" cy="758952"/>
           </a:xfrm>
           <a:prstGeom prst="rect">
             <a:avLst/>
@@ -8233,12 +8233,12 @@
         </p:nvSpPr>
         <p:spPr>
           <a:xfrm>
-            <a:off x="3941613" y="2331720"/>
-            <a:ext cx="1865925" cy="1051560"/>
+            <a:off x="4056827" y="2423160"/>
+            <a:ext cx="1725107" cy="960120"/>
           </a:xfrm>
           <a:prstGeom prst="roundRect">
             <a:avLst>
-              <a:gd name="adj" fmla="val 6957"/>
+              <a:gd name="adj" fmla="val 7619"/>
             </a:avLst>
           </a:prstGeom>
           <a:solidFill>
@@ -8260,8 +8260,8 @@
         </p:nvSpPr>
         <p:spPr>
           <a:xfrm>
-            <a:off x="4069629" y="2441448"/>
-            <a:ext cx="1609893" cy="868680"/>
+            <a:off x="4203131" y="2551176"/>
+            <a:ext cx="1432499" cy="758952"/>
           </a:xfrm>
           <a:prstGeom prst="rect">
             <a:avLst/>
@@ -8285,7 +8285,7 @@
                 <a:ea typeface="Hanken Grotesk" pitchFamily="34" charset="-122"/>
                 <a:cs typeface="Hanken Grotesk" pitchFamily="34" charset="-120"/>
               </a:rPr>
-              <a:t>Gets a generic one-way reminder, often missed</a:t>
+              <a:t>Gets a one-way reminder, often missed</a:t>
             </a:r>
             <a:endParaRPr lang="en-US" sz="1150" dirty="0"/>
           </a:p>
@@ -8299,12 +8299,12 @@
         </p:nvSpPr>
         <p:spPr>
           <a:xfrm>
-            <a:off x="5917265" y="2331720"/>
-            <a:ext cx="1865925" cy="1051560"/>
+            <a:off x="5964814" y="2423160"/>
+            <a:ext cx="1725107" cy="960120"/>
           </a:xfrm>
           <a:prstGeom prst="roundRect">
             <a:avLst>
-              <a:gd name="adj" fmla="val 6957"/>
+              <a:gd name="adj" fmla="val 7619"/>
             </a:avLst>
           </a:prstGeom>
           <a:solidFill>
@@ -8326,8 +8326,8 @@
         </p:nvSpPr>
         <p:spPr>
           <a:xfrm>
-            <a:off x="6045281" y="2441448"/>
-            <a:ext cx="1609893" cy="868680"/>
+            <a:off x="6111118" y="2551176"/>
+            <a:ext cx="1432499" cy="758952"/>
           </a:xfrm>
           <a:prstGeom prst="rect">
             <a:avLst/>
@@ -8351,7 +8351,7 @@
                 <a:ea typeface="Hanken Grotesk" pitchFamily="34" charset="-122"/>
                 <a:cs typeface="Hanken Grotesk" pitchFamily="34" charset="-120"/>
               </a:rPr>
-              <a:t>Calls or visits the provider to request a new order</a:t>
+              <a:t>Calls the provider to request a new order</a:t>
             </a:r>
             <a:endParaRPr lang="en-US" sz="1150" dirty="0"/>
           </a:p>
@@ -8365,12 +8365,12 @@
         </p:nvSpPr>
         <p:spPr>
           <a:xfrm>
-            <a:off x="7892918" y="2331720"/>
-            <a:ext cx="1865925" cy="1051560"/>
+            <a:off x="7872801" y="2423160"/>
+            <a:ext cx="1725107" cy="960120"/>
           </a:xfrm>
           <a:prstGeom prst="roundRect">
             <a:avLst>
-              <a:gd name="adj" fmla="val 6957"/>
+              <a:gd name="adj" fmla="val 7619"/>
             </a:avLst>
           </a:prstGeom>
           <a:solidFill>
@@ -8392,8 +8392,8 @@
         </p:nvSpPr>
         <p:spPr>
           <a:xfrm>
-            <a:off x="8020934" y="2441448"/>
-            <a:ext cx="1609893" cy="868680"/>
+            <a:off x="8019105" y="2551176"/>
+            <a:ext cx="1432499" cy="758952"/>
           </a:xfrm>
           <a:prstGeom prst="rect">
             <a:avLst/>
@@ -8417,7 +8417,7 @@
                 <a:ea typeface="Hanken Grotesk" pitchFamily="34" charset="-122"/>
                 <a:cs typeface="Hanken Grotesk" pitchFamily="34" charset="-120"/>
               </a:rPr>
-              <a:t>Waits for the kit, then fits collection into the week</a:t>
+              <a:t>Waits for the kit, then fits in collection</a:t>
             </a:r>
             <a:endParaRPr lang="en-US" sz="1150" dirty="0"/>
           </a:p>
@@ -8431,12 +8431,12 @@
         </p:nvSpPr>
         <p:spPr>
           <a:xfrm>
-            <a:off x="9868571" y="2331720"/>
-            <a:ext cx="1865925" cy="1051560"/>
+            <a:off x="9780788" y="2423160"/>
+            <a:ext cx="1725107" cy="960120"/>
           </a:xfrm>
           <a:prstGeom prst="roundRect">
             <a:avLst>
-              <a:gd name="adj" fmla="val 6957"/>
+              <a:gd name="adj" fmla="val 7619"/>
             </a:avLst>
           </a:prstGeom>
           <a:solidFill>
@@ -8458,8 +8458,8 @@
         </p:nvSpPr>
         <p:spPr>
           <a:xfrm>
-            <a:off x="9996587" y="2441448"/>
-            <a:ext cx="1609893" cy="868680"/>
+            <a:off x="9927092" y="2551176"/>
+            <a:ext cx="1432499" cy="758952"/>
           </a:xfrm>
           <a:prstGeom prst="rect">
             <a:avLst/>
@@ -8497,8 +8497,8 @@
         </p:nvSpPr>
         <p:spPr>
           <a:xfrm>
-            <a:off x="457200" y="3520440"/>
-            <a:ext cx="1371600" cy="1234440"/>
+            <a:off x="685800" y="3566160"/>
+            <a:ext cx="1280160" cy="1097280"/>
           </a:xfrm>
           <a:prstGeom prst="rect">
             <a:avLst/>
@@ -8536,12 +8536,12 @@
         </p:nvSpPr>
         <p:spPr>
           <a:xfrm>
-            <a:off x="1965960" y="3520440"/>
-            <a:ext cx="9768535" cy="1234440"/>
+            <a:off x="2148840" y="3566160"/>
+            <a:ext cx="9357055" cy="1097280"/>
           </a:xfrm>
           <a:prstGeom prst="roundRect">
             <a:avLst>
-              <a:gd name="adj" fmla="val 7407"/>
+              <a:gd name="adj" fmla="val 8333"/>
             </a:avLst>
           </a:prstGeom>
           <a:solidFill>
@@ -8563,8 +8563,8 @@
         </p:nvSpPr>
         <p:spPr>
           <a:xfrm>
-            <a:off x="2898922" y="3980840"/>
-            <a:ext cx="1975653" cy="86411"/>
+            <a:off x="3011394" y="3974897"/>
+            <a:ext cx="1907987" cy="63094"/>
           </a:xfrm>
           <a:prstGeom prst="line">
             <a:avLst/>
@@ -8586,8 +8586,8 @@
         </p:nvSpPr>
         <p:spPr>
           <a:xfrm>
-            <a:off x="4874575" y="4067251"/>
-            <a:ext cx="1975653" cy="172822"/>
+            <a:off x="4919381" y="4037990"/>
+            <a:ext cx="1907987" cy="126187"/>
           </a:xfrm>
           <a:prstGeom prst="line">
             <a:avLst/>
@@ -8609,8 +8609,8 @@
         </p:nvSpPr>
         <p:spPr>
           <a:xfrm flipV="1">
-            <a:off x="6850228" y="4096055"/>
-            <a:ext cx="1975653" cy="144018"/>
+            <a:off x="6827368" y="4059022"/>
+            <a:ext cx="1907987" cy="105156"/>
           </a:xfrm>
           <a:prstGeom prst="line">
             <a:avLst/>
@@ -8632,8 +8632,8 @@
         </p:nvSpPr>
         <p:spPr>
           <a:xfrm flipV="1">
-            <a:off x="8825880" y="4009644"/>
-            <a:ext cx="1975653" cy="86411"/>
+            <a:off x="8735355" y="3995928"/>
+            <a:ext cx="1907987" cy="63094"/>
           </a:xfrm>
           <a:prstGeom prst="line">
             <a:avLst/>
@@ -8655,7 +8655,7 @@
         </p:nvSpPr>
         <p:spPr>
           <a:xfrm>
-            <a:off x="2816626" y="3898544"/>
+            <a:off x="2929098" y="3892601"/>
             <a:ext cx="164592" cy="164592"/>
           </a:xfrm>
           <a:prstGeom prst="ellipse">
@@ -8680,8 +8680,8 @@
         </p:nvSpPr>
         <p:spPr>
           <a:xfrm>
-            <a:off x="1965960" y="4099712"/>
-            <a:ext cx="1865925" cy="237744"/>
+            <a:off x="2148840" y="4093769"/>
+            <a:ext cx="1725107" cy="237744"/>
           </a:xfrm>
           <a:prstGeom prst="rect">
             <a:avLst/>
@@ -8719,7 +8719,7 @@
         </p:nvSpPr>
         <p:spPr>
           <a:xfrm>
-            <a:off x="4792279" y="3984955"/>
+            <a:off x="4837085" y="3955694"/>
             <a:ext cx="164592" cy="164592"/>
           </a:xfrm>
           <a:prstGeom prst="ellipse">
@@ -8744,8 +8744,8 @@
         </p:nvSpPr>
         <p:spPr>
           <a:xfrm>
-            <a:off x="3941613" y="4186123"/>
-            <a:ext cx="1865925" cy="237744"/>
+            <a:off x="4056827" y="4156862"/>
+            <a:ext cx="1725107" cy="237744"/>
           </a:xfrm>
           <a:prstGeom prst="rect">
             <a:avLst/>
@@ -8783,7 +8783,7 @@
         </p:nvSpPr>
         <p:spPr>
           <a:xfrm>
-            <a:off x="6767932" y="4157777"/>
+            <a:off x="6745072" y="4081882"/>
             <a:ext cx="164592" cy="164592"/>
           </a:xfrm>
           <a:prstGeom prst="ellipse">
@@ -8808,8 +8808,8 @@
         </p:nvSpPr>
         <p:spPr>
           <a:xfrm>
-            <a:off x="5917265" y="4358945"/>
-            <a:ext cx="1865925" cy="237744"/>
+            <a:off x="5964814" y="4283050"/>
+            <a:ext cx="1725107" cy="237744"/>
           </a:xfrm>
           <a:prstGeom prst="rect">
             <a:avLst/>
@@ -8847,7 +8847,7 @@
         </p:nvSpPr>
         <p:spPr>
           <a:xfrm>
-            <a:off x="8743584" y="4013759"/>
+            <a:off x="8653059" y="3976726"/>
             <a:ext cx="164592" cy="164592"/>
           </a:xfrm>
           <a:prstGeom prst="ellipse">
@@ -8872,8 +8872,8 @@
         </p:nvSpPr>
         <p:spPr>
           <a:xfrm>
-            <a:off x="7892918" y="4214927"/>
-            <a:ext cx="1865925" cy="237744"/>
+            <a:off x="7872801" y="4177894"/>
+            <a:ext cx="1725107" cy="237744"/>
           </a:xfrm>
           <a:prstGeom prst="rect">
             <a:avLst/>
@@ -8911,7 +8911,7 @@
         </p:nvSpPr>
         <p:spPr>
           <a:xfrm>
-            <a:off x="10719237" y="3927348"/>
+            <a:off x="10561046" y="3913632"/>
             <a:ext cx="164592" cy="164592"/>
           </a:xfrm>
           <a:prstGeom prst="ellipse">
@@ -8936,8 +8936,8 @@
         </p:nvSpPr>
         <p:spPr>
           <a:xfrm>
-            <a:off x="9868571" y="4128516"/>
-            <a:ext cx="1865925" cy="237744"/>
+            <a:off x="9780788" y="4114800"/>
+            <a:ext cx="1725107" cy="237744"/>
           </a:xfrm>
           <a:prstGeom prst="rect">
             <a:avLst/>
@@ -8975,8 +8975,8 @@
         </p:nvSpPr>
         <p:spPr>
           <a:xfrm>
-            <a:off x="457200" y="4892040"/>
-            <a:ext cx="1371600" cy="1280160"/>
+            <a:off x="685800" y="4846320"/>
+            <a:ext cx="1280160" cy="914400"/>
           </a:xfrm>
           <a:prstGeom prst="rect">
             <a:avLst/>
@@ -9014,12 +9014,12 @@
         </p:nvSpPr>
         <p:spPr>
           <a:xfrm>
-            <a:off x="1965960" y="4892040"/>
-            <a:ext cx="1865925" cy="1280160"/>
+            <a:off x="2148840" y="4846320"/>
+            <a:ext cx="1725107" cy="914400"/>
           </a:xfrm>
           <a:prstGeom prst="roundRect">
             <a:avLst>
-              <a:gd name="adj" fmla="val 5714"/>
+              <a:gd name="adj" fmla="val 8000"/>
             </a:avLst>
           </a:prstGeom>
           <a:solidFill>
@@ -9041,8 +9041,8 @@
         </p:nvSpPr>
         <p:spPr>
           <a:xfrm>
-            <a:off x="2093976" y="5001768"/>
-            <a:ext cx="1609893" cy="1097280"/>
+            <a:off x="2295144" y="4974336"/>
+            <a:ext cx="1432499" cy="713232"/>
           </a:xfrm>
           <a:prstGeom prst="rect">
             <a:avLst/>
@@ -9080,12 +9080,12 @@
         </p:nvSpPr>
         <p:spPr>
           <a:xfrm>
-            <a:off x="3941613" y="4892040"/>
-            <a:ext cx="1865925" cy="1280160"/>
+            <a:off x="4056827" y="4846320"/>
+            <a:ext cx="1725107" cy="914400"/>
           </a:xfrm>
           <a:prstGeom prst="roundRect">
             <a:avLst>
-              <a:gd name="adj" fmla="val 5714"/>
+              <a:gd name="adj" fmla="val 8000"/>
             </a:avLst>
           </a:prstGeom>
           <a:solidFill>
@@ -9107,8 +9107,8 @@
         </p:nvSpPr>
         <p:spPr>
           <a:xfrm>
-            <a:off x="4069629" y="5001768"/>
-            <a:ext cx="1609893" cy="1097280"/>
+            <a:off x="4203131" y="4974336"/>
+            <a:ext cx="1432499" cy="713232"/>
           </a:xfrm>
           <a:prstGeom prst="rect">
             <a:avLst/>
@@ -9146,12 +9146,12 @@
         </p:nvSpPr>
         <p:spPr>
           <a:xfrm>
-            <a:off x="5917265" y="4892040"/>
-            <a:ext cx="1865925" cy="1280160"/>
+            <a:off x="5964814" y="4846320"/>
+            <a:ext cx="1725107" cy="914400"/>
           </a:xfrm>
           <a:prstGeom prst="roundRect">
             <a:avLst>
-              <a:gd name="adj" fmla="val 5714"/>
+              <a:gd name="adj" fmla="val 8000"/>
             </a:avLst>
           </a:prstGeom>
           <a:solidFill>
@@ -9173,8 +9173,8 @@
         </p:nvSpPr>
         <p:spPr>
           <a:xfrm>
-            <a:off x="6045281" y="5001768"/>
-            <a:ext cx="1609893" cy="1097280"/>
+            <a:off x="6111118" y="4974336"/>
+            <a:ext cx="1432499" cy="713232"/>
           </a:xfrm>
           <a:prstGeom prst="rect">
             <a:avLst/>
@@ -9198,7 +9198,7 @@
                 <a:ea typeface="Hanken Grotesk" pitchFamily="34" charset="-122"/>
                 <a:cs typeface="Hanken Grotesk" pitchFamily="34" charset="-120"/>
               </a:rPr>
-              <a:t>Extra step with the provider stalls most patients</a:t>
+              <a:t>Extra provider step stalls most patients</a:t>
             </a:r>
             <a:endParaRPr lang="en-US" sz="1150" dirty="0"/>
           </a:p>
@@ -9212,12 +9212,12 @@
         </p:nvSpPr>
         <p:spPr>
           <a:xfrm>
-            <a:off x="7892918" y="4892040"/>
-            <a:ext cx="1865925" cy="1280160"/>
+            <a:off x="7872801" y="4846320"/>
+            <a:ext cx="1725107" cy="914400"/>
           </a:xfrm>
           <a:prstGeom prst="roundRect">
             <a:avLst>
-              <a:gd name="adj" fmla="val 5714"/>
+              <a:gd name="adj" fmla="val 8000"/>
             </a:avLst>
           </a:prstGeom>
           <a:solidFill>
@@ -9239,8 +9239,8 @@
         </p:nvSpPr>
         <p:spPr>
           <a:xfrm>
-            <a:off x="8020934" y="5001768"/>
-            <a:ext cx="1609893" cy="1097280"/>
+            <a:off x="8019105" y="4974336"/>
+            <a:ext cx="1432499" cy="713232"/>
           </a:xfrm>
           <a:prstGeom prst="rect">
             <a:avLst/>
@@ -9264,7 +9264,7 @@
                 <a:ea typeface="Hanken Grotesk" pitchFamily="34" charset="-122"/>
                 <a:cs typeface="Hanken Grotesk" pitchFamily="34" charset="-120"/>
               </a:rPr>
-              <a:t>No status updates after the order is placed</a:t>
+              <a:t>No status updates after the order</a:t>
             </a:r>
             <a:endParaRPr lang="en-US" sz="1150" dirty="0"/>
           </a:p>
@@ -9278,12 +9278,12 @@
         </p:nvSpPr>
         <p:spPr>
           <a:xfrm>
-            <a:off x="9868571" y="4892040"/>
-            <a:ext cx="1865925" cy="1280160"/>
+            <a:off x="9780788" y="4846320"/>
+            <a:ext cx="1725107" cy="914400"/>
           </a:xfrm>
           <a:prstGeom prst="roundRect">
             <a:avLst>
-              <a:gd name="adj" fmla="val 5714"/>
+              <a:gd name="adj" fmla="val 8000"/>
             </a:avLst>
           </a:prstGeom>
           <a:solidFill>
@@ -9305,8 +9305,8 @@
         </p:nvSpPr>
         <p:spPr>
           <a:xfrm>
-            <a:off x="9996587" y="5001768"/>
-            <a:ext cx="1609893" cy="1097280"/>
+            <a:off x="9927092" y="4974336"/>
+            <a:ext cx="1432499" cy="713232"/>
           </a:xfrm>
           <a:prstGeom prst="rect">
             <a:avLst/>
@@ -9330,7 +9330,7 @@
                 <a:ea typeface="Hanken Grotesk" pitchFamily="34" charset="-122"/>
                 <a:cs typeface="Hanken Grotesk" pitchFamily="34" charset="-120"/>
               </a:rPr>
-              <a:t>No bridge to the next cycle after results</a:t>
+              <a:t>No bridge to the next cycle</a:t>
             </a:r>
             <a:endParaRPr lang="en-US" sz="1150" dirty="0"/>
           </a:p>
@@ -9344,7 +9344,7 @@
         </p:nvSpPr>
         <p:spPr>
           <a:xfrm>
-            <a:off x="457200" y="6400800"/>
+            <a:off x="685800" y="6400800"/>
             <a:ext cx="5486400" cy="256032"/>
           </a:xfrm>
           <a:prstGeom prst="rect">
@@ -9384,7 +9384,7 @@
         <p:spPr>
           <a:xfrm>
             <a:off x="4754880" y="6400800"/>
-            <a:ext cx="6309360" cy="256032"/>
+            <a:ext cx="5973775" cy="256032"/>
           </a:xfrm>
           <a:prstGeom prst="rect">
             <a:avLst/>
@@ -9422,7 +9422,7 @@
         </p:nvSpPr>
         <p:spPr>
           <a:xfrm>
-            <a:off x="11091672" y="6400800"/>
+            <a:off x="10865815" y="6400800"/>
             <a:ext cx="640080" cy="256032"/>
           </a:xfrm>
           <a:prstGeom prst="rect">
@@ -9493,8 +9493,8 @@
         </p:nvSpPr>
         <p:spPr>
           <a:xfrm>
-            <a:off x="457200" y="384048"/>
-            <a:ext cx="8686800" cy="274320"/>
+            <a:off x="685800" y="502920"/>
+            <a:ext cx="8229600" cy="274320"/>
           </a:xfrm>
           <a:prstGeom prst="rect">
             <a:avLst/>
@@ -9532,8 +9532,8 @@
         </p:nvSpPr>
         <p:spPr>
           <a:xfrm>
-            <a:off x="457200" y="676656"/>
-            <a:ext cx="11274552" cy="868680"/>
+            <a:off x="685800" y="804672"/>
+            <a:ext cx="10820095" cy="566928"/>
           </a:xfrm>
           <a:prstGeom prst="rect">
             <a:avLst/>
@@ -9552,7 +9552,7 @@
               <a:buNone/>
             </a:pPr>
             <a:r>
-              <a:rPr lang="en-US" sz="3000" b="1" dirty="0">
+              <a:rPr lang="en-US" sz="2800" b="1" dirty="0">
                 <a:solidFill>
                   <a:srgbClr val="222731"/>
                 </a:solidFill>
@@ -9560,9 +9560,9 @@
                 <a:ea typeface="Bricolage Grotesque" pitchFamily="34" charset="-122"/>
                 <a:cs typeface="Bricolage Grotesque" pitchFamily="34" charset="-120"/>
               </a:rPr>
-              <a:t>Patients say the hard part isn't the test — it's remembering and restarting</a:t>
-            </a:r>
-            <a:endParaRPr lang="en-US" sz="3000" dirty="0"/>
+              <a:t>The hard part is remembering, not the test</a:t>
+            </a:r>
+            <a:endParaRPr lang="en-US" sz="2800" dirty="0"/>
           </a:p>
         </p:txBody>
       </p:sp>
@@ -9574,7 +9574,7 @@
         </p:nvSpPr>
         <p:spPr>
           <a:xfrm>
-            <a:off x="9720072" y="384048"/>
+            <a:off x="9494215" y="475488"/>
             <a:ext cx="2011680" cy="292608"/>
           </a:xfrm>
           <a:prstGeom prst="roundRect">
@@ -9601,7 +9601,7 @@
         </p:nvSpPr>
         <p:spPr>
           <a:xfrm>
-            <a:off x="9720072" y="384048"/>
+            <a:off x="9494215" y="475488"/>
             <a:ext cx="2011680" cy="292608"/>
           </a:xfrm>
           <a:prstGeom prst="rect">
@@ -9640,12 +9640,12 @@
         </p:nvSpPr>
         <p:spPr>
           <a:xfrm>
-            <a:off x="457200" y="1783080"/>
-            <a:ext cx="3576218" cy="4343400"/>
+            <a:off x="685800" y="1691640"/>
+            <a:ext cx="3423818" cy="4069080"/>
           </a:xfrm>
           <a:prstGeom prst="roundRect">
             <a:avLst>
-              <a:gd name="adj" fmla="val 3068"/>
+              <a:gd name="adj" fmla="val 3205"/>
             </a:avLst>
           </a:prstGeom>
           <a:solidFill>
@@ -9675,8 +9675,8 @@
         </p:blipFill>
         <p:spPr>
           <a:xfrm>
-            <a:off x="731520" y="2057400"/>
-            <a:ext cx="384048" cy="384048"/>
+            <a:off x="1051560" y="2057400"/>
+            <a:ext cx="365760" cy="365760"/>
           </a:xfrm>
           <a:prstGeom prst="rect">
             <a:avLst/>
@@ -9691,8 +9691,8 @@
         </p:nvSpPr>
         <p:spPr>
           <a:xfrm>
-            <a:off x="731520" y="2606040"/>
-            <a:ext cx="3027578" cy="1828800"/>
+            <a:off x="1051560" y="2606040"/>
+            <a:ext cx="2692298" cy="1463040"/>
           </a:xfrm>
           <a:prstGeom prst="rect">
             <a:avLst/>
@@ -9708,7 +9708,7 @@
               <a:buNone/>
             </a:pPr>
             <a:r>
-              <a:rPr lang="en-US" sz="1700" dirty="0">
+              <a:rPr lang="en-US" sz="1600" dirty="0">
                 <a:solidFill>
                   <a:srgbClr val="222731"/>
                 </a:solidFill>
@@ -9716,9 +9716,9 @@
                 <a:ea typeface="Bricolage Grotesque" pitchFamily="34" charset="-122"/>
                 <a:cs typeface="Bricolage Grotesque" pitchFamily="34" charset="-120"/>
               </a:rPr>
-              <a:t>“I did it three years ago and honestly forgot it was a repeating thing until my doctor brought it up.”</a:t>
-            </a:r>
-            <a:endParaRPr lang="en-US" sz="1700" dirty="0"/>
+              <a:t>“I did it three years ago and forgot it was a repeating thing until my doctor brought it up.”</a:t>
+            </a:r>
+            <a:endParaRPr lang="en-US" sz="1600" dirty="0"/>
           </a:p>
         </p:txBody>
       </p:sp>
@@ -9730,8 +9730,8 @@
         </p:nvSpPr>
         <p:spPr>
           <a:xfrm>
-            <a:off x="731520" y="4572000"/>
-            <a:ext cx="3027578" cy="0"/>
+            <a:off x="1051560" y="4206240"/>
+            <a:ext cx="2692298" cy="0"/>
           </a:xfrm>
           <a:prstGeom prst="line">
             <a:avLst/>
@@ -9753,8 +9753,8 @@
         </p:nvSpPr>
         <p:spPr>
           <a:xfrm>
-            <a:off x="731520" y="4709160"/>
-            <a:ext cx="3027578" cy="292608"/>
+            <a:off x="1051560" y="4343400"/>
+            <a:ext cx="2692298" cy="292608"/>
           </a:xfrm>
           <a:prstGeom prst="rect">
             <a:avLst/>
@@ -9792,8 +9792,8 @@
         </p:nvSpPr>
         <p:spPr>
           <a:xfrm>
-            <a:off x="731520" y="5029200"/>
-            <a:ext cx="3027578" cy="274320"/>
+            <a:off x="1051560" y="4654296"/>
+            <a:ext cx="2692298" cy="256032"/>
           </a:xfrm>
           <a:prstGeom prst="rect">
             <a:avLst/>
@@ -9817,7 +9817,7 @@
                 <a:ea typeface="Hanken Grotesk" pitchFamily="34" charset="-122"/>
                 <a:cs typeface="Hanken Grotesk" pitchFamily="34" charset="-120"/>
               </a:rPr>
-              <a:t>Age 50–59 · 2nd rescreen · employed full-time</a:t>
+              <a:t>Age 50–59 · 2nd rescreen · employed</a:t>
             </a:r>
             <a:endParaRPr lang="en-US" sz="1050" dirty="0"/>
           </a:p>
@@ -9831,8 +9831,8 @@
         </p:nvSpPr>
         <p:spPr>
           <a:xfrm>
-            <a:off x="731520" y="5440680"/>
-            <a:ext cx="3027578" cy="411480"/>
+            <a:off x="1051560" y="4983480"/>
+            <a:ext cx="2692298" cy="411480"/>
           </a:xfrm>
           <a:prstGeom prst="roundRect">
             <a:avLst>
@@ -9858,8 +9858,8 @@
         </p:nvSpPr>
         <p:spPr>
           <a:xfrm>
-            <a:off x="868680" y="5440680"/>
-            <a:ext cx="2753258" cy="411480"/>
+            <a:off x="1188720" y="4983480"/>
+            <a:ext cx="2417978" cy="411480"/>
           </a:xfrm>
           <a:prstGeom prst="rect">
             <a:avLst/>
@@ -9897,12 +9897,12 @@
         </p:nvSpPr>
         <p:spPr>
           <a:xfrm>
-            <a:off x="4307738" y="1783080"/>
-            <a:ext cx="3576218" cy="4343400"/>
+            <a:off x="4383938" y="1691640"/>
+            <a:ext cx="3423818" cy="4069080"/>
           </a:xfrm>
           <a:prstGeom prst="roundRect">
             <a:avLst>
-              <a:gd name="adj" fmla="val 3068"/>
+              <a:gd name="adj" fmla="val 3205"/>
             </a:avLst>
           </a:prstGeom>
           <a:solidFill>
@@ -9932,8 +9932,8 @@
         </p:blipFill>
         <p:spPr>
           <a:xfrm>
-            <a:off x="4582058" y="2057400"/>
-            <a:ext cx="384048" cy="384048"/>
+            <a:off x="4749698" y="2057400"/>
+            <a:ext cx="365760" cy="365760"/>
           </a:xfrm>
           <a:prstGeom prst="rect">
             <a:avLst/>
@@ -9948,8 +9948,8 @@
         </p:nvSpPr>
         <p:spPr>
           <a:xfrm>
-            <a:off x="4582058" y="2606040"/>
-            <a:ext cx="3027578" cy="1828800"/>
+            <a:off x="4749698" y="2606040"/>
+            <a:ext cx="2692298" cy="1463040"/>
           </a:xfrm>
           <a:prstGeom prst="rect">
             <a:avLst/>
@@ -9965,7 +9965,7 @@
               <a:buNone/>
             </a:pPr>
             <a:r>
-              <a:rPr lang="en-US" sz="1700" dirty="0">
+              <a:rPr lang="en-US" sz="1600" dirty="0">
                 <a:solidFill>
                   <a:srgbClr val="222731"/>
                 </a:solidFill>
@@ -9973,9 +9973,9 @@
                 <a:ea typeface="Bricolage Grotesque" pitchFamily="34" charset="-122"/>
                 <a:cs typeface="Bricolage Grotesque" pitchFamily="34" charset="-120"/>
               </a:rPr>
-              <a:t>“I got a text, but I couldn't reply to it — so I just meant to call and never did.”</a:t>
-            </a:r>
-            <a:endParaRPr lang="en-US" sz="1700" dirty="0"/>
+              <a:t>“I got a text, but I couldn't reply to it — so I meant to call and never did.”</a:t>
+            </a:r>
+            <a:endParaRPr lang="en-US" sz="1600" dirty="0"/>
           </a:p>
         </p:txBody>
       </p:sp>
@@ -9987,8 +9987,8 @@
         </p:nvSpPr>
         <p:spPr>
           <a:xfrm>
-            <a:off x="4582058" y="4572000"/>
-            <a:ext cx="3027578" cy="0"/>
+            <a:off x="4749698" y="4206240"/>
+            <a:ext cx="2692298" cy="0"/>
           </a:xfrm>
           <a:prstGeom prst="line">
             <a:avLst/>
@@ -10010,8 +10010,8 @@
         </p:nvSpPr>
         <p:spPr>
           <a:xfrm>
-            <a:off x="4582058" y="4709160"/>
-            <a:ext cx="3027578" cy="292608"/>
+            <a:off x="4749698" y="4343400"/>
+            <a:ext cx="2692298" cy="292608"/>
           </a:xfrm>
           <a:prstGeom prst="rect">
             <a:avLst/>
@@ -10049,8 +10049,8 @@
         </p:nvSpPr>
         <p:spPr>
           <a:xfrm>
-            <a:off x="4582058" y="5029200"/>
-            <a:ext cx="3027578" cy="274320"/>
+            <a:off x="4749698" y="4654296"/>
+            <a:ext cx="2692298" cy="256032"/>
           </a:xfrm>
           <a:prstGeom prst="rect">
             <a:avLst/>
@@ -10088,8 +10088,8 @@
         </p:nvSpPr>
         <p:spPr>
           <a:xfrm>
-            <a:off x="4582058" y="5440680"/>
-            <a:ext cx="3027578" cy="411480"/>
+            <a:off x="4749698" y="4983480"/>
+            <a:ext cx="2692298" cy="411480"/>
           </a:xfrm>
           <a:prstGeom prst="roundRect">
             <a:avLst>
@@ -10115,8 +10115,8 @@
         </p:nvSpPr>
         <p:spPr>
           <a:xfrm>
-            <a:off x="4719218" y="5440680"/>
-            <a:ext cx="2753258" cy="411480"/>
+            <a:off x="4886858" y="4983480"/>
+            <a:ext cx="2417978" cy="411480"/>
           </a:xfrm>
           <a:prstGeom prst="rect">
             <a:avLst/>
@@ -10154,12 +10154,12 @@
         </p:nvSpPr>
         <p:spPr>
           <a:xfrm>
-            <a:off x="8158277" y="1783080"/>
-            <a:ext cx="3576218" cy="4343400"/>
+            <a:off x="8082077" y="1691640"/>
+            <a:ext cx="3423818" cy="4069080"/>
           </a:xfrm>
           <a:prstGeom prst="roundRect">
             <a:avLst>
-              <a:gd name="adj" fmla="val 3068"/>
+              <a:gd name="adj" fmla="val 3205"/>
             </a:avLst>
           </a:prstGeom>
           <a:solidFill>
@@ -10189,8 +10189,8 @@
         </p:blipFill>
         <p:spPr>
           <a:xfrm>
-            <a:off x="8432597" y="2057400"/>
-            <a:ext cx="384048" cy="384048"/>
+            <a:off x="8447837" y="2057400"/>
+            <a:ext cx="365760" cy="365760"/>
           </a:xfrm>
           <a:prstGeom prst="rect">
             <a:avLst/>
@@ -10205,8 +10205,8 @@
         </p:nvSpPr>
         <p:spPr>
           <a:xfrm>
-            <a:off x="8432597" y="2606040"/>
-            <a:ext cx="3027578" cy="1828800"/>
+            <a:off x="8447837" y="2606040"/>
+            <a:ext cx="2692298" cy="1463040"/>
           </a:xfrm>
           <a:prstGeom prst="rect">
             <a:avLst/>
@@ -10222,7 +10222,7 @@
               <a:buNone/>
             </a:pPr>
             <a:r>
-              <a:rPr lang="en-US" sz="1700" dirty="0">
+              <a:rPr lang="en-US" sz="1600" dirty="0">
                 <a:solidFill>
                   <a:srgbClr val="222731"/>
                 </a:solidFill>
@@ -10232,7 +10232,7 @@
               </a:rPr>
               <a:t>“If you could just send me the kit again, I'd do it. It's the phone calls I avoid.”</a:t>
             </a:r>
-            <a:endParaRPr lang="en-US" sz="1700" dirty="0"/>
+            <a:endParaRPr lang="en-US" sz="1600" dirty="0"/>
           </a:p>
         </p:txBody>
       </p:sp>
@@ -10244,8 +10244,8 @@
         </p:nvSpPr>
         <p:spPr>
           <a:xfrm>
-            <a:off x="8432597" y="4572000"/>
-            <a:ext cx="3027578" cy="0"/>
+            <a:off x="8447837" y="4206240"/>
+            <a:ext cx="2692298" cy="0"/>
           </a:xfrm>
           <a:prstGeom prst="line">
             <a:avLst/>
@@ -10267,8 +10267,8 @@
         </p:nvSpPr>
         <p:spPr>
           <a:xfrm>
-            <a:off x="8432597" y="4709160"/>
-            <a:ext cx="3027578" cy="292608"/>
+            <a:off x="8447837" y="4343400"/>
+            <a:ext cx="2692298" cy="292608"/>
           </a:xfrm>
           <a:prstGeom prst="rect">
             <a:avLst/>
@@ -10306,8 +10306,8 @@
         </p:nvSpPr>
         <p:spPr>
           <a:xfrm>
-            <a:off x="8432597" y="5029200"/>
-            <a:ext cx="3027578" cy="274320"/>
+            <a:off x="8447837" y="4654296"/>
+            <a:ext cx="2692298" cy="256032"/>
           </a:xfrm>
           <a:prstGeom prst="rect">
             <a:avLst/>
@@ -10345,8 +10345,8 @@
         </p:nvSpPr>
         <p:spPr>
           <a:xfrm>
-            <a:off x="8432597" y="5440680"/>
-            <a:ext cx="3027578" cy="411480"/>
+            <a:off x="8447837" y="4983480"/>
+            <a:ext cx="2692298" cy="411480"/>
           </a:xfrm>
           <a:prstGeom prst="roundRect">
             <a:avLst>
@@ -10372,8 +10372,8 @@
         </p:nvSpPr>
         <p:spPr>
           <a:xfrm>
-            <a:off x="8569757" y="5440680"/>
-            <a:ext cx="2753258" cy="411480"/>
+            <a:off x="8584997" y="4983480"/>
+            <a:ext cx="2417978" cy="411480"/>
           </a:xfrm>
           <a:prstGeom prst="rect">
             <a:avLst/>
@@ -10411,7 +10411,7 @@
         </p:nvSpPr>
         <p:spPr>
           <a:xfrm>
-            <a:off x="457200" y="6400800"/>
+            <a:off x="685800" y="6400800"/>
             <a:ext cx="5486400" cy="256032"/>
           </a:xfrm>
           <a:prstGeom prst="rect">
@@ -10451,7 +10451,7 @@
         <p:spPr>
           <a:xfrm>
             <a:off x="4754880" y="6400800"/>
-            <a:ext cx="6309360" cy="256032"/>
+            <a:ext cx="5973775" cy="256032"/>
           </a:xfrm>
           <a:prstGeom prst="rect">
             <a:avLst/>
@@ -10489,7 +10489,7 @@
         </p:nvSpPr>
         <p:spPr>
           <a:xfrm>
-            <a:off x="11091672" y="6400800"/>
+            <a:off x="10865815" y="6400800"/>
             <a:ext cx="640080" cy="256032"/>
           </a:xfrm>
           <a:prstGeom prst="rect">
@@ -10560,8 +10560,8 @@
         </p:nvSpPr>
         <p:spPr>
           <a:xfrm>
-            <a:off x="457200" y="384048"/>
-            <a:ext cx="8686800" cy="274320"/>
+            <a:off x="685800" y="502920"/>
+            <a:ext cx="8229600" cy="274320"/>
           </a:xfrm>
           <a:prstGeom prst="rect">
             <a:avLst/>
@@ -10599,8 +10599,8 @@
         </p:nvSpPr>
         <p:spPr>
           <a:xfrm>
-            <a:off x="457200" y="676656"/>
-            <a:ext cx="11274552" cy="868680"/>
+            <a:off x="685800" y="804672"/>
+            <a:ext cx="10820095" cy="566928"/>
           </a:xfrm>
           <a:prstGeom prst="rect">
             <a:avLst/>
@@ -10619,7 +10619,7 @@
               <a:buNone/>
             </a:pPr>
             <a:r>
-              <a:rPr lang="en-US" sz="3000" b="1" dirty="0">
+              <a:rPr lang="en-US" sz="2800" b="1" dirty="0">
                 <a:solidFill>
                   <a:srgbClr val="222731"/>
                 </a:solidFill>
@@ -10627,9 +10627,9 @@
                 <a:ea typeface="Bricolage Grotesque" pitchFamily="34" charset="-122"/>
                 <a:cs typeface="Bricolage Grotesque" pitchFamily="34" charset="-120"/>
               </a:rPr>
-              <a:t>Rescreen becomes a conversation we start — not a task patients have to remember</a:t>
-            </a:r>
-            <a:endParaRPr lang="en-US" sz="3000" dirty="0"/>
+              <a:t>Rescreen becomes a conversation we start</a:t>
+            </a:r>
+            <a:endParaRPr lang="en-US" sz="2800" dirty="0"/>
           </a:p>
         </p:txBody>
       </p:sp>
@@ -10641,7 +10641,7 @@
         </p:nvSpPr>
         <p:spPr>
           <a:xfrm>
-            <a:off x="8988552" y="384048"/>
+            <a:off x="8762695" y="475488"/>
             <a:ext cx="2743200" cy="329184"/>
           </a:xfrm>
           <a:prstGeom prst="roundRect">
@@ -10668,7 +10668,7 @@
         </p:nvSpPr>
         <p:spPr>
           <a:xfrm>
-            <a:off x="8988552" y="384048"/>
+            <a:off x="8762695" y="475488"/>
             <a:ext cx="2743200" cy="329184"/>
           </a:xfrm>
           <a:prstGeom prst="rect">
@@ -10707,12 +10707,12 @@
         </p:nvSpPr>
         <p:spPr>
           <a:xfrm>
-            <a:off x="457200" y="1783080"/>
-            <a:ext cx="3576218" cy="4343400"/>
+            <a:off x="685800" y="1691640"/>
+            <a:ext cx="3423818" cy="4069080"/>
           </a:xfrm>
           <a:prstGeom prst="roundRect">
             <a:avLst>
-              <a:gd name="adj" fmla="val 3068"/>
+              <a:gd name="adj" fmla="val 3205"/>
             </a:avLst>
           </a:prstGeom>
           <a:solidFill>
@@ -10734,8 +10734,8 @@
         </p:nvSpPr>
         <p:spPr>
           <a:xfrm>
-            <a:off x="777240" y="2103120"/>
-            <a:ext cx="658368" cy="658368"/>
+            <a:off x="1051560" y="2057400"/>
+            <a:ext cx="585216" cy="585216"/>
           </a:xfrm>
           <a:prstGeom prst="ellipse">
             <a:avLst/>
@@ -10767,8 +10767,8 @@
         </p:blipFill>
         <p:spPr>
           <a:xfrm>
-            <a:off x="935248" y="2261128"/>
-            <a:ext cx="342351" cy="342351"/>
+            <a:off x="1192012" y="2197852"/>
+            <a:ext cx="304312" cy="304312"/>
           </a:xfrm>
           <a:prstGeom prst="rect">
             <a:avLst/>
@@ -10783,8 +10783,8 @@
         </p:nvSpPr>
         <p:spPr>
           <a:xfrm>
-            <a:off x="777240" y="2953512"/>
-            <a:ext cx="2936138" cy="274320"/>
+            <a:off x="1051560" y="2834640"/>
+            <a:ext cx="2692298" cy="274320"/>
           </a:xfrm>
           <a:prstGeom prst="rect">
             <a:avLst/>
@@ -10822,8 +10822,8 @@
         </p:nvSpPr>
         <p:spPr>
           <a:xfrm>
-            <a:off x="777240" y="3227832"/>
-            <a:ext cx="2936138" cy="457200"/>
+            <a:off x="1051560" y="3108960"/>
+            <a:ext cx="2692298" cy="411480"/>
           </a:xfrm>
           <a:prstGeom prst="rect">
             <a:avLst/>
@@ -10839,7 +10839,7 @@
               <a:buNone/>
             </a:pPr>
             <a:r>
-              <a:rPr lang="en-US" sz="2000" b="1" dirty="0">
+              <a:rPr lang="en-US" sz="1900" b="1" dirty="0">
                 <a:solidFill>
                   <a:srgbClr val="222731"/>
                 </a:solidFill>
@@ -10849,7 +10849,7 @@
               </a:rPr>
               <a:t>We remember for them</a:t>
             </a:r>
-            <a:endParaRPr lang="en-US" sz="2000" dirty="0"/>
+            <a:endParaRPr lang="en-US" sz="1900" dirty="0"/>
           </a:p>
         </p:txBody>
       </p:sp>
@@ -10861,12 +10861,12 @@
         </p:nvSpPr>
         <p:spPr>
           <a:xfrm>
-            <a:off x="777240" y="3886200"/>
-            <a:ext cx="2936138" cy="868680"/>
+            <a:off x="1051560" y="3703320"/>
+            <a:ext cx="2692298" cy="777240"/>
           </a:xfrm>
           <a:prstGeom prst="roundRect">
             <a:avLst>
-              <a:gd name="adj" fmla="val 8421"/>
+              <a:gd name="adj" fmla="val 9412"/>
             </a:avLst>
           </a:prstGeom>
           <a:solidFill>
@@ -10888,8 +10888,8 @@
         </p:nvSpPr>
         <p:spPr>
           <a:xfrm>
-            <a:off x="914400" y="3886200"/>
-            <a:ext cx="2661818" cy="868680"/>
+            <a:off x="1216152" y="3703320"/>
+            <a:ext cx="2363114" cy="777240"/>
           </a:xfrm>
           <a:prstGeom prst="rect">
             <a:avLst/>
@@ -10919,7 +10919,7 @@
               <a:buNone/>
             </a:pPr>
             <a:r>
-              <a:rPr lang="en-US" sz="1350" dirty="0">
+              <a:rPr lang="en-US" sz="1300" dirty="0">
                 <a:solidFill>
                   <a:srgbClr val="63666A"/>
                 </a:solidFill>
@@ -10929,7 +10929,7 @@
               </a:rPr>
               <a:t>A patient tracks a three-year date on their own</a:t>
             </a:r>
-            <a:endParaRPr lang="en-US" sz="1350" dirty="0"/>
+            <a:endParaRPr lang="en-US" sz="1300" dirty="0"/>
           </a:p>
         </p:txBody>
       </p:sp>
@@ -10941,12 +10941,12 @@
         </p:nvSpPr>
         <p:spPr>
           <a:xfrm>
-            <a:off x="777240" y="4892040"/>
-            <a:ext cx="2936138" cy="960120"/>
+            <a:off x="1051560" y="4617720"/>
+            <a:ext cx="2692298" cy="777240"/>
           </a:xfrm>
           <a:prstGeom prst="roundRect">
             <a:avLst>
-              <a:gd name="adj" fmla="val 7619"/>
+              <a:gd name="adj" fmla="val 9412"/>
             </a:avLst>
           </a:prstGeom>
           <a:solidFill>
@@ -10968,8 +10968,8 @@
         </p:nvSpPr>
         <p:spPr>
           <a:xfrm>
-            <a:off x="914400" y="4892040"/>
-            <a:ext cx="2661818" cy="960120"/>
+            <a:off x="1216152" y="4617720"/>
+            <a:ext cx="2363114" cy="777240"/>
           </a:xfrm>
           <a:prstGeom prst="rect">
             <a:avLst/>
@@ -10999,7 +10999,7 @@
               <a:buNone/>
             </a:pPr>
             <a:r>
-              <a:rPr lang="en-US" sz="1350" dirty="0">
+              <a:rPr lang="en-US" sz="1300" dirty="0">
                 <a:solidFill>
                   <a:srgbClr val="222731"/>
                 </a:solidFill>
@@ -11007,9 +11007,9 @@
                 <a:ea typeface="Hanken Grotesk" pitchFamily="34" charset="-122"/>
                 <a:cs typeface="Hanken Grotesk" pitchFamily="34" charset="-120"/>
               </a:rPr>
-              <a:t>We reach out ahead of the due date with a personal, timely heads-up</a:t>
-            </a:r>
-            <a:endParaRPr lang="en-US" sz="1350" dirty="0"/>
+              <a:t>We reach out ahead of the due date with a timely heads-up</a:t>
+            </a:r>
+            <a:endParaRPr lang="en-US" sz="1300" dirty="0"/>
           </a:p>
         </p:txBody>
       </p:sp>
@@ -11021,12 +11021,12 @@
         </p:nvSpPr>
         <p:spPr>
           <a:xfrm>
-            <a:off x="4307738" y="1783080"/>
-            <a:ext cx="3576218" cy="4343400"/>
+            <a:off x="4383938" y="1691640"/>
+            <a:ext cx="3423818" cy="4069080"/>
           </a:xfrm>
           <a:prstGeom prst="roundRect">
             <a:avLst>
-              <a:gd name="adj" fmla="val 3068"/>
+              <a:gd name="adj" fmla="val 3205"/>
             </a:avLst>
           </a:prstGeom>
           <a:solidFill>
@@ -11048,8 +11048,8 @@
         </p:nvSpPr>
         <p:spPr>
           <a:xfrm>
-            <a:off x="4627778" y="2103120"/>
-            <a:ext cx="658368" cy="658368"/>
+            <a:off x="4749698" y="2057400"/>
+            <a:ext cx="585216" cy="585216"/>
           </a:xfrm>
           <a:prstGeom prst="ellipse">
             <a:avLst/>
@@ -11081,8 +11081,8 @@
         </p:blipFill>
         <p:spPr>
           <a:xfrm>
-            <a:off x="4785787" y="2261128"/>
-            <a:ext cx="342351" cy="342351"/>
+            <a:off x="4890150" y="2197852"/>
+            <a:ext cx="304312" cy="304312"/>
           </a:xfrm>
           <a:prstGeom prst="rect">
             <a:avLst/>
@@ -11097,8 +11097,8 @@
         </p:nvSpPr>
         <p:spPr>
           <a:xfrm>
-            <a:off x="4627778" y="2953512"/>
-            <a:ext cx="2936138" cy="274320"/>
+            <a:off x="4749698" y="2834640"/>
+            <a:ext cx="2692298" cy="274320"/>
           </a:xfrm>
           <a:prstGeom prst="rect">
             <a:avLst/>
@@ -11136,8 +11136,8 @@
         </p:nvSpPr>
         <p:spPr>
           <a:xfrm>
-            <a:off x="4627778" y="3227832"/>
-            <a:ext cx="2936138" cy="457200"/>
+            <a:off x="4749698" y="3108960"/>
+            <a:ext cx="2692298" cy="411480"/>
           </a:xfrm>
           <a:prstGeom prst="rect">
             <a:avLst/>
@@ -11153,7 +11153,7 @@
               <a:buNone/>
             </a:pPr>
             <a:r>
-              <a:rPr lang="en-US" sz="2000" b="1" dirty="0">
+              <a:rPr lang="en-US" sz="1900" b="1" dirty="0">
                 <a:solidFill>
                   <a:srgbClr val="222731"/>
                 </a:solidFill>
@@ -11163,7 +11163,7 @@
               </a:rPr>
               <a:t>A two-way conversation</a:t>
             </a:r>
-            <a:endParaRPr lang="en-US" sz="2000" dirty="0"/>
+            <a:endParaRPr lang="en-US" sz="1900" dirty="0"/>
           </a:p>
         </p:txBody>
       </p:sp>
@@ -11175,12 +11175,12 @@
         </p:nvSpPr>
         <p:spPr>
           <a:xfrm>
-            <a:off x="4627778" y="3886200"/>
-            <a:ext cx="2936138" cy="868680"/>
+            <a:off x="4749698" y="3703320"/>
+            <a:ext cx="2692298" cy="777240"/>
           </a:xfrm>
           <a:prstGeom prst="roundRect">
             <a:avLst>
-              <a:gd name="adj" fmla="val 8421"/>
+              <a:gd name="adj" fmla="val 9412"/>
             </a:avLst>
           </a:prstGeom>
           <a:solidFill>
@@ -11202,8 +11202,8 @@
         </p:nvSpPr>
         <p:spPr>
           <a:xfrm>
-            <a:off x="4764938" y="3886200"/>
-            <a:ext cx="2661818" cy="868680"/>
+            <a:off x="4914290" y="3703320"/>
+            <a:ext cx="2363114" cy="777240"/>
           </a:xfrm>
           <a:prstGeom prst="rect">
             <a:avLst/>
@@ -11233,7 +11233,7 @@
               <a:buNone/>
             </a:pPr>
             <a:r>
-              <a:rPr lang="en-US" sz="1350" dirty="0">
+              <a:rPr lang="en-US" sz="1300" dirty="0">
                 <a:solidFill>
                   <a:srgbClr val="63666A"/>
                 </a:solidFill>
@@ -11243,7 +11243,7 @@
               </a:rPr>
               <a:t>One-way reminders that can't be answered</a:t>
             </a:r>
-            <a:endParaRPr lang="en-US" sz="1350" dirty="0"/>
+            <a:endParaRPr lang="en-US" sz="1300" dirty="0"/>
           </a:p>
         </p:txBody>
       </p:sp>
@@ -11255,12 +11255,12 @@
         </p:nvSpPr>
         <p:spPr>
           <a:xfrm>
-            <a:off x="4627778" y="4892040"/>
-            <a:ext cx="2936138" cy="960120"/>
+            <a:off x="4749698" y="4617720"/>
+            <a:ext cx="2692298" cy="777240"/>
           </a:xfrm>
           <a:prstGeom prst="roundRect">
             <a:avLst>
-              <a:gd name="adj" fmla="val 7619"/>
+              <a:gd name="adj" fmla="val 9412"/>
             </a:avLst>
           </a:prstGeom>
           <a:solidFill>
@@ -11282,8 +11282,8 @@
         </p:nvSpPr>
         <p:spPr>
           <a:xfrm>
-            <a:off x="4764938" y="4892040"/>
-            <a:ext cx="2661818" cy="960120"/>
+            <a:off x="4914290" y="4617720"/>
+            <a:ext cx="2363114" cy="777240"/>
           </a:xfrm>
           <a:prstGeom prst="rect">
             <a:avLst/>
@@ -11313,7 +11313,7 @@
               <a:buNone/>
             </a:pPr>
             <a:r>
-              <a:rPr lang="en-US" sz="1350" dirty="0">
+              <a:rPr lang="en-US" sz="1300" dirty="0">
                 <a:solidFill>
                   <a:srgbClr val="222731"/>
                 </a:solidFill>
@@ -11321,9 +11321,9 @@
                 <a:ea typeface="Hanken Grotesk" pitchFamily="34" charset="-122"/>
                 <a:cs typeface="Hanken Grotesk" pitchFamily="34" charset="-120"/>
               </a:rPr>
-              <a:t>Patients reply to confirm, reschedule or ask a question — by SMS or RCS</a:t>
-            </a:r>
-            <a:endParaRPr lang="en-US" sz="1350" dirty="0"/>
+              <a:t>Patients reply to confirm, reschedule or ask, by SMS or RCS</a:t>
+            </a:r>
+            <a:endParaRPr lang="en-US" sz="1300" dirty="0"/>
           </a:p>
         </p:txBody>
       </p:sp>
@@ -11335,12 +11335,12 @@
         </p:nvSpPr>
         <p:spPr>
           <a:xfrm>
-            <a:off x="8158277" y="1783080"/>
-            <a:ext cx="3576218" cy="4343400"/>
+            <a:off x="8082077" y="1691640"/>
+            <a:ext cx="3423818" cy="4069080"/>
           </a:xfrm>
           <a:prstGeom prst="roundRect">
             <a:avLst>
-              <a:gd name="adj" fmla="val 3068"/>
+              <a:gd name="adj" fmla="val 3205"/>
             </a:avLst>
           </a:prstGeom>
           <a:solidFill>
@@ -11362,8 +11362,8 @@
         </p:nvSpPr>
         <p:spPr>
           <a:xfrm>
-            <a:off x="8478317" y="2103120"/>
-            <a:ext cx="658368" cy="658368"/>
+            <a:off x="8447837" y="2057400"/>
+            <a:ext cx="585216" cy="585216"/>
           </a:xfrm>
           <a:prstGeom prst="ellipse">
             <a:avLst/>
@@ -11395,8 +11395,8 @@
         </p:blipFill>
         <p:spPr>
           <a:xfrm>
-            <a:off x="8636325" y="2261128"/>
-            <a:ext cx="342351" cy="342351"/>
+            <a:off x="8588289" y="2197852"/>
+            <a:ext cx="304312" cy="304312"/>
           </a:xfrm>
           <a:prstGeom prst="rect">
             <a:avLst/>
@@ -11411,8 +11411,8 @@
         </p:nvSpPr>
         <p:spPr>
           <a:xfrm>
-            <a:off x="8478317" y="2953512"/>
-            <a:ext cx="2936138" cy="274320"/>
+            <a:off x="8447837" y="2834640"/>
+            <a:ext cx="2692298" cy="274320"/>
           </a:xfrm>
           <a:prstGeom prst="rect">
             <a:avLst/>
@@ -11450,8 +11450,8 @@
         </p:nvSpPr>
         <p:spPr>
           <a:xfrm>
-            <a:off x="8478317" y="3227832"/>
-            <a:ext cx="2936138" cy="457200"/>
+            <a:off x="8447837" y="3108960"/>
+            <a:ext cx="2692298" cy="411480"/>
           </a:xfrm>
           <a:prstGeom prst="rect">
             <a:avLst/>
@@ -11467,7 +11467,7 @@
               <a:buNone/>
             </a:pPr>
             <a:r>
-              <a:rPr lang="en-US" sz="2000" b="1" dirty="0">
+              <a:rPr lang="en-US" sz="1900" b="1" dirty="0">
                 <a:solidFill>
                   <a:srgbClr val="222731"/>
                 </a:solidFill>
@@ -11477,7 +11477,7 @@
               </a:rPr>
               <a:t>Fewer steps to reorder</a:t>
             </a:r>
-            <a:endParaRPr lang="en-US" sz="2000" dirty="0"/>
+            <a:endParaRPr lang="en-US" sz="1900" dirty="0"/>
           </a:p>
         </p:txBody>
       </p:sp>
@@ -11489,12 +11489,12 @@
         </p:nvSpPr>
         <p:spPr>
           <a:xfrm>
-            <a:off x="8478317" y="3886200"/>
-            <a:ext cx="2936138" cy="868680"/>
+            <a:off x="8447837" y="3703320"/>
+            <a:ext cx="2692298" cy="777240"/>
           </a:xfrm>
           <a:prstGeom prst="roundRect">
             <a:avLst>
-              <a:gd name="adj" fmla="val 8421"/>
+              <a:gd name="adj" fmla="val 9412"/>
             </a:avLst>
           </a:prstGeom>
           <a:solidFill>
@@ -11516,8 +11516,8 @@
         </p:nvSpPr>
         <p:spPr>
           <a:xfrm>
-            <a:off x="8615477" y="3886200"/>
-            <a:ext cx="2661818" cy="868680"/>
+            <a:off x="8612429" y="3703320"/>
+            <a:ext cx="2363114" cy="777240"/>
           </a:xfrm>
           <a:prstGeom prst="rect">
             <a:avLst/>
@@ -11547,7 +11547,7 @@
               <a:buNone/>
             </a:pPr>
             <a:r>
-              <a:rPr lang="en-US" sz="1350" dirty="0">
+              <a:rPr lang="en-US" sz="1300" dirty="0">
                 <a:solidFill>
                   <a:srgbClr val="63666A"/>
                 </a:solidFill>
@@ -11557,7 +11557,7 @@
               </a:rPr>
               <a:t>Call the provider, wait for an order, wait for a kit</a:t>
             </a:r>
-            <a:endParaRPr lang="en-US" sz="1350" dirty="0"/>
+            <a:endParaRPr lang="en-US" sz="1300" dirty="0"/>
           </a:p>
         </p:txBody>
       </p:sp>
@@ -11569,12 +11569,12 @@
         </p:nvSpPr>
         <p:spPr>
           <a:xfrm>
-            <a:off x="8478317" y="4892040"/>
-            <a:ext cx="2936138" cy="960120"/>
+            <a:off x="8447837" y="4617720"/>
+            <a:ext cx="2692298" cy="777240"/>
           </a:xfrm>
           <a:prstGeom prst="roundRect">
             <a:avLst>
-              <a:gd name="adj" fmla="val 7619"/>
+              <a:gd name="adj" fmla="val 9412"/>
             </a:avLst>
           </a:prstGeom>
           <a:solidFill>
@@ -11596,8 +11596,8 @@
         </p:nvSpPr>
         <p:spPr>
           <a:xfrm>
-            <a:off x="8615477" y="4892040"/>
-            <a:ext cx="2661818" cy="960120"/>
+            <a:off x="8612429" y="4617720"/>
+            <a:ext cx="2363114" cy="777240"/>
           </a:xfrm>
           <a:prstGeom prst="rect">
             <a:avLst/>
@@ -11627,7 +11627,7 @@
               <a:buNone/>
             </a:pPr>
             <a:r>
-              <a:rPr lang="en-US" sz="1350" dirty="0">
+              <a:rPr lang="en-US" sz="1300" dirty="0">
                 <a:solidFill>
                   <a:srgbClr val="222731"/>
                 </a:solidFill>
@@ -11635,9 +11635,9 @@
                 <a:ea typeface="Hanken Grotesk" pitchFamily="34" charset="-122"/>
                 <a:cs typeface="Hanken Grotesk" pitchFamily="34" charset="-120"/>
               </a:rPr>
-              <a:t>One reply starts it; we coordinate the provider order and ship the kit</a:t>
-            </a:r>
-            <a:endParaRPr lang="en-US" sz="1350" dirty="0"/>
+              <a:t>One reply starts it; we handle the order and ship the kit</a:t>
+            </a:r>
+            <a:endParaRPr lang="en-US" sz="1300" dirty="0"/>
           </a:p>
         </p:txBody>
       </p:sp>
@@ -11649,7 +11649,7 @@
         </p:nvSpPr>
         <p:spPr>
           <a:xfrm>
-            <a:off x="457200" y="6400800"/>
+            <a:off x="685800" y="6400800"/>
             <a:ext cx="5486400" cy="256032"/>
           </a:xfrm>
           <a:prstGeom prst="rect">
@@ -11688,7 +11688,7 @@
         </p:nvSpPr>
         <p:spPr>
           <a:xfrm>
-            <a:off x="11091672" y="6400800"/>
+            <a:off x="10865815" y="6400800"/>
             <a:ext cx="640080" cy="256032"/>
           </a:xfrm>
           <a:prstGeom prst="rect">
@@ -11759,8 +11759,8 @@
         </p:nvSpPr>
         <p:spPr>
           <a:xfrm>
-            <a:off x="457200" y="384048"/>
-            <a:ext cx="8686800" cy="274320"/>
+            <a:off x="685800" y="502920"/>
+            <a:ext cx="8229600" cy="274320"/>
           </a:xfrm>
           <a:prstGeom prst="rect">
             <a:avLst/>
@@ -11798,8 +11798,8 @@
         </p:nvSpPr>
         <p:spPr>
           <a:xfrm>
-            <a:off x="457200" y="676656"/>
-            <a:ext cx="11274552" cy="868680"/>
+            <a:off x="685800" y="804672"/>
+            <a:ext cx="10820095" cy="566928"/>
           </a:xfrm>
           <a:prstGeom prst="rect">
             <a:avLst/>
@@ -11818,7 +11818,7 @@
               <a:buNone/>
             </a:pPr>
             <a:r>
-              <a:rPr lang="en-US" sz="3000" b="1" dirty="0">
+              <a:rPr lang="en-US" sz="2800" b="1" dirty="0">
                 <a:solidFill>
                   <a:srgbClr val="222731"/>
                 </a:solidFill>
@@ -11826,9 +11826,9 @@
                 <a:ea typeface="Bricolage Grotesque" pitchFamily="34" charset="-122"/>
                 <a:cs typeface="Bricolage Grotesque" pitchFamily="34" charset="-120"/>
               </a:rPr>
-              <a:t>In the future journey, every stage has a clear channel moment and a lighter step</a:t>
-            </a:r>
-            <a:endParaRPr lang="en-US" sz="3000" dirty="0"/>
+              <a:t>Each stage gets a channel moment and a lighter step</a:t>
+            </a:r>
+            <a:endParaRPr lang="en-US" sz="2800" dirty="0"/>
           </a:p>
         </p:txBody>
       </p:sp>
@@ -11840,7 +11840,7 @@
         </p:nvSpPr>
         <p:spPr>
           <a:xfrm>
-            <a:off x="10177272" y="384048"/>
+            <a:off x="9951415" y="475488"/>
             <a:ext cx="1554480" cy="292608"/>
           </a:xfrm>
           <a:prstGeom prst="roundRect">
@@ -11867,7 +11867,7 @@
         </p:nvSpPr>
         <p:spPr>
           <a:xfrm>
-            <a:off x="10177272" y="384048"/>
+            <a:off x="9951415" y="475488"/>
             <a:ext cx="1554480" cy="292608"/>
           </a:xfrm>
           <a:prstGeom prst="rect">
@@ -11906,12 +11906,12 @@
         </p:nvSpPr>
         <p:spPr>
           <a:xfrm>
-            <a:off x="1965960" y="1645920"/>
-            <a:ext cx="1865925" cy="548640"/>
+            <a:off x="2148840" y="1691640"/>
+            <a:ext cx="1725107" cy="640080"/>
           </a:xfrm>
           <a:prstGeom prst="roundRect">
             <a:avLst>
-              <a:gd name="adj" fmla="val 13333"/>
+              <a:gd name="adj" fmla="val 11429"/>
             </a:avLst>
           </a:prstGeom>
           <a:solidFill>
@@ -11933,8 +11933,8 @@
         </p:nvSpPr>
         <p:spPr>
           <a:xfrm>
-            <a:off x="2093976" y="1645920"/>
-            <a:ext cx="1683045" cy="548640"/>
+            <a:off x="2295144" y="1691640"/>
+            <a:ext cx="1505651" cy="640080"/>
           </a:xfrm>
           <a:prstGeom prst="rect">
             <a:avLst/>
@@ -11989,12 +11989,12 @@
         </p:nvSpPr>
         <p:spPr>
           <a:xfrm>
-            <a:off x="3941613" y="1645920"/>
-            <a:ext cx="1865925" cy="548640"/>
+            <a:off x="4056827" y="1691640"/>
+            <a:ext cx="1725107" cy="640080"/>
           </a:xfrm>
           <a:prstGeom prst="roundRect">
             <a:avLst>
-              <a:gd name="adj" fmla="val 13333"/>
+              <a:gd name="adj" fmla="val 11429"/>
             </a:avLst>
           </a:prstGeom>
           <a:solidFill>
@@ -12016,8 +12016,8 @@
         </p:nvSpPr>
         <p:spPr>
           <a:xfrm>
-            <a:off x="4069629" y="1645920"/>
-            <a:ext cx="1683045" cy="548640"/>
+            <a:off x="4203131" y="1691640"/>
+            <a:ext cx="1505651" cy="640080"/>
           </a:xfrm>
           <a:prstGeom prst="rect">
             <a:avLst/>
@@ -12072,12 +12072,12 @@
         </p:nvSpPr>
         <p:spPr>
           <a:xfrm>
-            <a:off x="5917265" y="1645920"/>
-            <a:ext cx="1865925" cy="548640"/>
+            <a:off x="5964814" y="1691640"/>
+            <a:ext cx="1725107" cy="640080"/>
           </a:xfrm>
           <a:prstGeom prst="roundRect">
             <a:avLst>
-              <a:gd name="adj" fmla="val 13333"/>
+              <a:gd name="adj" fmla="val 11429"/>
             </a:avLst>
           </a:prstGeom>
           <a:solidFill>
@@ -12099,8 +12099,8 @@
         </p:nvSpPr>
         <p:spPr>
           <a:xfrm>
-            <a:off x="6045281" y="1645920"/>
-            <a:ext cx="1683045" cy="548640"/>
+            <a:off x="6111118" y="1691640"/>
+            <a:ext cx="1505651" cy="640080"/>
           </a:xfrm>
           <a:prstGeom prst="rect">
             <a:avLst/>
@@ -12155,12 +12155,12 @@
         </p:nvSpPr>
         <p:spPr>
           <a:xfrm>
-            <a:off x="7892918" y="1645920"/>
-            <a:ext cx="1865925" cy="548640"/>
+            <a:off x="7872801" y="1691640"/>
+            <a:ext cx="1725107" cy="640080"/>
           </a:xfrm>
           <a:prstGeom prst="roundRect">
             <a:avLst>
-              <a:gd name="adj" fmla="val 13333"/>
+              <a:gd name="adj" fmla="val 11429"/>
             </a:avLst>
           </a:prstGeom>
           <a:solidFill>
@@ -12182,8 +12182,8 @@
         </p:nvSpPr>
         <p:spPr>
           <a:xfrm>
-            <a:off x="8020934" y="1645920"/>
-            <a:ext cx="1683045" cy="548640"/>
+            <a:off x="8019105" y="1691640"/>
+            <a:ext cx="1505651" cy="640080"/>
           </a:xfrm>
           <a:prstGeom prst="rect">
             <a:avLst/>
@@ -12238,12 +12238,12 @@
         </p:nvSpPr>
         <p:spPr>
           <a:xfrm>
-            <a:off x="9868571" y="1645920"/>
-            <a:ext cx="1865925" cy="548640"/>
+            <a:off x="9780788" y="1691640"/>
+            <a:ext cx="1725107" cy="640080"/>
           </a:xfrm>
           <a:prstGeom prst="roundRect">
             <a:avLst>
-              <a:gd name="adj" fmla="val 13333"/>
+              <a:gd name="adj" fmla="val 11429"/>
             </a:avLst>
           </a:prstGeom>
           <a:solidFill>
@@ -12265,8 +12265,8 @@
         </p:nvSpPr>
         <p:spPr>
           <a:xfrm>
-            <a:off x="9996587" y="1645920"/>
-            <a:ext cx="1683045" cy="548640"/>
+            <a:off x="9927092" y="1691640"/>
+            <a:ext cx="1505651" cy="640080"/>
           </a:xfrm>
           <a:prstGeom prst="rect">
             <a:avLst/>
@@ -12321,8 +12321,8 @@
         </p:nvSpPr>
         <p:spPr>
           <a:xfrm>
-            <a:off x="457200" y="2331720"/>
-            <a:ext cx="1371600" cy="457200"/>
+            <a:off x="685800" y="2514600"/>
+            <a:ext cx="1280160" cy="457200"/>
           </a:xfrm>
           <a:prstGeom prst="rect">
             <a:avLst/>
@@ -12360,8 +12360,8 @@
         </p:nvSpPr>
         <p:spPr>
           <a:xfrm>
-            <a:off x="1965960" y="2331720"/>
-            <a:ext cx="1865925" cy="457200"/>
+            <a:off x="2148840" y="2514600"/>
+            <a:ext cx="1725107" cy="457200"/>
           </a:xfrm>
           <a:prstGeom prst="roundRect">
             <a:avLst>
@@ -12387,7 +12387,7 @@
         </p:nvSpPr>
         <p:spPr>
           <a:xfrm>
-            <a:off x="2093976" y="2487168"/>
+            <a:off x="2295144" y="2670048"/>
             <a:ext cx="146304" cy="146304"/>
           </a:xfrm>
           <a:prstGeom prst="ellipse">
@@ -12412,8 +12412,8 @@
         </p:nvSpPr>
         <p:spPr>
           <a:xfrm>
-            <a:off x="2313432" y="2331720"/>
-            <a:ext cx="1454445" cy="457200"/>
+            <a:off x="2532888" y="2514600"/>
+            <a:ext cx="1267907" cy="457200"/>
           </a:xfrm>
           <a:prstGeom prst="rect">
             <a:avLst/>
@@ -12465,8 +12465,8 @@
         </p:nvSpPr>
         <p:spPr>
           <a:xfrm>
-            <a:off x="3941613" y="2331720"/>
-            <a:ext cx="1865925" cy="457200"/>
+            <a:off x="4056827" y="2514600"/>
+            <a:ext cx="1725107" cy="457200"/>
           </a:xfrm>
           <a:prstGeom prst="roundRect">
             <a:avLst>
@@ -12492,7 +12492,7 @@
         </p:nvSpPr>
         <p:spPr>
           <a:xfrm>
-            <a:off x="4069629" y="2487168"/>
+            <a:off x="4203131" y="2670048"/>
             <a:ext cx="146304" cy="146304"/>
           </a:xfrm>
           <a:prstGeom prst="ellipse">
@@ -12517,8 +12517,8 @@
         </p:nvSpPr>
         <p:spPr>
           <a:xfrm>
-            <a:off x="4289085" y="2331720"/>
-            <a:ext cx="1454445" cy="457200"/>
+            <a:off x="4440875" y="2514600"/>
+            <a:ext cx="1267907" cy="457200"/>
           </a:xfrm>
           <a:prstGeom prst="rect">
             <a:avLst/>
@@ -12570,8 +12570,8 @@
         </p:nvSpPr>
         <p:spPr>
           <a:xfrm>
-            <a:off x="5917265" y="2331720"/>
-            <a:ext cx="1865925" cy="457200"/>
+            <a:off x="5964814" y="2514600"/>
+            <a:ext cx="1725107" cy="457200"/>
           </a:xfrm>
           <a:prstGeom prst="roundRect">
             <a:avLst>
@@ -12597,7 +12597,7 @@
         </p:nvSpPr>
         <p:spPr>
           <a:xfrm>
-            <a:off x="6045281" y="2487168"/>
+            <a:off x="6111118" y="2670048"/>
             <a:ext cx="146304" cy="146304"/>
           </a:xfrm>
           <a:prstGeom prst="ellipse">
@@ -12622,8 +12622,8 @@
         </p:nvSpPr>
         <p:spPr>
           <a:xfrm>
-            <a:off x="6264737" y="2331720"/>
-            <a:ext cx="1454445" cy="457200"/>
+            <a:off x="6348862" y="2514600"/>
+            <a:ext cx="1267907" cy="457200"/>
           </a:xfrm>
           <a:prstGeom prst="rect">
             <a:avLst/>
@@ -12675,8 +12675,8 @@
         </p:nvSpPr>
         <p:spPr>
           <a:xfrm>
-            <a:off x="7892918" y="2331720"/>
-            <a:ext cx="1865925" cy="457200"/>
+            <a:off x="7872801" y="2514600"/>
+            <a:ext cx="1725107" cy="457200"/>
           </a:xfrm>
           <a:prstGeom prst="roundRect">
             <a:avLst>
@@ -12702,7 +12702,7 @@
         </p:nvSpPr>
         <p:spPr>
           <a:xfrm>
-            <a:off x="8020934" y="2487168"/>
+            <a:off x="8019105" y="2670048"/>
             <a:ext cx="146304" cy="146304"/>
           </a:xfrm>
           <a:prstGeom prst="ellipse">
@@ -12727,8 +12727,8 @@
         </p:nvSpPr>
         <p:spPr>
           <a:xfrm>
-            <a:off x="8240390" y="2331720"/>
-            <a:ext cx="1454445" cy="457200"/>
+            <a:off x="8256849" y="2514600"/>
+            <a:ext cx="1267907" cy="457200"/>
           </a:xfrm>
           <a:prstGeom prst="rect">
             <a:avLst/>
@@ -12780,8 +12780,8 @@
         </p:nvSpPr>
         <p:spPr>
           <a:xfrm>
-            <a:off x="9868571" y="2331720"/>
-            <a:ext cx="1865925" cy="457200"/>
+            <a:off x="9780788" y="2514600"/>
+            <a:ext cx="1725107" cy="457200"/>
           </a:xfrm>
           <a:prstGeom prst="roundRect">
             <a:avLst>
@@ -12807,7 +12807,7 @@
         </p:nvSpPr>
         <p:spPr>
           <a:xfrm>
-            <a:off x="9996587" y="2487168"/>
+            <a:off x="9927092" y="2670048"/>
             <a:ext cx="146304" cy="146304"/>
           </a:xfrm>
           <a:prstGeom prst="ellipse">
@@ -12832,8 +12832,8 @@
         </p:nvSpPr>
         <p:spPr>
           <a:xfrm>
-            <a:off x="10216043" y="2331720"/>
-            <a:ext cx="1454445" cy="457200"/>
+            <a:off x="10164836" y="2514600"/>
+            <a:ext cx="1267907" cy="457200"/>
           </a:xfrm>
           <a:prstGeom prst="rect">
             <a:avLst/>
@@ -12885,8 +12885,8 @@
         </p:nvSpPr>
         <p:spPr>
           <a:xfrm>
-            <a:off x="457200" y="2880360"/>
-            <a:ext cx="1371600" cy="914400"/>
+            <a:off x="685800" y="3154680"/>
+            <a:ext cx="1280160" cy="777240"/>
           </a:xfrm>
           <a:prstGeom prst="rect">
             <a:avLst/>
@@ -12924,12 +12924,12 @@
         </p:nvSpPr>
         <p:spPr>
           <a:xfrm>
-            <a:off x="1965960" y="2880360"/>
-            <a:ext cx="1865925" cy="914400"/>
+            <a:off x="2148840" y="3154680"/>
+            <a:ext cx="1725107" cy="777240"/>
           </a:xfrm>
           <a:prstGeom prst="roundRect">
             <a:avLst>
-              <a:gd name="adj" fmla="val 8000"/>
+              <a:gd name="adj" fmla="val 9412"/>
             </a:avLst>
           </a:prstGeom>
           <a:solidFill>
@@ -12951,8 +12951,8 @@
         </p:nvSpPr>
         <p:spPr>
           <a:xfrm>
-            <a:off x="2093976" y="2990088"/>
-            <a:ext cx="1609893" cy="731520"/>
+            <a:off x="2295144" y="3282696"/>
+            <a:ext cx="1432499" cy="576072"/>
           </a:xfrm>
           <a:prstGeom prst="rect">
             <a:avLst/>
@@ -12990,12 +12990,12 @@
         </p:nvSpPr>
         <p:spPr>
           <a:xfrm>
-            <a:off x="3941613" y="2880360"/>
-            <a:ext cx="1865925" cy="914400"/>
+            <a:off x="4056827" y="3154680"/>
+            <a:ext cx="1725107" cy="777240"/>
           </a:xfrm>
           <a:prstGeom prst="roundRect">
             <a:avLst>
-              <a:gd name="adj" fmla="val 8000"/>
+              <a:gd name="adj" fmla="val 9412"/>
             </a:avLst>
           </a:prstGeom>
           <a:solidFill>
@@ -13017,8 +13017,8 @@
         </p:nvSpPr>
         <p:spPr>
           <a:xfrm>
-            <a:off x="4069629" y="2990088"/>
-            <a:ext cx="1609893" cy="731520"/>
+            <a:off x="4203131" y="3282696"/>
+            <a:ext cx="1432499" cy="576072"/>
           </a:xfrm>
           <a:prstGeom prst="rect">
             <a:avLst/>
@@ -13042,7 +13042,7 @@
                 <a:ea typeface="Hanken Grotesk" pitchFamily="34" charset="-122"/>
                 <a:cs typeface="Hanken Grotesk" pitchFamily="34" charset="-120"/>
               </a:rPr>
-              <a:t>Replies YES — no login, no call</a:t>
+              <a:t>Replies YES: no login, no call</a:t>
             </a:r>
             <a:endParaRPr lang="en-US" sz="1150" dirty="0"/>
           </a:p>
@@ -13056,12 +13056,12 @@
         </p:nvSpPr>
         <p:spPr>
           <a:xfrm>
-            <a:off x="5917265" y="2880360"/>
-            <a:ext cx="1865925" cy="914400"/>
+            <a:off x="5964814" y="3154680"/>
+            <a:ext cx="1725107" cy="777240"/>
           </a:xfrm>
           <a:prstGeom prst="roundRect">
             <a:avLst>
-              <a:gd name="adj" fmla="val 8000"/>
+              <a:gd name="adj" fmla="val 9412"/>
             </a:avLst>
           </a:prstGeom>
           <a:solidFill>
@@ -13083,8 +13083,8 @@
         </p:nvSpPr>
         <p:spPr>
           <a:xfrm>
-            <a:off x="6045281" y="2990088"/>
-            <a:ext cx="1609893" cy="731520"/>
+            <a:off x="6111118" y="3282696"/>
+            <a:ext cx="1432499" cy="576072"/>
           </a:xfrm>
           <a:prstGeom prst="rect">
             <a:avLst/>
@@ -13108,7 +13108,7 @@
                 <a:ea typeface="Hanken Grotesk" pitchFamily="34" charset="-122"/>
                 <a:cs typeface="Hanken Grotesk" pitchFamily="34" charset="-120"/>
               </a:rPr>
-              <a:t>Taps 'Order my kit'; we handle the provider order</a:t>
+              <a:t>Taps 'Order my kit'; we order it</a:t>
             </a:r>
             <a:endParaRPr lang="en-US" sz="1150" dirty="0"/>
           </a:p>
@@ -13122,12 +13122,12 @@
         </p:nvSpPr>
         <p:spPr>
           <a:xfrm>
-            <a:off x="7892918" y="2880360"/>
-            <a:ext cx="1865925" cy="914400"/>
+            <a:off x="7872801" y="3154680"/>
+            <a:ext cx="1725107" cy="777240"/>
           </a:xfrm>
           <a:prstGeom prst="roundRect">
             <a:avLst>
-              <a:gd name="adj" fmla="val 8000"/>
+              <a:gd name="adj" fmla="val 9412"/>
             </a:avLst>
           </a:prstGeom>
           <a:solidFill>
@@ -13149,8 +13149,8 @@
         </p:nvSpPr>
         <p:spPr>
           <a:xfrm>
-            <a:off x="8020934" y="2990088"/>
-            <a:ext cx="1609893" cy="731520"/>
+            <a:off x="8019105" y="3282696"/>
+            <a:ext cx="1432499" cy="576072"/>
           </a:xfrm>
           <a:prstGeom prst="rect">
             <a:avLst/>
@@ -13174,7 +13174,7 @@
                 <a:ea typeface="Hanken Grotesk" pitchFamily="34" charset="-122"/>
                 <a:cs typeface="Hanken Grotesk" pitchFamily="34" charset="-120"/>
               </a:rPr>
-              <a:t>Tracks the kit and gets a nudge to collect</a:t>
+              <a:t>Tracks the kit and gets a nudge</a:t>
             </a:r>
             <a:endParaRPr lang="en-US" sz="1150" dirty="0"/>
           </a:p>
@@ -13188,12 +13188,12 @@
         </p:nvSpPr>
         <p:spPr>
           <a:xfrm>
-            <a:off x="9868571" y="2880360"/>
-            <a:ext cx="1865925" cy="914400"/>
+            <a:off x="9780788" y="3154680"/>
+            <a:ext cx="1725107" cy="777240"/>
           </a:xfrm>
           <a:prstGeom prst="roundRect">
             <a:avLst>
-              <a:gd name="adj" fmla="val 8000"/>
+              <a:gd name="adj" fmla="val 9412"/>
             </a:avLst>
           </a:prstGeom>
           <a:solidFill>
@@ -13215,8 +13215,8 @@
         </p:nvSpPr>
         <p:spPr>
           <a:xfrm>
-            <a:off x="9996587" y="2990088"/>
-            <a:ext cx="1609893" cy="731520"/>
+            <a:off x="9927092" y="3282696"/>
+            <a:ext cx="1432499" cy="576072"/>
           </a:xfrm>
           <a:prstGeom prst="rect">
             <a:avLst/>
@@ -13240,7 +13240,7 @@
                 <a:ea typeface="Hanken Grotesk" pitchFamily="34" charset="-122"/>
                 <a:cs typeface="Hanken Grotesk" pitchFamily="34" charset="-120"/>
               </a:rPr>
-              <a:t>Sees results and their next due date</a:t>
+              <a:t>Sees results and next due date</a:t>
             </a:r>
             <a:endParaRPr lang="en-US" sz="1150" dirty="0"/>
           </a:p>
@@ -13254,8 +13254,8 @@
         </p:nvSpPr>
         <p:spPr>
           <a:xfrm>
-            <a:off x="457200" y="3886200"/>
-            <a:ext cx="1371600" cy="1097280"/>
+            <a:off x="685800" y="4114800"/>
+            <a:ext cx="1280160" cy="914400"/>
           </a:xfrm>
           <a:prstGeom prst="rect">
             <a:avLst/>
@@ -13293,12 +13293,12 @@
         </p:nvSpPr>
         <p:spPr>
           <a:xfrm>
-            <a:off x="1965960" y="3886200"/>
-            <a:ext cx="9768535" cy="1097280"/>
+            <a:off x="2148840" y="4114800"/>
+            <a:ext cx="9357055" cy="914400"/>
           </a:xfrm>
           <a:prstGeom prst="roundRect">
             <a:avLst>
-              <a:gd name="adj" fmla="val 8333"/>
+              <a:gd name="adj" fmla="val 10000"/>
             </a:avLst>
           </a:prstGeom>
           <a:solidFill>
@@ -13320,8 +13320,8 @@
         </p:nvSpPr>
         <p:spPr>
           <a:xfrm flipV="1">
-            <a:off x="2898922" y="4210263"/>
-            <a:ext cx="1975653" cy="52669"/>
+            <a:off x="3011394" y="4400824"/>
+            <a:ext cx="1907987" cy="28529"/>
           </a:xfrm>
           <a:prstGeom prst="line">
             <a:avLst/>
@@ -13343,8 +13343,8 @@
         </p:nvSpPr>
         <p:spPr>
           <a:xfrm flipV="1">
-            <a:off x="4874575" y="4153205"/>
-            <a:ext cx="1975653" cy="57059"/>
+            <a:off x="4919381" y="4369918"/>
+            <a:ext cx="1907987" cy="30907"/>
           </a:xfrm>
           <a:prstGeom prst="line">
             <a:avLst/>
@@ -13366,8 +13366,8 @@
         </p:nvSpPr>
         <p:spPr>
           <a:xfrm>
-            <a:off x="6850228" y="4153205"/>
-            <a:ext cx="1975653" cy="65837"/>
+            <a:off x="6827368" y="4369918"/>
+            <a:ext cx="1907987" cy="35662"/>
           </a:xfrm>
           <a:prstGeom prst="line">
             <a:avLst/>
@@ -13389,8 +13389,8 @@
         </p:nvSpPr>
         <p:spPr>
           <a:xfrm flipV="1">
-            <a:off x="8825880" y="4131259"/>
-            <a:ext cx="1975653" cy="87782"/>
+            <a:off x="8735355" y="4358030"/>
+            <a:ext cx="1907987" cy="47549"/>
           </a:xfrm>
           <a:prstGeom prst="line">
             <a:avLst/>
@@ -13412,7 +13412,7 @@
         </p:nvSpPr>
         <p:spPr>
           <a:xfrm>
-            <a:off x="2816626" y="4180637"/>
+            <a:off x="2929098" y="4347058"/>
             <a:ext cx="164592" cy="164592"/>
           </a:xfrm>
           <a:prstGeom prst="ellipse">
@@ -13437,8 +13437,8 @@
         </p:nvSpPr>
         <p:spPr>
           <a:xfrm>
-            <a:off x="1965960" y="4381805"/>
-            <a:ext cx="1865925" cy="237744"/>
+            <a:off x="2148840" y="4548226"/>
+            <a:ext cx="1725107" cy="237744"/>
           </a:xfrm>
           <a:prstGeom prst="rect">
             <a:avLst/>
@@ -13476,7 +13476,7 @@
         </p:nvSpPr>
         <p:spPr>
           <a:xfrm>
-            <a:off x="4792279" y="4127967"/>
+            <a:off x="4837085" y="4318528"/>
             <a:ext cx="164592" cy="164592"/>
           </a:xfrm>
           <a:prstGeom prst="ellipse">
@@ -13501,8 +13501,8 @@
         </p:nvSpPr>
         <p:spPr>
           <a:xfrm>
-            <a:off x="3941613" y="4329135"/>
-            <a:ext cx="1865925" cy="237744"/>
+            <a:off x="4056827" y="4519696"/>
+            <a:ext cx="1725107" cy="237744"/>
           </a:xfrm>
           <a:prstGeom prst="rect">
             <a:avLst/>
@@ -13540,7 +13540,7 @@
         </p:nvSpPr>
         <p:spPr>
           <a:xfrm>
-            <a:off x="6767932" y="4070909"/>
+            <a:off x="6745072" y="4287622"/>
             <a:ext cx="164592" cy="164592"/>
           </a:xfrm>
           <a:prstGeom prst="ellipse">
@@ -13565,8 +13565,8 @@
         </p:nvSpPr>
         <p:spPr>
           <a:xfrm>
-            <a:off x="5917265" y="4272077"/>
-            <a:ext cx="1865925" cy="237744"/>
+            <a:off x="5964814" y="4488790"/>
+            <a:ext cx="1725107" cy="237744"/>
           </a:xfrm>
           <a:prstGeom prst="rect">
             <a:avLst/>
@@ -13604,7 +13604,7 @@
         </p:nvSpPr>
         <p:spPr>
           <a:xfrm>
-            <a:off x="8743584" y="4136746"/>
+            <a:off x="8653059" y="4323283"/>
             <a:ext cx="164592" cy="164592"/>
           </a:xfrm>
           <a:prstGeom prst="ellipse">
@@ -13629,8 +13629,8 @@
         </p:nvSpPr>
         <p:spPr>
           <a:xfrm>
-            <a:off x="7892918" y="4337914"/>
-            <a:ext cx="1865925" cy="237744"/>
+            <a:off x="7872801" y="4524451"/>
+            <a:ext cx="1725107" cy="237744"/>
           </a:xfrm>
           <a:prstGeom prst="rect">
             <a:avLst/>
@@ -13668,7 +13668,7 @@
         </p:nvSpPr>
         <p:spPr>
           <a:xfrm>
-            <a:off x="10719237" y="4048963"/>
+            <a:off x="10561046" y="4275734"/>
             <a:ext cx="164592" cy="164592"/>
           </a:xfrm>
           <a:prstGeom prst="ellipse">
@@ -13693,8 +13693,8 @@
         </p:nvSpPr>
         <p:spPr>
           <a:xfrm>
-            <a:off x="9868571" y="4250131"/>
-            <a:ext cx="1865925" cy="237744"/>
+            <a:off x="9780788" y="4476902"/>
+            <a:ext cx="1725107" cy="237744"/>
           </a:xfrm>
           <a:prstGeom prst="rect">
             <a:avLst/>
@@ -13732,8 +13732,8 @@
         </p:nvSpPr>
         <p:spPr>
           <a:xfrm>
-            <a:off x="457200" y="5074920"/>
-            <a:ext cx="1371600" cy="1097280"/>
+            <a:off x="685800" y="5212080"/>
+            <a:ext cx="1280160" cy="548640"/>
           </a:xfrm>
           <a:prstGeom prst="rect">
             <a:avLst/>
@@ -13771,12 +13771,12 @@
         </p:nvSpPr>
         <p:spPr>
           <a:xfrm>
-            <a:off x="1965960" y="5074920"/>
-            <a:ext cx="1865925" cy="1097280"/>
+            <a:off x="2148840" y="5212080"/>
+            <a:ext cx="1725107" cy="548640"/>
           </a:xfrm>
           <a:prstGeom prst="roundRect">
             <a:avLst>
-              <a:gd name="adj" fmla="val 6667"/>
+              <a:gd name="adj" fmla="val 13333"/>
             </a:avLst>
           </a:prstGeom>
           <a:solidFill>
@@ -13798,8 +13798,8 @@
         </p:nvSpPr>
         <p:spPr>
           <a:xfrm>
-            <a:off x="2093976" y="5184648"/>
-            <a:ext cx="1609893" cy="914400"/>
+            <a:off x="2295144" y="5340096"/>
+            <a:ext cx="1432499" cy="347472"/>
           </a:xfrm>
           <a:prstGeom prst="rect">
             <a:avLst/>
@@ -13823,7 +13823,7 @@
                 <a:ea typeface="Hanken Grotesk" pitchFamily="34" charset="-122"/>
                 <a:cs typeface="Hanken Grotesk" pitchFamily="34" charset="-120"/>
               </a:rPr>
-              <a:t>We start the conversation first</a:t>
+              <a:t>We start the conversation</a:t>
             </a:r>
             <a:endParaRPr lang="en-US" sz="1150" dirty="0"/>
           </a:p>
@@ -13837,12 +13837,12 @@
         </p:nvSpPr>
         <p:spPr>
           <a:xfrm>
-            <a:off x="3941613" y="5074920"/>
-            <a:ext cx="1865925" cy="1097280"/>
+            <a:off x="4056827" y="5212080"/>
+            <a:ext cx="1725107" cy="548640"/>
           </a:xfrm>
           <a:prstGeom prst="roundRect">
             <a:avLst>
-              <a:gd name="adj" fmla="val 6667"/>
+              <a:gd name="adj" fmla="val 13333"/>
             </a:avLst>
           </a:prstGeom>
           <a:solidFill>
@@ -13864,8 +13864,8 @@
         </p:nvSpPr>
         <p:spPr>
           <a:xfrm>
-            <a:off x="4069629" y="5184648"/>
-            <a:ext cx="1609893" cy="914400"/>
+            <a:off x="4203131" y="5340096"/>
+            <a:ext cx="1432499" cy="347472"/>
           </a:xfrm>
           <a:prstGeom prst="rect">
             <a:avLst/>
@@ -13903,12 +13903,12 @@
         </p:nvSpPr>
         <p:spPr>
           <a:xfrm>
-            <a:off x="5917265" y="5074920"/>
-            <a:ext cx="1865925" cy="1097280"/>
+            <a:off x="5964814" y="5212080"/>
+            <a:ext cx="1725107" cy="548640"/>
           </a:xfrm>
           <a:prstGeom prst="roundRect">
             <a:avLst>
-              <a:gd name="adj" fmla="val 6667"/>
+              <a:gd name="adj" fmla="val 13333"/>
             </a:avLst>
           </a:prstGeom>
           <a:solidFill>
@@ -13930,8 +13930,8 @@
         </p:nvSpPr>
         <p:spPr>
           <a:xfrm>
-            <a:off x="6045281" y="5184648"/>
-            <a:ext cx="1609893" cy="914400"/>
+            <a:off x="6111118" y="5340096"/>
+            <a:ext cx="1432499" cy="347472"/>
           </a:xfrm>
           <a:prstGeom prst="rect">
             <a:avLst/>
@@ -13955,7 +13955,7 @@
                 <a:ea typeface="Hanken Grotesk" pitchFamily="34" charset="-122"/>
                 <a:cs typeface="Hanken Grotesk" pitchFamily="34" charset="-120"/>
               </a:rPr>
-              <a:t>Provider step removed for the patient</a:t>
+              <a:t>Provider step handled for them</a:t>
             </a:r>
             <a:endParaRPr lang="en-US" sz="1150" dirty="0"/>
           </a:p>
@@ -13969,12 +13969,12 @@
         </p:nvSpPr>
         <p:spPr>
           <a:xfrm>
-            <a:off x="7892918" y="5074920"/>
-            <a:ext cx="1865925" cy="1097280"/>
+            <a:off x="7872801" y="5212080"/>
+            <a:ext cx="1725107" cy="548640"/>
           </a:xfrm>
           <a:prstGeom prst="roundRect">
             <a:avLst>
-              <a:gd name="adj" fmla="val 6667"/>
+              <a:gd name="adj" fmla="val 13333"/>
             </a:avLst>
           </a:prstGeom>
           <a:solidFill>
@@ -13996,8 +13996,8 @@
         </p:nvSpPr>
         <p:spPr>
           <a:xfrm>
-            <a:off x="8020934" y="5184648"/>
-            <a:ext cx="1609893" cy="914400"/>
+            <a:off x="8019105" y="5340096"/>
+            <a:ext cx="1432499" cy="347472"/>
           </a:xfrm>
           <a:prstGeom prst="rect">
             <a:avLst/>
@@ -14035,12 +14035,12 @@
         </p:nvSpPr>
         <p:spPr>
           <a:xfrm>
-            <a:off x="9868571" y="5074920"/>
-            <a:ext cx="1865925" cy="1097280"/>
+            <a:off x="9780788" y="5212080"/>
+            <a:ext cx="1725107" cy="548640"/>
           </a:xfrm>
           <a:prstGeom prst="roundRect">
             <a:avLst>
-              <a:gd name="adj" fmla="val 6667"/>
+              <a:gd name="adj" fmla="val 13333"/>
             </a:avLst>
           </a:prstGeom>
           <a:solidFill>
@@ -14062,8 +14062,8 @@
         </p:nvSpPr>
         <p:spPr>
           <a:xfrm>
-            <a:off x="9996587" y="5184648"/>
-            <a:ext cx="1609893" cy="914400"/>
+            <a:off x="9927092" y="5340096"/>
+            <a:ext cx="1432499" cy="347472"/>
           </a:xfrm>
           <a:prstGeom prst="rect">
             <a:avLst/>
@@ -14087,7 +14087,7 @@
                 <a:ea typeface="Hanken Grotesk" pitchFamily="34" charset="-122"/>
                 <a:cs typeface="Hanken Grotesk" pitchFamily="34" charset="-120"/>
               </a:rPr>
-              <a:t>Next cycle is set up on day one</a:t>
+              <a:t>Next cycle set up on day one</a:t>
             </a:r>
             <a:endParaRPr lang="en-US" sz="1150" dirty="0"/>
           </a:p>
@@ -14101,7 +14101,7 @@
         </p:nvSpPr>
         <p:spPr>
           <a:xfrm>
-            <a:off x="457200" y="6400800"/>
+            <a:off x="685800" y="6400800"/>
             <a:ext cx="5486400" cy="256032"/>
           </a:xfrm>
           <a:prstGeom prst="rect">
@@ -14141,7 +14141,7 @@
         <p:spPr>
           <a:xfrm>
             <a:off x="4754880" y="6400800"/>
-            <a:ext cx="6309360" cy="256032"/>
+            <a:ext cx="5973775" cy="256032"/>
           </a:xfrm>
           <a:prstGeom prst="rect">
             <a:avLst/>
@@ -14179,7 +14179,7 @@
         </p:nvSpPr>
         <p:spPr>
           <a:xfrm>
-            <a:off x="11091672" y="6400800"/>
+            <a:off x="10865815" y="6400800"/>
             <a:ext cx="640080" cy="256032"/>
           </a:xfrm>
           <a:prstGeom prst="rect">
@@ -14250,8 +14250,8 @@
         </p:nvSpPr>
         <p:spPr>
           <a:xfrm>
-            <a:off x="457200" y="384048"/>
-            <a:ext cx="8686800" cy="274320"/>
+            <a:off x="685800" y="502920"/>
+            <a:ext cx="8229600" cy="274320"/>
           </a:xfrm>
           <a:prstGeom prst="rect">
             <a:avLst/>
@@ -14289,8 +14289,8 @@
         </p:nvSpPr>
         <p:spPr>
           <a:xfrm>
-            <a:off x="457200" y="676656"/>
-            <a:ext cx="11274552" cy="868680"/>
+            <a:off x="685800" y="804672"/>
+            <a:ext cx="10820095" cy="566928"/>
           </a:xfrm>
           <a:prstGeom prst="rect">
             <a:avLst/>
@@ -14309,7 +14309,7 @@
               <a:buNone/>
             </a:pPr>
             <a:r>
-              <a:rPr lang="en-US" sz="3000" b="1" dirty="0">
+              <a:rPr lang="en-US" sz="2800" b="1" dirty="0">
                 <a:solidFill>
                   <a:srgbClr val="222731"/>
                 </a:solidFill>
@@ -14317,9 +14317,9 @@
                 <a:ea typeface="Bricolage Grotesque" pitchFamily="34" charset="-122"/>
                 <a:cs typeface="Bricolage Grotesque" pitchFamily="34" charset="-120"/>
               </a:rPr>
-              <a:t>SMS and email set up the rescreen moment early, before patients have to remember</a:t>
-            </a:r>
-            <a:endParaRPr lang="en-US" sz="3000" dirty="0"/>
+              <a:t>SMS and email set up rescreen early</a:t>
+            </a:r>
+            <a:endParaRPr lang="en-US" sz="2800" dirty="0"/>
           </a:p>
         </p:txBody>
       </p:sp>
@@ -14331,7 +14331,7 @@
         </p:nvSpPr>
         <p:spPr>
           <a:xfrm>
-            <a:off x="9994392" y="384048"/>
+            <a:off x="9768535" y="475488"/>
             <a:ext cx="1737360" cy="292608"/>
           </a:xfrm>
           <a:prstGeom prst="roundRect">
@@ -14358,7 +14358,7 @@
         </p:nvSpPr>
         <p:spPr>
           <a:xfrm>
-            <a:off x="9994392" y="384048"/>
+            <a:off x="9768535" y="475488"/>
             <a:ext cx="1737360" cy="292608"/>
           </a:xfrm>
           <a:prstGeom prst="rect">
@@ -14397,8 +14397,8 @@
         </p:nvSpPr>
         <p:spPr>
           <a:xfrm>
-            <a:off x="798278" y="1790313"/>
-            <a:ext cx="2041579" cy="4328482"/>
+            <a:off x="786917" y="1780346"/>
+            <a:ext cx="1835359" cy="3891261"/>
           </a:xfrm>
           <a:prstGeom prst="roundRect">
             <a:avLst>
@@ -14424,8 +14424,8 @@
         </p:nvSpPr>
         <p:spPr>
           <a:xfrm>
-            <a:off x="935438" y="3435136"/>
-            <a:ext cx="1767259" cy="914400"/>
+            <a:off x="924077" y="3259025"/>
+            <a:ext cx="1561039" cy="914400"/>
           </a:xfrm>
           <a:prstGeom prst="rect">
             <a:avLst/>
@@ -14506,7 +14506,7 @@
         <p:spPr>
           <a:xfrm>
             <a:off x="685800" y="1691640"/>
-            <a:ext cx="2263140" cy="4526280"/>
+            <a:ext cx="2034540" cy="4069080"/>
           </a:xfrm>
           <a:prstGeom prst="rect">
             <a:avLst/>
@@ -14521,8 +14521,8 @@
         </p:nvSpPr>
         <p:spPr>
           <a:xfrm>
-            <a:off x="3314700" y="1737360"/>
-            <a:ext cx="2514600" cy="384048"/>
+            <a:off x="3086100" y="1691640"/>
+            <a:ext cx="2377440" cy="384048"/>
           </a:xfrm>
           <a:prstGeom prst="roundRect">
             <a:avLst>
@@ -14548,7 +14548,7 @@
         </p:nvSpPr>
         <p:spPr>
           <a:xfrm>
-            <a:off x="3451860" y="1856232"/>
+            <a:off x="3223260" y="1810512"/>
             <a:ext cx="146304" cy="146304"/>
           </a:xfrm>
           <a:prstGeom prst="ellipse">
@@ -14573,8 +14573,8 @@
         </p:nvSpPr>
         <p:spPr>
           <a:xfrm>
-            <a:off x="3680460" y="1737360"/>
-            <a:ext cx="2103120" cy="384048"/>
+            <a:off x="3451860" y="1691640"/>
+            <a:ext cx="1965960" cy="384048"/>
           </a:xfrm>
           <a:prstGeom prst="rect">
             <a:avLst/>
@@ -14626,7 +14626,7 @@
         </p:nvSpPr>
         <p:spPr>
           <a:xfrm>
-            <a:off x="3314700" y="2514600"/>
+            <a:off x="3086100" y="2468880"/>
             <a:ext cx="329184" cy="329184"/>
           </a:xfrm>
           <a:prstGeom prst="ellipse">
@@ -14651,7 +14651,7 @@
         </p:nvSpPr>
         <p:spPr>
           <a:xfrm>
-            <a:off x="3314700" y="2514600"/>
+            <a:off x="3086100" y="2468880"/>
             <a:ext cx="329184" cy="329184"/>
           </a:xfrm>
           <a:prstGeom prst="rect">
@@ -14690,8 +14690,8 @@
         </p:nvSpPr>
         <p:spPr>
           <a:xfrm>
-            <a:off x="3790188" y="2496312"/>
-            <a:ext cx="2130552" cy="292608"/>
+            <a:off x="3598164" y="2450592"/>
+            <a:ext cx="2269084" cy="292608"/>
           </a:xfrm>
           <a:prstGeom prst="rect">
             <a:avLst/>
@@ -14729,8 +14729,8 @@
         </p:nvSpPr>
         <p:spPr>
           <a:xfrm>
-            <a:off x="3790188" y="2825496"/>
-            <a:ext cx="2130552" cy="731520"/>
+            <a:off x="3598164" y="2798064"/>
+            <a:ext cx="2269084" cy="685800"/>
           </a:xfrm>
           <a:prstGeom prst="rect">
             <a:avLst/>
@@ -14754,7 +14754,7 @@
                 <a:ea typeface="Hanken Grotesk" pitchFamily="34" charset="-122"/>
                 <a:cs typeface="Hanken Grotesk" pitchFamily="34" charset="-120"/>
               </a:rPr>
-              <a:t>Reintroduces rescreen as the next step in care they already started.</a:t>
+              <a:t>Reintroduces rescreen as the next step in their care.</a:t>
             </a:r>
             <a:endParaRPr lang="en-US" sz="1350" dirty="0"/>
           </a:p>
@@ -14768,7 +14768,7 @@
         </p:nvSpPr>
         <p:spPr>
           <a:xfrm>
-            <a:off x="3314700" y="3611880"/>
+            <a:off x="3086100" y="3566160"/>
             <a:ext cx="329184" cy="329184"/>
           </a:xfrm>
           <a:prstGeom prst="ellipse">
@@ -14793,7 +14793,7 @@
         </p:nvSpPr>
         <p:spPr>
           <a:xfrm>
-            <a:off x="3314700" y="3611880"/>
+            <a:off x="3086100" y="3566160"/>
             <a:ext cx="329184" cy="329184"/>
           </a:xfrm>
           <a:prstGeom prst="rect">
@@ -14832,8 +14832,8 @@
         </p:nvSpPr>
         <p:spPr>
           <a:xfrm>
-            <a:off x="3790188" y="3593592"/>
-            <a:ext cx="2130552" cy="292608"/>
+            <a:off x="3598164" y="3547872"/>
+            <a:ext cx="2269084" cy="292608"/>
           </a:xfrm>
           <a:prstGeom prst="rect">
             <a:avLst/>
@@ -14871,8 +14871,8 @@
         </p:nvSpPr>
         <p:spPr>
           <a:xfrm>
-            <a:off x="3790188" y="3922776"/>
-            <a:ext cx="2130552" cy="731520"/>
+            <a:off x="3598164" y="3895344"/>
+            <a:ext cx="2269084" cy="685800"/>
           </a:xfrm>
           <a:prstGeom prst="rect">
             <a:avLst/>
@@ -14910,7 +14910,7 @@
         </p:nvSpPr>
         <p:spPr>
           <a:xfrm>
-            <a:off x="3314700" y="4709160"/>
+            <a:off x="3086100" y="4663440"/>
             <a:ext cx="329184" cy="329184"/>
           </a:xfrm>
           <a:prstGeom prst="ellipse">
@@ -14935,7 +14935,7 @@
         </p:nvSpPr>
         <p:spPr>
           <a:xfrm>
-            <a:off x="3314700" y="4709160"/>
+            <a:off x="3086100" y="4663440"/>
             <a:ext cx="329184" cy="329184"/>
           </a:xfrm>
           <a:prstGeom prst="rect">
@@ -14974,8 +14974,8 @@
         </p:nvSpPr>
         <p:spPr>
           <a:xfrm>
-            <a:off x="3790188" y="4690872"/>
-            <a:ext cx="2130552" cy="292608"/>
+            <a:off x="3598164" y="4645152"/>
+            <a:ext cx="2269084" cy="292608"/>
           </a:xfrm>
           <a:prstGeom prst="rect">
             <a:avLst/>
@@ -15013,8 +15013,8 @@
         </p:nvSpPr>
         <p:spPr>
           <a:xfrm>
-            <a:off x="3790188" y="5020056"/>
-            <a:ext cx="2130552" cy="731520"/>
+            <a:off x="3598164" y="4992624"/>
+            <a:ext cx="2269084" cy="685800"/>
           </a:xfrm>
           <a:prstGeom prst="rect">
             <a:avLst/>
@@ -15038,7 +15038,7 @@
                 <a:ea typeface="Hanken Grotesk" pitchFamily="34" charset="-122"/>
                 <a:cs typeface="Hanken Grotesk" pitchFamily="34" charset="-120"/>
               </a:rPr>
-              <a:t>Tells them a text is coming, so the SMS feels familiar.</a:t>
+              <a:t>Says a text is coming, so the SMS feels familiar.</a:t>
             </a:r>
             <a:endParaRPr lang="en-US" sz="1350" dirty="0"/>
           </a:p>
@@ -15052,8 +15052,8 @@
         </p:nvSpPr>
         <p:spPr>
           <a:xfrm>
-            <a:off x="6467558" y="1790313"/>
-            <a:ext cx="2041579" cy="4328482"/>
+            <a:off x="6425564" y="1780346"/>
+            <a:ext cx="1835359" cy="3891261"/>
           </a:xfrm>
           <a:prstGeom prst="roundRect">
             <a:avLst>
@@ -15079,8 +15079,8 @@
         </p:nvSpPr>
         <p:spPr>
           <a:xfrm>
-            <a:off x="6604718" y="3435136"/>
-            <a:ext cx="1767259" cy="914400"/>
+            <a:off x="6562724" y="3259025"/>
+            <a:ext cx="1561039" cy="914400"/>
           </a:xfrm>
           <a:prstGeom prst="rect">
             <a:avLst/>
@@ -15160,8 +15160,8 @@
         </p:blipFill>
         <p:spPr>
           <a:xfrm>
-            <a:off x="6355080" y="1691640"/>
-            <a:ext cx="2263140" cy="4526280"/>
+            <a:off x="6324448" y="1691640"/>
+            <a:ext cx="2034540" cy="4069080"/>
           </a:xfrm>
           <a:prstGeom prst="rect">
             <a:avLst/>
@@ -15176,8 +15176,8 @@
         </p:nvSpPr>
         <p:spPr>
           <a:xfrm>
-            <a:off x="8983980" y="1737360"/>
-            <a:ext cx="2514600" cy="384048"/>
+            <a:off x="8724748" y="1691640"/>
+            <a:ext cx="2377440" cy="384048"/>
           </a:xfrm>
           <a:prstGeom prst="roundRect">
             <a:avLst>
@@ -15203,7 +15203,7 @@
         </p:nvSpPr>
         <p:spPr>
           <a:xfrm>
-            <a:off x="9121140" y="1856232"/>
+            <a:off x="8861908" y="1810512"/>
             <a:ext cx="146304" cy="146304"/>
           </a:xfrm>
           <a:prstGeom prst="ellipse">
@@ -15228,8 +15228,8 @@
         </p:nvSpPr>
         <p:spPr>
           <a:xfrm>
-            <a:off x="9349740" y="1737360"/>
-            <a:ext cx="2103120" cy="384048"/>
+            <a:off x="9090508" y="1691640"/>
+            <a:ext cx="1965960" cy="384048"/>
           </a:xfrm>
           <a:prstGeom prst="rect">
             <a:avLst/>
@@ -15281,7 +15281,7 @@
         </p:nvSpPr>
         <p:spPr>
           <a:xfrm>
-            <a:off x="8983980" y="2514600"/>
+            <a:off x="8724748" y="2468880"/>
             <a:ext cx="329184" cy="329184"/>
           </a:xfrm>
           <a:prstGeom prst="ellipse">
@@ -15306,7 +15306,7 @@
         </p:nvSpPr>
         <p:spPr>
           <a:xfrm>
-            <a:off x="8983980" y="2514600"/>
+            <a:off x="8724748" y="2468880"/>
             <a:ext cx="329184" cy="329184"/>
           </a:xfrm>
           <a:prstGeom prst="rect">
@@ -15345,8 +15345,8 @@
         </p:nvSpPr>
         <p:spPr>
           <a:xfrm>
-            <a:off x="9459468" y="2496312"/>
-            <a:ext cx="2130552" cy="292608"/>
+            <a:off x="9236812" y="2450592"/>
+            <a:ext cx="2269084" cy="292608"/>
           </a:xfrm>
           <a:prstGeom prst="rect">
             <a:avLst/>
@@ -15384,8 +15384,8 @@
         </p:nvSpPr>
         <p:spPr>
           <a:xfrm>
-            <a:off x="9459468" y="2825496"/>
-            <a:ext cx="2130552" cy="731520"/>
+            <a:off x="9236812" y="2798064"/>
+            <a:ext cx="2269084" cy="685800"/>
           </a:xfrm>
           <a:prstGeom prst="rect">
             <a:avLst/>
@@ -15409,7 +15409,7 @@
                 <a:ea typeface="Hanken Grotesk" pitchFamily="34" charset="-122"/>
                 <a:cs typeface="Hanken Grotesk" pitchFamily="34" charset="-120"/>
               </a:rPr>
-              <a:t>Patient replies YES to begin the reorder. No login, no call.</a:t>
+              <a:t>Patient replies YES to reorder. No login, no call.</a:t>
             </a:r>
             <a:endParaRPr lang="en-US" sz="1350" dirty="0"/>
           </a:p>
@@ -15423,7 +15423,7 @@
         </p:nvSpPr>
         <p:spPr>
           <a:xfrm>
-            <a:off x="8983980" y="3611880"/>
+            <a:off x="8724748" y="3566160"/>
             <a:ext cx="329184" cy="329184"/>
           </a:xfrm>
           <a:prstGeom prst="ellipse">
@@ -15448,7 +15448,7 @@
         </p:nvSpPr>
         <p:spPr>
           <a:xfrm>
-            <a:off x="8983980" y="3611880"/>
+            <a:off x="8724748" y="3566160"/>
             <a:ext cx="329184" cy="329184"/>
           </a:xfrm>
           <a:prstGeom prst="rect">
@@ -15487,8 +15487,8 @@
         </p:nvSpPr>
         <p:spPr>
           <a:xfrm>
-            <a:off x="9459468" y="3593592"/>
-            <a:ext cx="2130552" cy="292608"/>
+            <a:off x="9236812" y="3547872"/>
+            <a:ext cx="2269084" cy="292608"/>
           </a:xfrm>
           <a:prstGeom prst="rect">
             <a:avLst/>
@@ -15526,8 +15526,8 @@
         </p:nvSpPr>
         <p:spPr>
           <a:xfrm>
-            <a:off x="9459468" y="3922776"/>
-            <a:ext cx="2130552" cy="731520"/>
+            <a:off x="9236812" y="3895344"/>
+            <a:ext cx="2269084" cy="685800"/>
           </a:xfrm>
           <a:prstGeom prst="rect">
             <a:avLst/>
@@ -15565,7 +15565,7 @@
         </p:nvSpPr>
         <p:spPr>
           <a:xfrm>
-            <a:off x="8983980" y="4709160"/>
+            <a:off x="8724748" y="4663440"/>
             <a:ext cx="329184" cy="329184"/>
           </a:xfrm>
           <a:prstGeom prst="ellipse">
@@ -15590,7 +15590,7 @@
         </p:nvSpPr>
         <p:spPr>
           <a:xfrm>
-            <a:off x="8983980" y="4709160"/>
+            <a:off x="8724748" y="4663440"/>
             <a:ext cx="329184" cy="329184"/>
           </a:xfrm>
           <a:prstGeom prst="rect">
@@ -15629,8 +15629,8 @@
         </p:nvSpPr>
         <p:spPr>
           <a:xfrm>
-            <a:off x="9459468" y="4690872"/>
-            <a:ext cx="2130552" cy="292608"/>
+            <a:off x="9236812" y="4645152"/>
+            <a:ext cx="2269084" cy="292608"/>
           </a:xfrm>
           <a:prstGeom prst="rect">
             <a:avLst/>
@@ -15668,8 +15668,8 @@
         </p:nvSpPr>
         <p:spPr>
           <a:xfrm>
-            <a:off x="9459468" y="5020056"/>
-            <a:ext cx="2130552" cy="731520"/>
+            <a:off x="9236812" y="4992624"/>
+            <a:ext cx="2269084" cy="685800"/>
           </a:xfrm>
           <a:prstGeom prst="rect">
             <a:avLst/>
@@ -15707,7 +15707,7 @@
         </p:nvSpPr>
         <p:spPr>
           <a:xfrm>
-            <a:off x="457200" y="6400800"/>
+            <a:off x="685800" y="6400800"/>
             <a:ext cx="5486400" cy="256032"/>
           </a:xfrm>
           <a:prstGeom prst="rect">
@@ -15747,7 +15747,7 @@
         <p:spPr>
           <a:xfrm>
             <a:off x="4754880" y="6400800"/>
-            <a:ext cx="6309360" cy="256032"/>
+            <a:ext cx="5973775" cy="256032"/>
           </a:xfrm>
           <a:prstGeom prst="rect">
             <a:avLst/>
@@ -15785,7 +15785,7 @@
         </p:nvSpPr>
         <p:spPr>
           <a:xfrm>
-            <a:off x="11091672" y="6400800"/>
+            <a:off x="10865815" y="6400800"/>
             <a:ext cx="640080" cy="256032"/>
           </a:xfrm>
           <a:prstGeom prst="rect">
@@ -15856,8 +15856,8 @@
         </p:nvSpPr>
         <p:spPr>
           <a:xfrm>
-            <a:off x="457200" y="384048"/>
-            <a:ext cx="8686800" cy="274320"/>
+            <a:off x="685800" y="502920"/>
+            <a:ext cx="8229600" cy="274320"/>
           </a:xfrm>
           <a:prstGeom prst="rect">
             <a:avLst/>
@@ -15895,8 +15895,8 @@
         </p:nvSpPr>
         <p:spPr>
           <a:xfrm>
-            <a:off x="457200" y="676656"/>
-            <a:ext cx="11274552" cy="868680"/>
+            <a:off x="685800" y="804672"/>
+            <a:ext cx="10820095" cy="566928"/>
           </a:xfrm>
           <a:prstGeom prst="rect">
             <a:avLst/>
@@ -15915,7 +15915,7 @@
               <a:buNone/>
             </a:pPr>
             <a:r>
-              <a:rPr lang="en-US" sz="3000" b="1" dirty="0">
+              <a:rPr lang="en-US" sz="2800" b="1" dirty="0">
                 <a:solidFill>
                   <a:srgbClr val="222731"/>
                 </a:solidFill>
@@ -15923,9 +15923,9 @@
                 <a:ea typeface="Bricolage Grotesque" pitchFamily="34" charset="-122"/>
                 <a:cs typeface="Bricolage Grotesque" pitchFamily="34" charset="-120"/>
               </a:rPr>
-              <a:t>Two-way RCS lets patients confirm, reschedule or ask — in one conversation</a:t>
-            </a:r>
-            <a:endParaRPr lang="en-US" sz="3000" dirty="0"/>
+              <a:t>Two-way RCS lets patients confirm, reschedule or ask</a:t>
+            </a:r>
+            <a:endParaRPr lang="en-US" sz="2800" dirty="0"/>
           </a:p>
         </p:txBody>
       </p:sp>
@@ -15937,7 +15937,7 @@
         </p:nvSpPr>
         <p:spPr>
           <a:xfrm>
-            <a:off x="9994392" y="384048"/>
+            <a:off x="9768535" y="475488"/>
             <a:ext cx="1737360" cy="292608"/>
           </a:xfrm>
           <a:prstGeom prst="roundRect">
@@ -15964,7 +15964,7 @@
         </p:nvSpPr>
         <p:spPr>
           <a:xfrm>
-            <a:off x="9994392" y="384048"/>
+            <a:off x="9768535" y="475488"/>
             <a:ext cx="1737360" cy="292608"/>
           </a:xfrm>
           <a:prstGeom prst="rect">
@@ -16003,8 +16003,8 @@
         </p:nvSpPr>
         <p:spPr>
           <a:xfrm>
-            <a:off x="1049066" y="1807513"/>
-            <a:ext cx="1978920" cy="4294534"/>
+            <a:off x="1172624" y="1795808"/>
+            <a:ext cx="1779029" cy="3860743"/>
           </a:xfrm>
           <a:prstGeom prst="roundRect">
             <a:avLst>
@@ -16030,8 +16030,8 @@
         </p:nvSpPr>
         <p:spPr>
           <a:xfrm>
-            <a:off x="1186226" y="3439436"/>
-            <a:ext cx="1704600" cy="914400"/>
+            <a:off x="1309784" y="3262891"/>
+            <a:ext cx="1504709" cy="914400"/>
           </a:xfrm>
           <a:prstGeom prst="rect">
             <a:avLst/>
@@ -16111,8 +16111,8 @@
         </p:blipFill>
         <p:spPr>
           <a:xfrm>
-            <a:off x="914400" y="1691640"/>
-            <a:ext cx="2244436" cy="4526280"/>
+            <a:off x="1051560" y="1691640"/>
+            <a:ext cx="2017726" cy="4069080"/>
           </a:xfrm>
           <a:prstGeom prst="rect">
             <a:avLst/>
@@ -16127,12 +16127,12 @@
         </p:nvSpPr>
         <p:spPr>
           <a:xfrm>
-            <a:off x="3798916" y="1783080"/>
-            <a:ext cx="7935579" cy="1298448"/>
+            <a:off x="3800806" y="1691640"/>
+            <a:ext cx="7705090" cy="1173480"/>
           </a:xfrm>
           <a:prstGeom prst="roundRect">
             <a:avLst>
-              <a:gd name="adj" fmla="val 8451"/>
+              <a:gd name="adj" fmla="val 9351"/>
             </a:avLst>
           </a:prstGeom>
           <a:solidFill>
@@ -16154,7 +16154,7 @@
         </p:nvSpPr>
         <p:spPr>
           <a:xfrm>
-            <a:off x="4073236" y="2057400"/>
+            <a:off x="4166566" y="1965960"/>
             <a:ext cx="384048" cy="384048"/>
           </a:xfrm>
           <a:prstGeom prst="ellipse">
@@ -16179,7 +16179,7 @@
         </p:nvSpPr>
         <p:spPr>
           <a:xfrm>
-            <a:off x="4073236" y="2057400"/>
+            <a:off x="4166566" y="1965960"/>
             <a:ext cx="384048" cy="384048"/>
           </a:xfrm>
           <a:prstGeom prst="rect">
@@ -16218,8 +16218,8 @@
         </p:nvSpPr>
         <p:spPr>
           <a:xfrm>
-            <a:off x="4667596" y="2020824"/>
-            <a:ext cx="6838299" cy="320040"/>
+            <a:off x="4760926" y="1947672"/>
+            <a:ext cx="6379210" cy="320040"/>
           </a:xfrm>
           <a:prstGeom prst="rect">
             <a:avLst/>
@@ -16257,8 +16257,8 @@
         </p:nvSpPr>
         <p:spPr>
           <a:xfrm>
-            <a:off x="4667596" y="2350008"/>
-            <a:ext cx="6838299" cy="640080"/>
+            <a:off x="4760926" y="2295144"/>
+            <a:ext cx="6379210" cy="441960"/>
           </a:xfrm>
           <a:prstGeom prst="rect">
             <a:avLst/>
@@ -16282,7 +16282,7 @@
                 <a:ea typeface="Hanken Grotesk" pitchFamily="34" charset="-122"/>
                 <a:cs typeface="Hanken Grotesk" pitchFamily="34" charset="-120"/>
               </a:rPr>
-              <a:t>A branded, verified message card explains that rescreen is due, with the patient's due month.</a:t>
+              <a:t>A branded, verified card explains rescreen is due, with the due month.</a:t>
             </a:r>
             <a:endParaRPr lang="en-US" sz="1350" dirty="0"/>
           </a:p>
@@ -16296,12 +16296,12 @@
         </p:nvSpPr>
         <p:spPr>
           <a:xfrm>
-            <a:off x="3798916" y="3246120"/>
-            <a:ext cx="7935579" cy="1298448"/>
+            <a:off x="3800806" y="3139440"/>
+            <a:ext cx="7705090" cy="1173480"/>
           </a:xfrm>
           <a:prstGeom prst="roundRect">
             <a:avLst>
-              <a:gd name="adj" fmla="val 8451"/>
+              <a:gd name="adj" fmla="val 9351"/>
             </a:avLst>
           </a:prstGeom>
           <a:solidFill>
@@ -16323,7 +16323,7 @@
         </p:nvSpPr>
         <p:spPr>
           <a:xfrm>
-            <a:off x="4073236" y="3520440"/>
+            <a:off x="4166566" y="3413760"/>
             <a:ext cx="384048" cy="384048"/>
           </a:xfrm>
           <a:prstGeom prst="ellipse">
@@ -16348,7 +16348,7 @@
         </p:nvSpPr>
         <p:spPr>
           <a:xfrm>
-            <a:off x="4073236" y="3520440"/>
+            <a:off x="4166566" y="3413760"/>
             <a:ext cx="384048" cy="384048"/>
           </a:xfrm>
           <a:prstGeom prst="rect">
@@ -16387,8 +16387,8 @@
         </p:nvSpPr>
         <p:spPr>
           <a:xfrm>
-            <a:off x="4667596" y="3483864"/>
-            <a:ext cx="6838299" cy="320040"/>
+            <a:off x="4760926" y="3395472"/>
+            <a:ext cx="6379210" cy="320040"/>
           </a:xfrm>
           <a:prstGeom prst="rect">
             <a:avLst/>
@@ -16412,7 +16412,7 @@
                 <a:ea typeface="Bricolage Grotesque" pitchFamily="34" charset="-122"/>
                 <a:cs typeface="Bricolage Grotesque" pitchFamily="34" charset="-120"/>
               </a:rPr>
-              <a:t>Patient picks a suggested reply</a:t>
+              <a:t>Patient taps a suggested reply</a:t>
             </a:r>
             <a:endParaRPr lang="en-US" sz="1600" dirty="0"/>
           </a:p>
@@ -16420,57 +16420,18 @@
       </p:sp>
       <p:sp>
         <p:nvSpPr>
-          <p:cNvPr id="18" name="Text 15"/>
-          <p:cNvSpPr txBox="1"/>
-          <p:nvPr/>
-        </p:nvSpPr>
-        <p:spPr>
-          <a:xfrm>
-            <a:off x="4667596" y="3813048"/>
-            <a:ext cx="1783080" cy="548640"/>
-          </a:xfrm>
-          <a:prstGeom prst="rect">
-            <a:avLst/>
-          </a:prstGeom>
-          <a:noFill/>
-          <a:ln/>
-        </p:spPr>
-        <p:txBody>
-          <a:bodyPr wrap="square" lIns="0" tIns="0" rIns="0" bIns="0" rtlCol="0" anchor="t"/>
-          <a:lstStyle/>
-          <a:p>
-            <a:pPr indent="0" marL="0">
-              <a:buNone/>
-            </a:pPr>
-            <a:r>
-              <a:rPr lang="en-US" sz="1350" dirty="0">
-                <a:solidFill>
-                  <a:srgbClr val="63666A"/>
-                </a:solidFill>
-                <a:latin typeface="Hanken Grotesk" pitchFamily="34" charset="0"/>
-                <a:ea typeface="Hanken Grotesk" pitchFamily="34" charset="-122"/>
-                <a:cs typeface="Hanken Grotesk" pitchFamily="34" charset="-120"/>
-              </a:rPr>
-              <a:t>Tap to answer — no typing needed.</a:t>
-            </a:r>
-            <a:endParaRPr lang="en-US" sz="1350" dirty="0"/>
-          </a:p>
-        </p:txBody>
-      </p:sp>
-      <p:sp>
-        <p:nvSpPr>
-          <p:cNvPr id="19" name="Shape 16"/>
+          <p:cNvPr id="18" name="Shape 15"/>
           <p:cNvSpPr/>
           <p:nvPr/>
         </p:nvSpPr>
         <p:spPr>
           <a:xfrm>
-            <a:off x="6542116" y="3904488"/>
-            <a:ext cx="1234440" cy="384048"/>
+            <a:off x="4760926" y="3797808"/>
+            <a:ext cx="1234440" cy="347472"/>
           </a:xfrm>
           <a:prstGeom prst="roundRect">
             <a:avLst>
-              <a:gd name="adj" fmla="val 47619"/>
+              <a:gd name="adj" fmla="val 50000"/>
             </a:avLst>
           </a:prstGeom>
           <a:solidFill>
@@ -16486,14 +16447,14 @@
       </p:sp>
       <p:sp>
         <p:nvSpPr>
-          <p:cNvPr id="20" name="Text 17"/>
-          <p:cNvSpPr txBox="1"/>
-          <p:nvPr/>
-        </p:nvSpPr>
-        <p:spPr>
-          <a:xfrm>
-            <a:off x="6542116" y="3904488"/>
-            <a:ext cx="1234440" cy="384048"/>
+          <p:cNvPr id="19" name="Text 16"/>
+          <p:cNvSpPr txBox="1"/>
+          <p:nvPr/>
+        </p:nvSpPr>
+        <p:spPr>
+          <a:xfrm>
+            <a:off x="4760926" y="3797808"/>
+            <a:ext cx="1234440" cy="347472"/>
           </a:xfrm>
           <a:prstGeom prst="rect">
             <a:avLst/>
@@ -16525,18 +16486,18 @@
       </p:sp>
       <p:sp>
         <p:nvSpPr>
-          <p:cNvPr id="21" name="Shape 18"/>
+          <p:cNvPr id="20" name="Shape 17"/>
           <p:cNvSpPr/>
           <p:nvPr/>
         </p:nvSpPr>
         <p:spPr>
           <a:xfrm>
-            <a:off x="7886284" y="3904488"/>
-            <a:ext cx="1691640" cy="384048"/>
+            <a:off x="6132526" y="3797808"/>
+            <a:ext cx="1691640" cy="347472"/>
           </a:xfrm>
           <a:prstGeom prst="roundRect">
             <a:avLst>
-              <a:gd name="adj" fmla="val 47619"/>
+              <a:gd name="adj" fmla="val 50000"/>
             </a:avLst>
           </a:prstGeom>
           <a:solidFill>
@@ -16552,14 +16513,14 @@
       </p:sp>
       <p:sp>
         <p:nvSpPr>
-          <p:cNvPr id="22" name="Text 19"/>
-          <p:cNvSpPr txBox="1"/>
-          <p:nvPr/>
-        </p:nvSpPr>
-        <p:spPr>
-          <a:xfrm>
-            <a:off x="7886284" y="3904488"/>
-            <a:ext cx="1691640" cy="384048"/>
+          <p:cNvPr id="21" name="Text 18"/>
+          <p:cNvSpPr txBox="1"/>
+          <p:nvPr/>
+        </p:nvSpPr>
+        <p:spPr>
+          <a:xfrm>
+            <a:off x="6132526" y="3797808"/>
+            <a:ext cx="1691640" cy="347472"/>
           </a:xfrm>
           <a:prstGeom prst="rect">
             <a:avLst/>
@@ -16591,18 +16552,18 @@
       </p:sp>
       <p:sp>
         <p:nvSpPr>
-          <p:cNvPr id="23" name="Shape 20"/>
+          <p:cNvPr id="22" name="Shape 19"/>
           <p:cNvSpPr/>
           <p:nvPr/>
         </p:nvSpPr>
         <p:spPr>
           <a:xfrm>
-            <a:off x="9687652" y="3904488"/>
-            <a:ext cx="1463040" cy="384048"/>
+            <a:off x="7961326" y="3797808"/>
+            <a:ext cx="1463040" cy="347472"/>
           </a:xfrm>
           <a:prstGeom prst="roundRect">
             <a:avLst>
-              <a:gd name="adj" fmla="val 47619"/>
+              <a:gd name="adj" fmla="val 50000"/>
             </a:avLst>
           </a:prstGeom>
           <a:solidFill>
@@ -16618,14 +16579,14 @@
       </p:sp>
       <p:sp>
         <p:nvSpPr>
-          <p:cNvPr id="24" name="Text 21"/>
-          <p:cNvSpPr txBox="1"/>
-          <p:nvPr/>
-        </p:nvSpPr>
-        <p:spPr>
-          <a:xfrm>
-            <a:off x="9687652" y="3904488"/>
-            <a:ext cx="1463040" cy="384048"/>
+          <p:cNvPr id="23" name="Text 20"/>
+          <p:cNvSpPr txBox="1"/>
+          <p:nvPr/>
+        </p:nvSpPr>
+        <p:spPr>
+          <a:xfrm>
+            <a:off x="7961326" y="3797808"/>
+            <a:ext cx="1463040" cy="347472"/>
           </a:xfrm>
           <a:prstGeom prst="rect">
             <a:avLst/>
@@ -16657,18 +16618,18 @@
       </p:sp>
       <p:sp>
         <p:nvSpPr>
-          <p:cNvPr id="25" name="Shape 22"/>
+          <p:cNvPr id="24" name="Shape 21"/>
           <p:cNvSpPr/>
           <p:nvPr/>
         </p:nvSpPr>
         <p:spPr>
           <a:xfrm>
-            <a:off x="3798916" y="4709160"/>
-            <a:ext cx="7935579" cy="1298448"/>
+            <a:off x="3800806" y="4587240"/>
+            <a:ext cx="7705090" cy="1173480"/>
           </a:xfrm>
           <a:prstGeom prst="roundRect">
             <a:avLst>
-              <a:gd name="adj" fmla="val 8451"/>
+              <a:gd name="adj" fmla="val 9351"/>
             </a:avLst>
           </a:prstGeom>
           <a:solidFill>
@@ -16684,13 +16645,13 @@
       </p:sp>
       <p:sp>
         <p:nvSpPr>
-          <p:cNvPr id="26" name="Shape 23"/>
+          <p:cNvPr id="25" name="Shape 22"/>
           <p:cNvSpPr/>
           <p:nvPr/>
         </p:nvSpPr>
         <p:spPr>
           <a:xfrm>
-            <a:off x="4073236" y="4983480"/>
+            <a:off x="4166566" y="4861560"/>
             <a:ext cx="384048" cy="384048"/>
           </a:xfrm>
           <a:prstGeom prst="ellipse">
@@ -16709,53 +16670,53 @@
       </p:sp>
       <p:sp>
         <p:nvSpPr>
+          <p:cNvPr id="26" name="Text 23"/>
+          <p:cNvSpPr txBox="1"/>
+          <p:nvPr/>
+        </p:nvSpPr>
+        <p:spPr>
+          <a:xfrm>
+            <a:off x="4166566" y="4861560"/>
+            <a:ext cx="384048" cy="384048"/>
+          </a:xfrm>
+          <a:prstGeom prst="rect">
+            <a:avLst/>
+          </a:prstGeom>
+          <a:noFill/>
+          <a:ln/>
+        </p:spPr>
+        <p:txBody>
+          <a:bodyPr wrap="square" lIns="0" tIns="0" rIns="0" bIns="0" rtlCol="0" anchor="ctr"/>
+          <a:lstStyle/>
+          <a:p>
+            <a:pPr algn="ctr" indent="0" marL="0">
+              <a:buNone/>
+            </a:pPr>
+            <a:r>
+              <a:rPr lang="en-US" sz="1350" b="1" dirty="0">
+                <a:solidFill>
+                  <a:srgbClr val="FFFFFF"/>
+                </a:solidFill>
+                <a:latin typeface="Hanken Grotesk" pitchFamily="34" charset="0"/>
+                <a:ea typeface="Hanken Grotesk" pitchFamily="34" charset="-122"/>
+                <a:cs typeface="Hanken Grotesk" pitchFamily="34" charset="-120"/>
+              </a:rPr>
+              <a:t>3</a:t>
+            </a:r>
+            <a:endParaRPr lang="en-US" sz="1350" dirty="0"/>
+          </a:p>
+        </p:txBody>
+      </p:sp>
+      <p:sp>
+        <p:nvSpPr>
           <p:cNvPr id="27" name="Text 24"/>
           <p:cNvSpPr txBox="1"/>
           <p:nvPr/>
         </p:nvSpPr>
         <p:spPr>
           <a:xfrm>
-            <a:off x="4073236" y="4983480"/>
-            <a:ext cx="384048" cy="384048"/>
-          </a:xfrm>
-          <a:prstGeom prst="rect">
-            <a:avLst/>
-          </a:prstGeom>
-          <a:noFill/>
-          <a:ln/>
-        </p:spPr>
-        <p:txBody>
-          <a:bodyPr wrap="square" lIns="0" tIns="0" rIns="0" bIns="0" rtlCol="0" anchor="ctr"/>
-          <a:lstStyle/>
-          <a:p>
-            <a:pPr algn="ctr" indent="0" marL="0">
-              <a:buNone/>
-            </a:pPr>
-            <a:r>
-              <a:rPr lang="en-US" sz="1350" b="1" dirty="0">
-                <a:solidFill>
-                  <a:srgbClr val="FFFFFF"/>
-                </a:solidFill>
-                <a:latin typeface="Hanken Grotesk" pitchFamily="34" charset="0"/>
-                <a:ea typeface="Hanken Grotesk" pitchFamily="34" charset="-122"/>
-                <a:cs typeface="Hanken Grotesk" pitchFamily="34" charset="-120"/>
-              </a:rPr>
-              <a:t>3</a:t>
-            </a:r>
-            <a:endParaRPr lang="en-US" sz="1350" dirty="0"/>
-          </a:p>
-        </p:txBody>
-      </p:sp>
-      <p:sp>
-        <p:nvSpPr>
-          <p:cNvPr id="28" name="Text 25"/>
-          <p:cNvSpPr txBox="1"/>
-          <p:nvPr/>
-        </p:nvSpPr>
-        <p:spPr>
-          <a:xfrm>
-            <a:off x="4667596" y="4946904"/>
-            <a:ext cx="6838299" cy="320040"/>
+            <a:off x="4760926" y="4843272"/>
+            <a:ext cx="6379210" cy="320040"/>
           </a:xfrm>
           <a:prstGeom prst="rect">
             <a:avLst/>
@@ -16787,14 +16748,53 @@
       </p:sp>
       <p:sp>
         <p:nvSpPr>
+          <p:cNvPr id="28" name="Text 25"/>
+          <p:cNvSpPr txBox="1"/>
+          <p:nvPr/>
+        </p:nvSpPr>
+        <p:spPr>
+          <a:xfrm>
+            <a:off x="4760926" y="5190744"/>
+            <a:ext cx="6379210" cy="441960"/>
+          </a:xfrm>
+          <a:prstGeom prst="rect">
+            <a:avLst/>
+          </a:prstGeom>
+          <a:noFill/>
+          <a:ln/>
+        </p:spPr>
+        <p:txBody>
+          <a:bodyPr wrap="square" lIns="0" tIns="0" rIns="0" bIns="0" rtlCol="0" anchor="t"/>
+          <a:lstStyle/>
+          <a:p>
+            <a:pPr indent="0" marL="0">
+              <a:buNone/>
+            </a:pPr>
+            <a:r>
+              <a:rPr lang="en-US" sz="1350" dirty="0">
+                <a:solidFill>
+                  <a:srgbClr val="63666A"/>
+                </a:solidFill>
+                <a:latin typeface="Hanken Grotesk" pitchFamily="34" charset="0"/>
+                <a:ea typeface="Hanken Grotesk" pitchFamily="34" charset="-122"/>
+                <a:cs typeface="Hanken Grotesk" pitchFamily="34" charset="-120"/>
+              </a:rPr>
+              <a:t>Confirmation, order status and kit tracking arrive in the same thread.</a:t>
+            </a:r>
+            <a:endParaRPr lang="en-US" sz="1350" dirty="0"/>
+          </a:p>
+        </p:txBody>
+      </p:sp>
+      <p:sp>
+        <p:nvSpPr>
           <p:cNvPr id="29" name="Text 26"/>
           <p:cNvSpPr txBox="1"/>
           <p:nvPr/>
         </p:nvSpPr>
         <p:spPr>
           <a:xfrm>
-            <a:off x="4667596" y="5276088"/>
-            <a:ext cx="6838299" cy="640080"/>
+            <a:off x="685800" y="6400800"/>
+            <a:ext cx="5486400" cy="256032"/>
           </a:xfrm>
           <a:prstGeom prst="rect">
             <a:avLst/>
@@ -16810,7 +16810,7 @@
               <a:buNone/>
             </a:pPr>
             <a:r>
-              <a:rPr lang="en-US" sz="1350" dirty="0">
+              <a:rPr lang="en-US" sz="1050" dirty="0">
                 <a:solidFill>
                   <a:srgbClr val="63666A"/>
                 </a:solidFill>
@@ -16818,9 +16818,9 @@
                 <a:ea typeface="Hanken Grotesk" pitchFamily="34" charset="-122"/>
                 <a:cs typeface="Hanken Grotesk" pitchFamily="34" charset="-120"/>
               </a:rPr>
-              <a:t>Confirmation, provider-order status and kit tracking arrive in the same thread.</a:t>
-            </a:r>
-            <a:endParaRPr lang="en-US" sz="1350" dirty="0"/>
+              <a:t>Cologuard Rescreen Experience · New journey concept</a:t>
+            </a:r>
+            <a:endParaRPr lang="en-US" sz="1050" dirty="0"/>
           </a:p>
         </p:txBody>
       </p:sp>
@@ -16832,8 +16832,8 @@
         </p:nvSpPr>
         <p:spPr>
           <a:xfrm>
-            <a:off x="457200" y="6400800"/>
-            <a:ext cx="5486400" cy="256032"/>
+            <a:off x="4754880" y="6400800"/>
+            <a:ext cx="5973775" cy="256032"/>
           </a:xfrm>
           <a:prstGeom prst="rect">
             <a:avLst/>
@@ -16845,7 +16845,7 @@
           <a:bodyPr wrap="square" lIns="0" tIns="0" rIns="0" bIns="0" rtlCol="0" anchor="t"/>
           <a:lstStyle/>
           <a:p>
-            <a:pPr indent="0" marL="0">
+            <a:pPr algn="r" indent="0" marL="0">
               <a:buNone/>
             </a:pPr>
             <a:r>
@@ -16857,7 +16857,7 @@
                 <a:ea typeface="Hanken Grotesk" pitchFamily="34" charset="-122"/>
                 <a:cs typeface="Hanken Grotesk" pitchFamily="34" charset="-120"/>
               </a:rPr>
-              <a:t>Cologuard Rescreen Experience · New journey concept</a:t>
+              <a:t>RCS shown on iPhone frame · Android frame not yet available (GAP-04)</a:t>
             </a:r>
             <a:endParaRPr lang="en-US" sz="1050" dirty="0"/>
           </a:p>
@@ -16871,46 +16871,7 @@
         </p:nvSpPr>
         <p:spPr>
           <a:xfrm>
-            <a:off x="4754880" y="6400800"/>
-            <a:ext cx="6309360" cy="256032"/>
-          </a:xfrm>
-          <a:prstGeom prst="rect">
-            <a:avLst/>
-          </a:prstGeom>
-          <a:noFill/>
-          <a:ln/>
-        </p:spPr>
-        <p:txBody>
-          <a:bodyPr wrap="square" lIns="0" tIns="0" rIns="0" bIns="0" rtlCol="0" anchor="t"/>
-          <a:lstStyle/>
-          <a:p>
-            <a:pPr algn="r" indent="0" marL="0">
-              <a:buNone/>
-            </a:pPr>
-            <a:r>
-              <a:rPr lang="en-US" sz="1050" dirty="0">
-                <a:solidFill>
-                  <a:srgbClr val="63666A"/>
-                </a:solidFill>
-                <a:latin typeface="Hanken Grotesk" pitchFamily="34" charset="0"/>
-                <a:ea typeface="Hanken Grotesk" pitchFamily="34" charset="-122"/>
-                <a:cs typeface="Hanken Grotesk" pitchFamily="34" charset="-120"/>
-              </a:rPr>
-              <a:t>RCS shown on iPhone frame · Android frame not yet available (GAP-04)</a:t>
-            </a:r>
-            <a:endParaRPr lang="en-US" sz="1050" dirty="0"/>
-          </a:p>
-        </p:txBody>
-      </p:sp>
-      <p:sp>
-        <p:nvSpPr>
-          <p:cNvPr id="32" name="Text 29"/>
-          <p:cNvSpPr txBox="1"/>
-          <p:nvPr/>
-        </p:nvSpPr>
-        <p:spPr>
-          <a:xfrm>
-            <a:off x="11091672" y="6400800"/>
+            <a:off x="10865815" y="6400800"/>
             <a:ext cx="640080" cy="256032"/>
           </a:xfrm>
           <a:prstGeom prst="rect">
